--- a/presentacion/Sprint1-AnyColor-Salon-Andy-Conde.pptx
+++ b/presentacion/Sprint1-AnyColor-Salon-Andy-Conde.pptx
@@ -4,23 +4,25 @@
   <p:sldMasterIdLst>
     <p:sldMasterId id="2147483648" r:id="rId1"/>
   </p:sldMasterIdLst>
+  <p:notesMasterIdLst>
+    <p:notesMasterId r:id="rId15"/>
+  </p:notesMasterIdLst>
   <p:sldIdLst>
-    <p:sldId id="256" r:id="rId7"/>
-    <p:sldId id="257" r:id="rId9"/>
-    <p:sldId id="258" r:id="rId10"/>
-    <p:sldId id="259" r:id="rId11"/>
-    <p:sldId id="260" r:id="rId12"/>
-    <p:sldId id="261" r:id="rId13"/>
-    <p:sldId id="262" r:id="rId14"/>
-    <p:sldId id="263" r:id="rId15"/>
-    <p:sldId id="264" r:id="rId16"/>
-    <p:sldId id="265" r:id="rId17"/>
-    <p:sldId id="266" r:id="rId18"/>
-    <p:sldId id="267" r:id="rId19"/>
-    <p:sldId id="268" r:id="rId20"/>
-    <p:sldId id="269" r:id="rId21"/>
+    <p:sldId id="256" r:id="rId2"/>
+    <p:sldId id="257" r:id="rId3"/>
+    <p:sldId id="258" r:id="rId4"/>
+    <p:sldId id="259" r:id="rId5"/>
+    <p:sldId id="260" r:id="rId6"/>
+    <p:sldId id="261" r:id="rId7"/>
+    <p:sldId id="262" r:id="rId8"/>
+    <p:sldId id="263" r:id="rId9"/>
+    <p:sldId id="264" r:id="rId10"/>
+    <p:sldId id="265" r:id="rId11"/>
+    <p:sldId id="266" r:id="rId12"/>
+    <p:sldId id="267" r:id="rId13"/>
+    <p:sldId id="268" r:id="rId14"/>
   </p:sldIdLst>
-  <p:sldSz cx="12191695" cy="6858000" type="screen4x3"/>
+  <p:sldSz cx="12192000" cy="6858000"/>
   <p:notesSz cx="6858000" cy="9144000"/>
   <p:defaultTextStyle>
     <a:defPPr>
@@ -117,11 +119,27 @@
       </a:defRPr>
     </a:lvl9pPr>
   </p:defaultTextStyle>
+  <p:extLst>
+    <p:ext uri="{EFAFB233-063F-42B5-8137-9DF3F51BA10A}">
+      <p15:sldGuideLst xmlns:p15="http://schemas.microsoft.com/office/powerpoint/2012/main">
+        <p15:guide id="1" orient="horz" pos="2160">
+          <p15:clr>
+            <a:srgbClr val="A4A3A4"/>
+          </p15:clr>
+        </p15:guide>
+        <p15:guide id="2" pos="2880">
+          <p15:clr>
+            <a:srgbClr val="A4A3A4"/>
+          </p15:clr>
+        </p15:guide>
+      </p15:sldGuideLst>
+    </p:ext>
+  </p:extLst>
 </p:presentation>
 </file>
 
 <file path=ppt/notesMasters/notesMaster1.xml><?xml version="1.0" encoding="utf-8"?>
-<p:notesMaster xmlns:a="http://schemas.openxmlformats.org/drawingml/2006/main" xmlns:p="http://schemas.openxmlformats.org/presentationml/2006/main" xmlns:r="http://schemas.openxmlformats.org/officeDocument/2006/relationships">
+<p:notesMaster xmlns:a="http://schemas.openxmlformats.org/drawingml/2006/main" xmlns:r="http://schemas.openxmlformats.org/officeDocument/2006/relationships" xmlns:p="http://schemas.openxmlformats.org/presentationml/2006/main">
   <p:cSld>
     <p:bg>
       <p:bgRef idx="1001">
@@ -142,241 +160,16 @@
           <a:chExt cx="0" cy="0"/>
         </a:xfrm>
       </p:grpSpPr>
-      <p:sp>
-        <p:nvSpPr>
-          <p:cNvPr id="2" name="Header Placeholder 1"/>
-          <p:cNvSpPr>
-            <a:spLocks noGrp="1"/>
-          </p:cNvSpPr>
-          <p:nvPr>
-            <p:ph type="hdr" sz="quarter"/>
-          </p:nvPr>
-        </p:nvSpPr>
-        <p:spPr>
-          <a:xfrm>
-            <a:off x="0" y="0"/>
-            <a:ext cx="2971800" cy="457200"/>
-          </a:xfrm>
-          <a:prstGeom prst="rect">
-            <a:avLst/>
-          </a:prstGeom>
-        </p:spPr>
-        <p:txBody>
-          <a:bodyPr vert="horz" lIns="91440" tIns="45720" rIns="91440" bIns="45720" rtlCol="0"/>
-          <a:lstStyle>
-            <a:lvl1pPr algn="l">
-              <a:defRPr sz="1200"/>
-            </a:lvl1pPr>
-          </a:lstStyle>
-          <a:p>
-            <a:endParaRPr lang="en-US"/>
-          </a:p>
-        </p:txBody>
-      </p:sp>
-      <p:sp>
-        <p:nvSpPr>
-          <p:cNvPr id="3" name="Date Placeholder 2"/>
-          <p:cNvSpPr>
-            <a:spLocks noGrp="1"/>
-          </p:cNvSpPr>
-          <p:nvPr>
-            <p:ph type="dt" idx="1"/>
-          </p:nvPr>
-        </p:nvSpPr>
-        <p:spPr>
-          <a:xfrm>
-            <a:off x="3884613" y="0"/>
-            <a:ext cx="2971800" cy="457200"/>
-          </a:xfrm>
-          <a:prstGeom prst="rect">
-            <a:avLst/>
-          </a:prstGeom>
-        </p:spPr>
-        <p:txBody>
-          <a:bodyPr vert="horz" lIns="91440" tIns="45720" rIns="91440" bIns="45720" rtlCol="0"/>
-          <a:lstStyle>
-            <a:lvl1pPr algn="r">
-              <a:defRPr sz="1200"/>
-            </a:lvl1pPr>
-          </a:lstStyle>
-          <a:p>
-            <a:fld id="{0F89C1C7-3DCD-1040-A9CF-14679D8B5DDD}" type="datetimeFigureOut">
-              <a:rPr lang="en-US" smtClean="0"/>
-              <a:t>10/17/16</a:t>
-            </a:fld>
-            <a:endParaRPr lang="en-US"/>
-          </a:p>
-        </p:txBody>
-      </p:sp>
-      <p:sp>
-        <p:nvSpPr>
-          <p:cNvPr id="4" name="Slide Image Placeholder 3"/>
-          <p:cNvSpPr>
-            <a:spLocks noGrp="1" noRot="1" noChangeAspect="1"/>
-          </p:cNvSpPr>
-          <p:nvPr>
-            <p:ph type="sldImg" idx="2"/>
-          </p:nvPr>
-        </p:nvSpPr>
-        <p:spPr>
-          <a:xfrm>
-            <a:off x="1143000" y="685800"/>
-            <a:ext cx="4572000" cy="3429000"/>
-          </a:xfrm>
-          <a:prstGeom prst="rect">
-            <a:avLst/>
-          </a:prstGeom>
-          <a:noFill/>
-          <a:ln w="12700">
-            <a:solidFill>
-              <a:prstClr val="black"/>
-            </a:solidFill>
-          </a:ln>
-        </p:spPr>
-        <p:txBody>
-          <a:bodyPr vert="horz" lIns="91440" tIns="45720" rIns="91440" bIns="45720" rtlCol="0" anchor="ctr"/>
-          <a:lstStyle/>
-          <a:p>
-            <a:endParaRPr lang="en-US"/>
-          </a:p>
-        </p:txBody>
-      </p:sp>
-      <p:sp>
-        <p:nvSpPr>
-          <p:cNvPr id="5" name="Notes Placeholder 4"/>
-          <p:cNvSpPr>
-            <a:spLocks noGrp="1"/>
-          </p:cNvSpPr>
-          <p:nvPr>
-            <p:ph type="body" sz="quarter" idx="3"/>
-          </p:nvPr>
-        </p:nvSpPr>
-        <p:spPr>
-          <a:xfrm>
-            <a:off x="685800" y="4343400"/>
-            <a:ext cx="5486400" cy="4114800"/>
-          </a:xfrm>
-          <a:prstGeom prst="rect">
-            <a:avLst/>
-          </a:prstGeom>
-        </p:spPr>
-        <p:txBody>
-          <a:bodyPr vert="horz" lIns="91440" tIns="45720" rIns="91440" bIns="45720" rtlCol="0"/>
-          <a:lstStyle/>
-          <a:p>
-            <a:pPr lvl="0"/>
-            <a:r>
-              <a:rPr lang="en-US" smtClean="0"/>
-              <a:t>Click to edit Master text styles</a:t>
-            </a:r>
-          </a:p>
-          <a:p>
-            <a:pPr lvl="1"/>
-            <a:r>
-              <a:rPr lang="en-US" smtClean="0"/>
-              <a:t>Second level</a:t>
-            </a:r>
-          </a:p>
-          <a:p>
-            <a:pPr lvl="2"/>
-            <a:r>
-              <a:rPr lang="en-US" smtClean="0"/>
-              <a:t>Third level</a:t>
-            </a:r>
-          </a:p>
-          <a:p>
-            <a:pPr lvl="3"/>
-            <a:r>
-              <a:rPr lang="en-US" smtClean="0"/>
-              <a:t>Fourth level</a:t>
-            </a:r>
-          </a:p>
-          <a:p>
-            <a:pPr lvl="4"/>
-            <a:r>
-              <a:rPr lang="en-US" smtClean="0"/>
-              <a:t>Fifth level</a:t>
-            </a:r>
-            <a:endParaRPr lang="en-US"/>
-          </a:p>
-        </p:txBody>
-      </p:sp>
-      <p:sp>
-        <p:nvSpPr>
-          <p:cNvPr id="6" name="Footer Placeholder 5"/>
-          <p:cNvSpPr>
-            <a:spLocks noGrp="1"/>
-          </p:cNvSpPr>
-          <p:nvPr>
-            <p:ph type="ftr" sz="quarter" idx="4"/>
-          </p:nvPr>
-        </p:nvSpPr>
-        <p:spPr>
-          <a:xfrm>
-            <a:off x="0" y="8685213"/>
-            <a:ext cx="2971800" cy="457200"/>
-          </a:xfrm>
-          <a:prstGeom prst="rect">
-            <a:avLst/>
-          </a:prstGeom>
-        </p:spPr>
-        <p:txBody>
-          <a:bodyPr vert="horz" lIns="91440" tIns="45720" rIns="91440" bIns="45720" rtlCol="0" anchor="b"/>
-          <a:lstStyle>
-            <a:lvl1pPr algn="l">
-              <a:defRPr sz="1200"/>
-            </a:lvl1pPr>
-          </a:lstStyle>
-          <a:p>
-            <a:endParaRPr lang="en-US"/>
-          </a:p>
-        </p:txBody>
-      </p:sp>
-      <p:sp>
-        <p:nvSpPr>
-          <p:cNvPr id="7" name="Slide Number Placeholder 6"/>
-          <p:cNvSpPr>
-            <a:spLocks noGrp="1"/>
-          </p:cNvSpPr>
-          <p:nvPr>
-            <p:ph type="sldNum" sz="quarter" idx="5"/>
-          </p:nvPr>
-        </p:nvSpPr>
-        <p:spPr>
-          <a:xfrm>
-            <a:off x="3884613" y="8685213"/>
-            <a:ext cx="2971800" cy="457200"/>
-          </a:xfrm>
-          <a:prstGeom prst="rect">
-            <a:avLst/>
-          </a:prstGeom>
-        </p:spPr>
-        <p:txBody>
-          <a:bodyPr vert="horz" lIns="91440" tIns="45720" rIns="91440" bIns="45720" rtlCol="0" anchor="b"/>
-          <a:lstStyle>
-            <a:lvl1pPr algn="r">
-              <a:defRPr sz="1200"/>
-            </a:lvl1pPr>
-          </a:lstStyle>
-          <a:p>
-            <a:fld id="{BB5E49A5-4136-284D-997B-48E1D791AD67}" type="slidenum">
-              <a:rPr lang="en-US" smtClean="0"/>
-              <a:t>‹#›</a:t>
-            </a:fld>
-            <a:endParaRPr lang="en-US"/>
-          </a:p>
-        </p:txBody>
-      </p:sp>
     </p:spTree>
     <p:extLst>
       <p:ext uri="{BB962C8B-B14F-4D97-AF65-F5344CB8AC3E}">
-        <p14:creationId xmlns:p14="http://schemas.microsoft.com/office/powerpoint/2010/main" val="2623252185"/>
+        <p14:creationId xmlns:p14="http://schemas.microsoft.com/office/powerpoint/2010/main" val="1616815425"/>
       </p:ext>
     </p:extLst>
   </p:cSld>
   <p:clrMap bg1="lt1" tx1="dk1" bg2="lt2" tx2="dk2" accent1="accent1" accent2="accent2" accent3="accent3" accent4="accent4" accent5="accent5" accent6="accent6" hlink="hlink" folHlink="folHlink"/>
   <p:notesStyle>
-    <a:lvl1pPr marL="0" algn="l" defTabSz="457200" rtl="0" eaLnBrk="1" latinLnBrk="0" hangingPunct="1">
+    <a:lvl1pPr marL="0" algn="l" defTabSz="914400" rtl="0" eaLnBrk="1" latinLnBrk="0" hangingPunct="1">
       <a:defRPr sz="1200" kern="1200">
         <a:solidFill>
           <a:schemeClr val="tx1"/>
@@ -386,7 +179,7 @@
         <a:cs typeface="+mn-cs"/>
       </a:defRPr>
     </a:lvl1pPr>
-    <a:lvl2pPr marL="457200" algn="l" defTabSz="457200" rtl="0" eaLnBrk="1" latinLnBrk="0" hangingPunct="1">
+    <a:lvl2pPr marL="457200" algn="l" defTabSz="914400" rtl="0" eaLnBrk="1" latinLnBrk="0" hangingPunct="1">
       <a:defRPr sz="1200" kern="1200">
         <a:solidFill>
           <a:schemeClr val="tx1"/>
@@ -396,7 +189,7 @@
         <a:cs typeface="+mn-cs"/>
       </a:defRPr>
     </a:lvl2pPr>
-    <a:lvl3pPr marL="914400" algn="l" defTabSz="457200" rtl="0" eaLnBrk="1" latinLnBrk="0" hangingPunct="1">
+    <a:lvl3pPr marL="914400" algn="l" defTabSz="914400" rtl="0" eaLnBrk="1" latinLnBrk="0" hangingPunct="1">
       <a:defRPr sz="1200" kern="1200">
         <a:solidFill>
           <a:schemeClr val="tx1"/>
@@ -406,7 +199,7 @@
         <a:cs typeface="+mn-cs"/>
       </a:defRPr>
     </a:lvl3pPr>
-    <a:lvl4pPr marL="1371600" algn="l" defTabSz="457200" rtl="0" eaLnBrk="1" latinLnBrk="0" hangingPunct="1">
+    <a:lvl4pPr marL="1371600" algn="l" defTabSz="914400" rtl="0" eaLnBrk="1" latinLnBrk="0" hangingPunct="1">
       <a:defRPr sz="1200" kern="1200">
         <a:solidFill>
           <a:schemeClr val="tx1"/>
@@ -416,7 +209,7 @@
         <a:cs typeface="+mn-cs"/>
       </a:defRPr>
     </a:lvl4pPr>
-    <a:lvl5pPr marL="1828800" algn="l" defTabSz="457200" rtl="0" eaLnBrk="1" latinLnBrk="0" hangingPunct="1">
+    <a:lvl5pPr marL="1828800" algn="l" defTabSz="914400" rtl="0" eaLnBrk="1" latinLnBrk="0" hangingPunct="1">
       <a:defRPr sz="1200" kern="1200">
         <a:solidFill>
           <a:schemeClr val="tx1"/>
@@ -426,7 +219,7 @@
         <a:cs typeface="+mn-cs"/>
       </a:defRPr>
     </a:lvl5pPr>
-    <a:lvl6pPr marL="2286000" algn="l" defTabSz="457200" rtl="0" eaLnBrk="1" latinLnBrk="0" hangingPunct="1">
+    <a:lvl6pPr marL="2286000" algn="l" defTabSz="914400" rtl="0" eaLnBrk="1" latinLnBrk="0" hangingPunct="1">
       <a:defRPr sz="1200" kern="1200">
         <a:solidFill>
           <a:schemeClr val="tx1"/>
@@ -436,7 +229,7 @@
         <a:cs typeface="+mn-cs"/>
       </a:defRPr>
     </a:lvl6pPr>
-    <a:lvl7pPr marL="2743200" algn="l" defTabSz="457200" rtl="0" eaLnBrk="1" latinLnBrk="0" hangingPunct="1">
+    <a:lvl7pPr marL="2743200" algn="l" defTabSz="914400" rtl="0" eaLnBrk="1" latinLnBrk="0" hangingPunct="1">
       <a:defRPr sz="1200" kern="1200">
         <a:solidFill>
           <a:schemeClr val="tx1"/>
@@ -446,7 +239,7 @@
         <a:cs typeface="+mn-cs"/>
       </a:defRPr>
     </a:lvl7pPr>
-    <a:lvl8pPr marL="3200400" algn="l" defTabSz="457200" rtl="0" eaLnBrk="1" latinLnBrk="0" hangingPunct="1">
+    <a:lvl8pPr marL="3200400" algn="l" defTabSz="914400" rtl="0" eaLnBrk="1" latinLnBrk="0" hangingPunct="1">
       <a:defRPr sz="1200" kern="1200">
         <a:solidFill>
           <a:schemeClr val="tx1"/>
@@ -456,7 +249,7 @@
         <a:cs typeface="+mn-cs"/>
       </a:defRPr>
     </a:lvl8pPr>
-    <a:lvl9pPr marL="3657600" algn="l" defTabSz="457200" rtl="0" eaLnBrk="1" latinLnBrk="0" hangingPunct="1">
+    <a:lvl9pPr marL="3657600" algn="l" defTabSz="914400" rtl="0" eaLnBrk="1" latinLnBrk="0" hangingPunct="1">
       <a:defRPr sz="1200" kern="1200">
         <a:solidFill>
           <a:schemeClr val="tx1"/>
@@ -471,7 +264,7 @@
 </file>
 
 <file path=ppt/notesSlides/notesSlide1.xml><?xml version="1.0" encoding="utf-8"?>
-<p:notes xmlns:a="http://schemas.openxmlformats.org/drawingml/2006/main" xmlns:p="http://schemas.openxmlformats.org/presentationml/2006/main" xmlns:r="http://schemas.openxmlformats.org/officeDocument/2006/relationships">
+<p:notes xmlns:a="http://schemas.openxmlformats.org/drawingml/2006/main" xmlns:r="http://schemas.openxmlformats.org/officeDocument/2006/relationships" xmlns:p="http://schemas.openxmlformats.org/presentationml/2006/main">
   <p:cSld>
     <p:spTree>
       <p:nvGrpSpPr>
@@ -491,7 +284,7 @@
         <p:nvSpPr>
           <p:cNvPr id="2" name="Slide Image Placeholder 1"/>
           <p:cNvSpPr>
-            <a:spLocks noGrp="1"/>
+            <a:spLocks noGrp="1" noRot="1" noChangeAspect="1"/>
           </p:cNvSpPr>
           <p:nvPr>
             <p:ph type="sldImg" idx="2"/>
@@ -506,7 +299,7 @@
             <a:spLocks noGrp="1"/>
           </p:cNvSpPr>
           <p:nvPr>
-            <p:ph type="body" idx="3" sz="quarter"/>
+            <p:ph type="body" sz="quarter" idx="3"/>
           </p:nvPr>
         </p:nvSpPr>
         <p:spPr/>
@@ -527,7 +320,7 @@
             <a:spLocks noGrp="1"/>
           </p:cNvSpPr>
           <p:nvPr>
-            <p:ph type="sldNum" idx="5" sz="quarter"/>
+            <p:ph type="sldNum" sz="quarter" idx="5"/>
           </p:nvPr>
         </p:nvSpPr>
         <p:spPr/>
@@ -541,7 +334,7 @@
 </file>
 
 <file path=ppt/notesSlides/notesSlide10.xml><?xml version="1.0" encoding="utf-8"?>
-<p:notes xmlns:a="http://schemas.openxmlformats.org/drawingml/2006/main" xmlns:p="http://schemas.openxmlformats.org/presentationml/2006/main" xmlns:r="http://schemas.openxmlformats.org/officeDocument/2006/relationships">
+<p:notes xmlns:a="http://schemas.openxmlformats.org/drawingml/2006/main" xmlns:r="http://schemas.openxmlformats.org/officeDocument/2006/relationships" xmlns:p="http://schemas.openxmlformats.org/presentationml/2006/main">
   <p:cSld>
     <p:spTree>
       <p:nvGrpSpPr>
@@ -561,7 +354,7 @@
         <p:nvSpPr>
           <p:cNvPr id="2" name="Slide Image Placeholder 1"/>
           <p:cNvSpPr>
-            <a:spLocks noGrp="1"/>
+            <a:spLocks noGrp="1" noRot="1" noChangeAspect="1"/>
           </p:cNvSpPr>
           <p:nvPr>
             <p:ph type="sldImg" idx="2"/>
@@ -576,7 +369,7 @@
             <a:spLocks noGrp="1"/>
           </p:cNvSpPr>
           <p:nvPr>
-            <p:ph type="body" idx="3" sz="quarter"/>
+            <p:ph type="body" sz="quarter" idx="3"/>
           </p:nvPr>
         </p:nvSpPr>
         <p:spPr/>
@@ -597,7 +390,7 @@
             <a:spLocks noGrp="1"/>
           </p:cNvSpPr>
           <p:nvPr>
-            <p:ph type="sldNum" idx="5" sz="quarter"/>
+            <p:ph type="sldNum" sz="quarter" idx="5"/>
           </p:nvPr>
         </p:nvSpPr>
         <p:spPr/>
@@ -611,7 +404,7 @@
 </file>
 
 <file path=ppt/notesSlides/notesSlide11.xml><?xml version="1.0" encoding="utf-8"?>
-<p:notes xmlns:a="http://schemas.openxmlformats.org/drawingml/2006/main" xmlns:p="http://schemas.openxmlformats.org/presentationml/2006/main" xmlns:r="http://schemas.openxmlformats.org/officeDocument/2006/relationships">
+<p:notes xmlns:a="http://schemas.openxmlformats.org/drawingml/2006/main" xmlns:r="http://schemas.openxmlformats.org/officeDocument/2006/relationships" xmlns:p="http://schemas.openxmlformats.org/presentationml/2006/main">
   <p:cSld>
     <p:spTree>
       <p:nvGrpSpPr>
@@ -631,7 +424,7 @@
         <p:nvSpPr>
           <p:cNvPr id="2" name="Slide Image Placeholder 1"/>
           <p:cNvSpPr>
-            <a:spLocks noGrp="1"/>
+            <a:spLocks noGrp="1" noRot="1" noChangeAspect="1"/>
           </p:cNvSpPr>
           <p:nvPr>
             <p:ph type="sldImg" idx="2"/>
@@ -646,7 +439,7 @@
             <a:spLocks noGrp="1"/>
           </p:cNvSpPr>
           <p:nvPr>
-            <p:ph type="body" idx="3" sz="quarter"/>
+            <p:ph type="body" sz="quarter" idx="3"/>
           </p:nvPr>
         </p:nvSpPr>
         <p:spPr/>
@@ -667,7 +460,7 @@
             <a:spLocks noGrp="1"/>
           </p:cNvSpPr>
           <p:nvPr>
-            <p:ph type="sldNum" idx="5" sz="quarter"/>
+            <p:ph type="sldNum" sz="quarter" idx="5"/>
           </p:nvPr>
         </p:nvSpPr>
         <p:spPr/>
@@ -681,7 +474,7 @@
 </file>
 
 <file path=ppt/notesSlides/notesSlide12.xml><?xml version="1.0" encoding="utf-8"?>
-<p:notes xmlns:a="http://schemas.openxmlformats.org/drawingml/2006/main" xmlns:p="http://schemas.openxmlformats.org/presentationml/2006/main" xmlns:r="http://schemas.openxmlformats.org/officeDocument/2006/relationships">
+<p:notes xmlns:a="http://schemas.openxmlformats.org/drawingml/2006/main" xmlns:r="http://schemas.openxmlformats.org/officeDocument/2006/relationships" xmlns:p="http://schemas.openxmlformats.org/presentationml/2006/main">
   <p:cSld>
     <p:spTree>
       <p:nvGrpSpPr>
@@ -701,7 +494,7 @@
         <p:nvSpPr>
           <p:cNvPr id="2" name="Slide Image Placeholder 1"/>
           <p:cNvSpPr>
-            <a:spLocks noGrp="1"/>
+            <a:spLocks noGrp="1" noRot="1" noChangeAspect="1"/>
           </p:cNvSpPr>
           <p:nvPr>
             <p:ph type="sldImg" idx="2"/>
@@ -716,7 +509,7 @@
             <a:spLocks noGrp="1"/>
           </p:cNvSpPr>
           <p:nvPr>
-            <p:ph type="body" idx="3" sz="quarter"/>
+            <p:ph type="body" sz="quarter" idx="3"/>
           </p:nvPr>
         </p:nvSpPr>
         <p:spPr/>
@@ -737,7 +530,7 @@
             <a:spLocks noGrp="1"/>
           </p:cNvSpPr>
           <p:nvPr>
-            <p:ph type="sldNum" idx="5" sz="quarter"/>
+            <p:ph type="sldNum" sz="quarter" idx="5"/>
           </p:nvPr>
         </p:nvSpPr>
         <p:spPr/>
@@ -751,7 +544,7 @@
 </file>
 
 <file path=ppt/notesSlides/notesSlide13.xml><?xml version="1.0" encoding="utf-8"?>
-<p:notes xmlns:a="http://schemas.openxmlformats.org/drawingml/2006/main" xmlns:p="http://schemas.openxmlformats.org/presentationml/2006/main" xmlns:r="http://schemas.openxmlformats.org/officeDocument/2006/relationships">
+<p:notes xmlns:a="http://schemas.openxmlformats.org/drawingml/2006/main" xmlns:r="http://schemas.openxmlformats.org/officeDocument/2006/relationships" xmlns:p="http://schemas.openxmlformats.org/presentationml/2006/main">
   <p:cSld>
     <p:spTree>
       <p:nvGrpSpPr>
@@ -771,7 +564,7 @@
         <p:nvSpPr>
           <p:cNvPr id="2" name="Slide Image Placeholder 1"/>
           <p:cNvSpPr>
-            <a:spLocks noGrp="1"/>
+            <a:spLocks noGrp="1" noRot="1" noChangeAspect="1"/>
           </p:cNvSpPr>
           <p:nvPr>
             <p:ph type="sldImg" idx="2"/>
@@ -786,7 +579,7 @@
             <a:spLocks noGrp="1"/>
           </p:cNvSpPr>
           <p:nvPr>
-            <p:ph type="body" idx="3" sz="quarter"/>
+            <p:ph type="body" sz="quarter" idx="3"/>
           </p:nvPr>
         </p:nvSpPr>
         <p:spPr/>
@@ -807,7 +600,7 @@
             <a:spLocks noGrp="1"/>
           </p:cNvSpPr>
           <p:nvPr>
-            <p:ph type="sldNum" idx="5" sz="quarter"/>
+            <p:ph type="sldNum" sz="quarter" idx="5"/>
           </p:nvPr>
         </p:nvSpPr>
         <p:spPr/>
@@ -820,8 +613,8 @@
 </p:notes>
 </file>
 
-<file path=ppt/notesSlides/notesSlide14.xml><?xml version="1.0" encoding="utf-8"?>
-<p:notes xmlns:a="http://schemas.openxmlformats.org/drawingml/2006/main" xmlns:p="http://schemas.openxmlformats.org/presentationml/2006/main" xmlns:r="http://schemas.openxmlformats.org/officeDocument/2006/relationships">
+<file path=ppt/notesSlides/notesSlide2.xml><?xml version="1.0" encoding="utf-8"?>
+<p:notes xmlns:a="http://schemas.openxmlformats.org/drawingml/2006/main" xmlns:r="http://schemas.openxmlformats.org/officeDocument/2006/relationships" xmlns:p="http://schemas.openxmlformats.org/presentationml/2006/main">
   <p:cSld>
     <p:spTree>
       <p:nvGrpSpPr>
@@ -841,7 +634,7 @@
         <p:nvSpPr>
           <p:cNvPr id="2" name="Slide Image Placeholder 1"/>
           <p:cNvSpPr>
-            <a:spLocks noGrp="1"/>
+            <a:spLocks noGrp="1" noRot="1" noChangeAspect="1"/>
           </p:cNvSpPr>
           <p:nvPr>
             <p:ph type="sldImg" idx="2"/>
@@ -856,7 +649,7 @@
             <a:spLocks noGrp="1"/>
           </p:cNvSpPr>
           <p:nvPr>
-            <p:ph type="body" idx="3" sz="quarter"/>
+            <p:ph type="body" sz="quarter" idx="3"/>
           </p:nvPr>
         </p:nvSpPr>
         <p:spPr/>
@@ -865,7 +658,7 @@
           <a:lstStyle/>
           <a:p>
             <a:r>
-              <a:t>Para cerrar: el repositorio quedó organizado como pide la guía. En docs está el análisis con los escenarios de calidad, la arquitectura, el diseño de software y los cuatro niveles C4; en img los diagramas con sus fuentes editables; y en tecnologia el núcleo en TypeScript con sus pruebas. El siguiente sprint es la codificación: el módulo Citas en NestJS con PostgreSQL y Redis reales, la restricción EXCLUDE y las primeras pantallas de reserva. Gracias. (45 s)</a:t>
+              <a:t>Las cadenas de salones con varias sedes todavía manejan la agenda en papel o por WhatsApp personal y la caja en un cuaderno. Eso trae cinco problemas: cruces de citas, stock que no se descuenta, caja sin trazabilidad, comisiones en Excel y un dueño que no ve sus sedes juntas. El reto principal, y el que más pesa en la arquitectura, es el primero: que dos clientas no tomen el mismo estilista a la misma hora aunque reserven al mismo tiempo. (1 min)</a:t>
             </a:r>
           </a:p>
         </p:txBody>
@@ -877,7 +670,7 @@
             <a:spLocks noGrp="1"/>
           </p:cNvSpPr>
           <p:nvPr>
-            <p:ph type="sldNum" idx="5" sz="quarter"/>
+            <p:ph type="sldNum" sz="quarter" idx="5"/>
           </p:nvPr>
         </p:nvSpPr>
         <p:spPr/>
@@ -890,8 +683,8 @@
 </p:notes>
 </file>
 
-<file path=ppt/notesSlides/notesSlide2.xml><?xml version="1.0" encoding="utf-8"?>
-<p:notes xmlns:a="http://schemas.openxmlformats.org/drawingml/2006/main" xmlns:p="http://schemas.openxmlformats.org/presentationml/2006/main" xmlns:r="http://schemas.openxmlformats.org/officeDocument/2006/relationships">
+<file path=ppt/notesSlides/notesSlide3.xml><?xml version="1.0" encoding="utf-8"?>
+<p:notes xmlns:a="http://schemas.openxmlformats.org/drawingml/2006/main" xmlns:r="http://schemas.openxmlformats.org/officeDocument/2006/relationships" xmlns:p="http://schemas.openxmlformats.org/presentationml/2006/main">
   <p:cSld>
     <p:spTree>
       <p:nvGrpSpPr>
@@ -911,7 +704,7 @@
         <p:nvSpPr>
           <p:cNvPr id="2" name="Slide Image Placeholder 1"/>
           <p:cNvSpPr>
-            <a:spLocks noGrp="1"/>
+            <a:spLocks noGrp="1" noRot="1" noChangeAspect="1"/>
           </p:cNvSpPr>
           <p:nvPr>
             <p:ph type="sldImg" idx="2"/>
@@ -926,7 +719,7 @@
             <a:spLocks noGrp="1"/>
           </p:cNvSpPr>
           <p:nvPr>
-            <p:ph type="body" idx="3" sz="quarter"/>
+            <p:ph type="body" sz="quarter" idx="3"/>
           </p:nvPr>
         </p:nvSpPr>
         <p:spPr/>
@@ -935,7 +728,7 @@
           <a:lstStyle/>
           <a:p>
             <a:r>
-              <a:t>Las cadenas de salones con varias sedes todavía manejan la agenda en papel o por WhatsApp personal y la caja en un cuaderno. Eso trae cinco problemas: cruces de citas, stock que no se descuenta, caja sin trazabilidad, comisiones en Excel y un dueño que no ve sus sedes juntas. El reto principal, y el que más pesa en la arquitectura, es el primero: que dos clientas no tomen el mismo estilista a la misma hora aunque reserven al mismo tiempo. (1 min)</a:t>
+              <a:t>Uso un solo nombre por actor en todos los documentos. Son cinco: la cliente que reserva, el estilista que atiende, el cajero que cobra, el administrador de sede que gestiona su local y el superadministrador que ve todas las sedes. Cada uno tiene un rol RBAC, y todo dato pertenece a una sede. Además el sistema se integra con cuatro sistemas externos: pasarela de pagos, mensajería, almacenamiento de objetos y, en el futuro, un proveedor de facturación electrónica. (1 min)</a:t>
             </a:r>
           </a:p>
         </p:txBody>
@@ -947,7 +740,7 @@
             <a:spLocks noGrp="1"/>
           </p:cNvSpPr>
           <p:nvPr>
-            <p:ph type="sldNum" idx="5" sz="quarter"/>
+            <p:ph type="sldNum" sz="quarter" idx="5"/>
           </p:nvPr>
         </p:nvSpPr>
         <p:spPr/>
@@ -960,8 +753,8 @@
 </p:notes>
 </file>
 
-<file path=ppt/notesSlides/notesSlide3.xml><?xml version="1.0" encoding="utf-8"?>
-<p:notes xmlns:a="http://schemas.openxmlformats.org/drawingml/2006/main" xmlns:p="http://schemas.openxmlformats.org/presentationml/2006/main" xmlns:r="http://schemas.openxmlformats.org/officeDocument/2006/relationships">
+<file path=ppt/notesSlides/notesSlide4.xml><?xml version="1.0" encoding="utf-8"?>
+<p:notes xmlns:a="http://schemas.openxmlformats.org/drawingml/2006/main" xmlns:r="http://schemas.openxmlformats.org/officeDocument/2006/relationships" xmlns:p="http://schemas.openxmlformats.org/presentationml/2006/main">
   <p:cSld>
     <p:spTree>
       <p:nvGrpSpPr>
@@ -981,7 +774,7 @@
         <p:nvSpPr>
           <p:cNvPr id="2" name="Slide Image Placeholder 1"/>
           <p:cNvSpPr>
-            <a:spLocks noGrp="1"/>
+            <a:spLocks noGrp="1" noRot="1" noChangeAspect="1"/>
           </p:cNvSpPr>
           <p:nvPr>
             <p:ph type="sldImg" idx="2"/>
@@ -996,7 +789,7 @@
             <a:spLocks noGrp="1"/>
           </p:cNvSpPr>
           <p:nvPr>
-            <p:ph type="body" idx="3" sz="quarter"/>
+            <p:ph type="body" sz="quarter" idx="3"/>
           </p:nvPr>
         </p:nvSpPr>
         <p:spPr/>
@@ -1005,7 +798,7 @@
           <a:lstStyle/>
           <a:p>
             <a:r>
-              <a:t>Uso un solo nombre por actor en todos los documentos. Son cinco: la cliente que reserva, el estilista que atiende, el cajero que cobra, el administrador de sede que gestiona su local y el superadministrador que ve todas las sedes. Cada uno tiene un rol RBAC, y todo dato pertenece a una sede. Además el sistema se integra con cuatro sistemas externos: pasarela de pagos, mensajería, almacenamiento de objetos y, en el futuro, un proveedor de facturación electrónica. (1 min)</a:t>
+              <a:t>Antes de dibujar, identifiqué qué requisitos cambian la forma de la arquitectura. El más fuerte es DA01: evitar reservas solapadas con muchas clientas simultáneas, que sale del RF07 y del atributo de consistencia. Luego escalabilidad, consistencia de caja e inventario, seguridad por sede y mantenibilidad. Cada driver termina en una decisión registrada como ADR, y cada atributo lo convertí en un escenario medible: por ejemplo EQ-05 dice cero citas solapadas, y eso ya está probado. (1 min)</a:t>
             </a:r>
           </a:p>
         </p:txBody>
@@ -1017,7 +810,7 @@
             <a:spLocks noGrp="1"/>
           </p:cNvSpPr>
           <p:nvPr>
-            <p:ph type="sldNum" idx="5" sz="quarter"/>
+            <p:ph type="sldNum" sz="quarter" idx="5"/>
           </p:nvPr>
         </p:nvSpPr>
         <p:spPr/>
@@ -1030,8 +823,8 @@
 </p:notes>
 </file>
 
-<file path=ppt/notesSlides/notesSlide4.xml><?xml version="1.0" encoding="utf-8"?>
-<p:notes xmlns:a="http://schemas.openxmlformats.org/drawingml/2006/main" xmlns:p="http://schemas.openxmlformats.org/presentationml/2006/main" xmlns:r="http://schemas.openxmlformats.org/officeDocument/2006/relationships">
+<file path=ppt/notesSlides/notesSlide5.xml><?xml version="1.0" encoding="utf-8"?>
+<p:notes xmlns:a="http://schemas.openxmlformats.org/drawingml/2006/main" xmlns:r="http://schemas.openxmlformats.org/officeDocument/2006/relationships" xmlns:p="http://schemas.openxmlformats.org/presentationml/2006/main">
   <p:cSld>
     <p:spTree>
       <p:nvGrpSpPr>
@@ -1051,7 +844,7 @@
         <p:nvSpPr>
           <p:cNvPr id="2" name="Slide Image Placeholder 1"/>
           <p:cNvSpPr>
-            <a:spLocks noGrp="1"/>
+            <a:spLocks noGrp="1" noRot="1" noChangeAspect="1"/>
           </p:cNvSpPr>
           <p:nvPr>
             <p:ph type="sldImg" idx="2"/>
@@ -1066,7 +859,7 @@
             <a:spLocks noGrp="1"/>
           </p:cNvSpPr>
           <p:nvPr>
-            <p:ph type="body" idx="3" sz="quarter"/>
+            <p:ph type="body" sz="quarter" idx="3"/>
           </p:nvPr>
         </p:nvSpPr>
         <p:spPr/>
@@ -1075,7 +868,7 @@
           <a:lstStyle/>
           <a:p>
             <a:r>
-              <a:t>Antes de dibujar, identifiqué qué requisitos cambian la forma de la arquitectura. El más fuerte es DA01: evitar reservas solapadas con muchas clientas simultáneas, que sale del RF07 y del atributo de consistencia. Luego escalabilidad, consistencia de caja e inventario, seguridad por sede y mantenibilidad. Cada driver termina en una decisión registrada como ADR, y cada atributo lo convertí en un escenario medible: por ejemplo EQ-05 dice cero citas solapadas, y eso ya está probado. (1 min)</a:t>
+              <a:t>El enfoque es Clean Architecture. Las dependencias apuntan hacia el dominio: presentación usa aplicación, aplicación usa dominio, e infraestructura implementa los contratos que el dominio declara. El dominio tiene las reglas del salón: la cita y sus estados, el rango horario y sus solapes, la venta, el inventario. Elegí Clean y no Hexagonal porque necesito una capa explícita de casos de uso, que es donde vive la lógica de reservar; igual conservo la idea de puertos y adaptadores. (1 min)</a:t>
             </a:r>
           </a:p>
         </p:txBody>
@@ -1087,7 +880,7 @@
             <a:spLocks noGrp="1"/>
           </p:cNvSpPr>
           <p:nvPr>
-            <p:ph type="sldNum" idx="5" sz="quarter"/>
+            <p:ph type="sldNum" sz="quarter" idx="5"/>
           </p:nvPr>
         </p:nvSpPr>
         <p:spPr/>
@@ -1100,8 +893,8 @@
 </p:notes>
 </file>
 
-<file path=ppt/notesSlides/notesSlide5.xml><?xml version="1.0" encoding="utf-8"?>
-<p:notes xmlns:a="http://schemas.openxmlformats.org/drawingml/2006/main" xmlns:p="http://schemas.openxmlformats.org/presentationml/2006/main" xmlns:r="http://schemas.openxmlformats.org/officeDocument/2006/relationships">
+<file path=ppt/notesSlides/notesSlide6.xml><?xml version="1.0" encoding="utf-8"?>
+<p:notes xmlns:a="http://schemas.openxmlformats.org/drawingml/2006/main" xmlns:r="http://schemas.openxmlformats.org/officeDocument/2006/relationships" xmlns:p="http://schemas.openxmlformats.org/presentationml/2006/main">
   <p:cSld>
     <p:spTree>
       <p:nvGrpSpPr>
@@ -1121,7 +914,7 @@
         <p:nvSpPr>
           <p:cNvPr id="2" name="Slide Image Placeholder 1"/>
           <p:cNvSpPr>
-            <a:spLocks noGrp="1"/>
+            <a:spLocks noGrp="1" noRot="1" noChangeAspect="1"/>
           </p:cNvSpPr>
           <p:nvPr>
             <p:ph type="sldImg" idx="2"/>
@@ -1136,7 +929,7 @@
             <a:spLocks noGrp="1"/>
           </p:cNvSpPr>
           <p:nvPr>
-            <p:ph type="body" idx="3" sz="quarter"/>
+            <p:ph type="body" sz="quarter" idx="3"/>
           </p:nvPr>
         </p:nvSpPr>
         <p:spPr/>
@@ -1145,7 +938,7 @@
           <a:lstStyle/>
           <a:p>
             <a:r>
-              <a:t>El enfoque es Clean Architecture. Las dependencias apuntan hacia el dominio: presentación usa aplicación, aplicación usa dominio, e infraestructura implementa los contratos que el dominio declara. El dominio tiene las reglas del salón: la cita y sus estados, el rango horario y sus solapes, la venta, el inventario. Elegí Clean y no Hexagonal porque necesito una capa explícita de casos de uso, que es donde vive la lógica de reservar; igual conservo la idea de puertos y adaptadores. (1 min)</a:t>
+              <a:t>Así se aplica en el caso más difícil. Primero la clienta bloquea el estilista y el sillón por cinco minutos en Redis con SET NX: si otra clienta pide lo mismo, Redis responde nulo y se le devuelve 409. Al confirmar, verifico que el bloqueo siga siendo suyo y vuelvo a consultar la base. Y como última defensa, PostgreSQL tiene una restricción EXCLUDE que impide dos citas solapadas aunque Redis se caiga. Redis acelera, PostgreSQL garantiza. Gracias a Clean Architecture, las 16 pruebas corren sin Redis ni base de datos. (1 min 15)</a:t>
             </a:r>
           </a:p>
         </p:txBody>
@@ -1157,7 +950,7 @@
             <a:spLocks noGrp="1"/>
           </p:cNvSpPr>
           <p:nvPr>
-            <p:ph type="sldNum" idx="5" sz="quarter"/>
+            <p:ph type="sldNum" sz="quarter" idx="5"/>
           </p:nvPr>
         </p:nvSpPr>
         <p:spPr/>
@@ -1170,8 +963,8 @@
 </p:notes>
 </file>
 
-<file path=ppt/notesSlides/notesSlide6.xml><?xml version="1.0" encoding="utf-8"?>
-<p:notes xmlns:a="http://schemas.openxmlformats.org/drawingml/2006/main" xmlns:p="http://schemas.openxmlformats.org/presentationml/2006/main" xmlns:r="http://schemas.openxmlformats.org/officeDocument/2006/relationships">
+<file path=ppt/notesSlides/notesSlide7.xml><?xml version="1.0" encoding="utf-8"?>
+<p:notes xmlns:a="http://schemas.openxmlformats.org/drawingml/2006/main" xmlns:r="http://schemas.openxmlformats.org/officeDocument/2006/relationships" xmlns:p="http://schemas.openxmlformats.org/presentationml/2006/main">
   <p:cSld>
     <p:spTree>
       <p:nvGrpSpPr>
@@ -1191,7 +984,7 @@
         <p:nvSpPr>
           <p:cNvPr id="2" name="Slide Image Placeholder 1"/>
           <p:cNvSpPr>
-            <a:spLocks noGrp="1"/>
+            <a:spLocks noGrp="1" noRot="1" noChangeAspect="1"/>
           </p:cNvSpPr>
           <p:nvPr>
             <p:ph type="sldImg" idx="2"/>
@@ -1206,7 +999,7 @@
             <a:spLocks noGrp="1"/>
           </p:cNvSpPr>
           <p:nvPr>
-            <p:ph type="body" idx="3" sz="quarter"/>
+            <p:ph type="body" sz="quarter" idx="3"/>
           </p:nvPr>
         </p:nvSpPr>
         <p:spPr/>
@@ -1215,7 +1008,7 @@
           <a:lstStyle/>
           <a:p>
             <a:r>
-              <a:t>Así se aplica en el caso más difícil. Primero la clienta bloquea el estilista y el sillón por cinco minutos en Redis con SET NX: si otra clienta pide lo mismo, Redis responde nulo y se le devuelve 409. Al confirmar, verifico que el bloqueo siga siendo suyo y vuelvo a consultar la base. Y como última defensa, PostgreSQL tiene una restricción EXCLUDE que impide dos citas solapadas aunque Redis se caiga. Redis acelera, PostgreSQL garantiza. Gracias a Clean Architecture, las 16 pruebas corren sin Redis ni base de datos. (1 min 15)</a:t>
+              <a:t>El estilo es un monolito modular con un frontend SPA. Un solo backend en NestJS, pero dividido en ocho módulos con fronteras claras: un módulo no toca las tablas de otro. La API no guarda estado, así que en una campaña como el Día de la Madre agrego instancias detrás del balanceador. ¿Por qué no microservicios? Porque una venta descuenta inventario y genera comisión en la misma transacción; separarlos me obligaría a consistencia eventual y a operar muchos servicios siendo un equipo de una persona. (1 min)</a:t>
             </a:r>
           </a:p>
         </p:txBody>
@@ -1227,7 +1020,7 @@
             <a:spLocks noGrp="1"/>
           </p:cNvSpPr>
           <p:nvPr>
-            <p:ph type="sldNum" idx="5" sz="quarter"/>
+            <p:ph type="sldNum" sz="quarter" idx="5"/>
           </p:nvPr>
         </p:nvSpPr>
         <p:spPr/>
@@ -1240,8 +1033,8 @@
 </p:notes>
 </file>
 
-<file path=ppt/notesSlides/notesSlide7.xml><?xml version="1.0" encoding="utf-8"?>
-<p:notes xmlns:a="http://schemas.openxmlformats.org/drawingml/2006/main" xmlns:p="http://schemas.openxmlformats.org/presentationml/2006/main" xmlns:r="http://schemas.openxmlformats.org/officeDocument/2006/relationships">
+<file path=ppt/notesSlides/notesSlide8.xml><?xml version="1.0" encoding="utf-8"?>
+<p:notes xmlns:a="http://schemas.openxmlformats.org/drawingml/2006/main" xmlns:r="http://schemas.openxmlformats.org/officeDocument/2006/relationships" xmlns:p="http://schemas.openxmlformats.org/presentationml/2006/main">
   <p:cSld>
     <p:spTree>
       <p:nvGrpSpPr>
@@ -1261,7 +1054,7 @@
         <p:nvSpPr>
           <p:cNvPr id="2" name="Slide Image Placeholder 1"/>
           <p:cNvSpPr>
-            <a:spLocks noGrp="1"/>
+            <a:spLocks noGrp="1" noRot="1" noChangeAspect="1"/>
           </p:cNvSpPr>
           <p:nvPr>
             <p:ph type="sldImg" idx="2"/>
@@ -1276,7 +1069,7 @@
             <a:spLocks noGrp="1"/>
           </p:cNvSpPr>
           <p:nvPr>
-            <p:ph type="body" idx="3" sz="quarter"/>
+            <p:ph type="body" sz="quarter" idx="3"/>
           </p:nvPr>
         </p:nvSpPr>
         <p:spPr/>
@@ -1285,7 +1078,7 @@
           <a:lstStyle/>
           <a:p>
             <a:r>
-              <a:t>El estilo es un monolito modular con un frontend SPA. Un solo backend en NestJS, pero dividido en ocho módulos con fronteras claras: un módulo no toca las tablas de otro. La API no guarda estado, así que en una campaña como el Día de la Madre agrego instancias detrás del balanceador. ¿Por qué no microservicios? Porque una venta descuenta inventario y genera comisión en la misma transacción; separarlos me obligaría a consistencia eventual y a operar muchos servicios siendo un equipo de una persona. (1 min)</a:t>
+              <a:t>Para comunicar la arquitectura uso el modelo C4, que funciona como un mapa con zoom. Nivel 1, contexto: el sistema como una caja. Nivel 2, contenedores: qué se ejecuta por separado y con qué tecnología. Nivel 3, componentes: los módulos dentro de la API. Nivel 4, código: las clases del módulo Citas. Cada nivel abre una caja del anterior y mantiene sus relaciones. (40 s)</a:t>
             </a:r>
           </a:p>
         </p:txBody>
@@ -1297,7 +1090,7 @@
             <a:spLocks noGrp="1"/>
           </p:cNvSpPr>
           <p:nvPr>
-            <p:ph type="sldNum" idx="5" sz="quarter"/>
+            <p:ph type="sldNum" sz="quarter" idx="5"/>
           </p:nvPr>
         </p:nvSpPr>
         <p:spPr/>
@@ -1310,8 +1103,8 @@
 </p:notes>
 </file>
 
-<file path=ppt/notesSlides/notesSlide8.xml><?xml version="1.0" encoding="utf-8"?>
-<p:notes xmlns:a="http://schemas.openxmlformats.org/drawingml/2006/main" xmlns:p="http://schemas.openxmlformats.org/presentationml/2006/main" xmlns:r="http://schemas.openxmlformats.org/officeDocument/2006/relationships">
+<file path=ppt/notesSlides/notesSlide9.xml><?xml version="1.0" encoding="utf-8"?>
+<p:notes xmlns:a="http://schemas.openxmlformats.org/drawingml/2006/main" xmlns:r="http://schemas.openxmlformats.org/officeDocument/2006/relationships" xmlns:p="http://schemas.openxmlformats.org/presentationml/2006/main">
   <p:cSld>
     <p:spTree>
       <p:nvGrpSpPr>
@@ -1331,7 +1124,7 @@
         <p:nvSpPr>
           <p:cNvPr id="2" name="Slide Image Placeholder 1"/>
           <p:cNvSpPr>
-            <a:spLocks noGrp="1"/>
+            <a:spLocks noGrp="1" noRot="1" noChangeAspect="1"/>
           </p:cNvSpPr>
           <p:nvPr>
             <p:ph type="sldImg" idx="2"/>
@@ -1346,7 +1139,7 @@
             <a:spLocks noGrp="1"/>
           </p:cNvSpPr>
           <p:nvPr>
-            <p:ph type="body" idx="3" sz="quarter"/>
+            <p:ph type="body" sz="quarter" idx="3"/>
           </p:nvPr>
         </p:nvSpPr>
         <p:spPr/>
@@ -1355,7 +1148,7 @@
           <a:lstStyle/>
           <a:p>
             <a:r>
-              <a:t>Para comunicar la arquitectura uso el modelo C4, que funciona como un mapa con zoom. Nivel 1, contexto: el sistema como una caja. Nivel 2, contenedores: qué se ejecuta por separado y con qué tecnología. Nivel 3, componentes: los módulos dentro de la API. Nivel 4, código: las clases del módulo Citas. Cada nivel abre una caja del anterior y mantiene sus relaciones. (40 s)</a:t>
+              <a:t>En el contexto, AnyColor Salón es una sola caja. Arriba los cinco actores con lo que hace cada uno; abajo los sistemas externos. Dos decisiones se ven ya aquí: no guardamos datos de tarjeta, solo el identificador de la transacción, y cada proveedor se conecta por un adaptador. La facturación SUNAT está en línea punteada porque está fuera de alcance, pero la interfaz queda preparada. (45 s)</a:t>
             </a:r>
           </a:p>
         </p:txBody>
@@ -1367,77 +1160,7 @@
             <a:spLocks noGrp="1"/>
           </p:cNvSpPr>
           <p:nvPr>
-            <p:ph type="sldNum" idx="5" sz="quarter"/>
-          </p:nvPr>
-        </p:nvSpPr>
-        <p:spPr/>
-      </p:sp>
-    </p:spTree>
-  </p:cSld>
-  <p:clrMapOvr>
-    <a:masterClrMapping/>
-  </p:clrMapOvr>
-</p:notes>
-</file>
-
-<file path=ppt/notesSlides/notesSlide9.xml><?xml version="1.0" encoding="utf-8"?>
-<p:notes xmlns:a="http://schemas.openxmlformats.org/drawingml/2006/main" xmlns:p="http://schemas.openxmlformats.org/presentationml/2006/main" xmlns:r="http://schemas.openxmlformats.org/officeDocument/2006/relationships">
-  <p:cSld>
-    <p:spTree>
-      <p:nvGrpSpPr>
-        <p:cNvPr id="1" name=""/>
-        <p:cNvGrpSpPr/>
-        <p:nvPr/>
-      </p:nvGrpSpPr>
-      <p:grpSpPr>
-        <a:xfrm>
-          <a:off x="0" y="0"/>
-          <a:ext cx="0" cy="0"/>
-          <a:chOff x="0" y="0"/>
-          <a:chExt cx="0" cy="0"/>
-        </a:xfrm>
-      </p:grpSpPr>
-      <p:sp>
-        <p:nvSpPr>
-          <p:cNvPr id="2" name="Slide Image Placeholder 1"/>
-          <p:cNvSpPr>
-            <a:spLocks noGrp="1"/>
-          </p:cNvSpPr>
-          <p:nvPr>
-            <p:ph type="sldImg" idx="2"/>
-          </p:nvPr>
-        </p:nvSpPr>
-        <p:spPr/>
-      </p:sp>
-      <p:sp>
-        <p:nvSpPr>
-          <p:cNvPr id="3" name="Notes Placeholder 2"/>
-          <p:cNvSpPr>
-            <a:spLocks noGrp="1"/>
-          </p:cNvSpPr>
-          <p:nvPr>
-            <p:ph type="body" idx="3" sz="quarter"/>
-          </p:nvPr>
-        </p:nvSpPr>
-        <p:spPr/>
-        <p:txBody>
-          <a:bodyPr/>
-          <a:lstStyle/>
-          <a:p>
-            <a:r>
-              <a:t>En el contexto, AnyColor Salón es una sola caja. Arriba los cinco actores con lo que hace cada uno; abajo los sistemas externos. Dos decisiones se ven ya aquí: no guardamos datos de tarjeta, solo el identificador de la transacción, y cada proveedor se conecta por un adaptador. La facturación SUNAT está en línea punteada porque está fuera de alcance, pero la interfaz queda preparada. (45 s)</a:t>
-            </a:r>
-          </a:p>
-        </p:txBody>
-      </p:sp>
-      <p:sp>
-        <p:nvSpPr>
-          <p:cNvPr id="4" name="Slide Number Placeholder 3"/>
-          <p:cNvSpPr>
-            <a:spLocks noGrp="1"/>
-          </p:cNvSpPr>
-          <p:nvPr>
-            <p:ph type="sldNum" idx="5" sz="quarter"/>
+            <p:ph type="sldNum" sz="quarter" idx="5"/>
           </p:nvPr>
         </p:nvSpPr>
         <p:spPr/>
@@ -1488,10 +1211,9 @@
           <a:lstStyle/>
           <a:p>
             <a:r>
-              <a:rPr lang="en-US" smtClean="0"/>
+              <a:rPr lang="en-US"/>
               <a:t>Click to edit Master title style</a:t>
             </a:r>
-            <a:endParaRPr lang="en-US"/>
           </a:p>
         </p:txBody>
       </p:sp>
@@ -1607,10 +1329,9 @@
           </a:lstStyle>
           <a:p>
             <a:r>
-              <a:rPr lang="en-US" smtClean="0"/>
+              <a:rPr lang="en-US"/>
               <a:t>Click to edit Master subtitle style</a:t>
             </a:r>
-            <a:endParaRPr lang="en-US"/>
           </a:p>
         </p:txBody>
       </p:sp>
@@ -1631,7 +1352,7 @@
           <a:p>
             <a:fld id="{5BCAD085-E8A6-8845-BD4E-CB4CCA059FC4}" type="datetimeFigureOut">
               <a:rPr lang="en-US" smtClean="0"/>
-              <a:t>1/27/13</a:t>
+              <a:t>10/11/2026</a:t>
             </a:fld>
             <a:endParaRPr lang="en-US"/>
           </a:p>
@@ -1673,7 +1394,7 @@
           <a:p>
             <a:fld id="{C1FF6DA9-008F-8B48-92A6-B652298478BF}" type="slidenum">
               <a:rPr lang="en-US" smtClean="0"/>
-              <a:t>‹#›</a:t>
+              <a:t>‹Nº›</a:t>
             </a:fld>
             <a:endParaRPr lang="en-US"/>
           </a:p>
@@ -1725,10 +1446,9 @@
           <a:lstStyle/>
           <a:p>
             <a:r>
-              <a:rPr lang="en-US" smtClean="0"/>
+              <a:rPr lang="en-US"/>
               <a:t>Click to edit Master title style</a:t>
             </a:r>
-            <a:endParaRPr lang="en-US"/>
           </a:p>
         </p:txBody>
       </p:sp>
@@ -1749,38 +1469,37 @@
           <a:p>
             <a:pPr lvl="0"/>
             <a:r>
-              <a:rPr lang="en-US" smtClean="0"/>
+              <a:rPr lang="en-US"/>
               <a:t>Click to edit Master text styles</a:t>
             </a:r>
           </a:p>
           <a:p>
             <a:pPr lvl="1"/>
             <a:r>
-              <a:rPr lang="en-US" smtClean="0"/>
+              <a:rPr lang="en-US"/>
               <a:t>Second level</a:t>
             </a:r>
           </a:p>
           <a:p>
             <a:pPr lvl="2"/>
             <a:r>
-              <a:rPr lang="en-US" smtClean="0"/>
+              <a:rPr lang="en-US"/>
               <a:t>Third level</a:t>
             </a:r>
           </a:p>
           <a:p>
             <a:pPr lvl="3"/>
             <a:r>
-              <a:rPr lang="en-US" smtClean="0"/>
+              <a:rPr lang="en-US"/>
               <a:t>Fourth level</a:t>
             </a:r>
           </a:p>
           <a:p>
             <a:pPr lvl="4"/>
             <a:r>
-              <a:rPr lang="en-US" smtClean="0"/>
+              <a:rPr lang="en-US"/>
               <a:t>Fifth level</a:t>
             </a:r>
-            <a:endParaRPr lang="en-US"/>
           </a:p>
         </p:txBody>
       </p:sp>
@@ -1801,7 +1520,7 @@
           <a:p>
             <a:fld id="{5BCAD085-E8A6-8845-BD4E-CB4CCA059FC4}" type="datetimeFigureOut">
               <a:rPr lang="en-US" smtClean="0"/>
-              <a:t>1/27/13</a:t>
+              <a:t>10/11/2026</a:t>
             </a:fld>
             <a:endParaRPr lang="en-US"/>
           </a:p>
@@ -1843,7 +1562,7 @@
           <a:p>
             <a:fld id="{C1FF6DA9-008F-8B48-92A6-B652298478BF}" type="slidenum">
               <a:rPr lang="en-US" smtClean="0"/>
-              <a:t>‹#›</a:t>
+              <a:t>‹Nº›</a:t>
             </a:fld>
             <a:endParaRPr lang="en-US"/>
           </a:p>
@@ -1900,10 +1619,9 @@
           <a:lstStyle/>
           <a:p>
             <a:r>
-              <a:rPr lang="en-US" smtClean="0"/>
+              <a:rPr lang="en-US"/>
               <a:t>Click to edit Master title style</a:t>
             </a:r>
-            <a:endParaRPr lang="en-US"/>
           </a:p>
         </p:txBody>
       </p:sp>
@@ -1929,38 +1647,37 @@
           <a:p>
             <a:pPr lvl="0"/>
             <a:r>
-              <a:rPr lang="en-US" smtClean="0"/>
+              <a:rPr lang="en-US"/>
               <a:t>Click to edit Master text styles</a:t>
             </a:r>
           </a:p>
           <a:p>
             <a:pPr lvl="1"/>
             <a:r>
-              <a:rPr lang="en-US" smtClean="0"/>
+              <a:rPr lang="en-US"/>
               <a:t>Second level</a:t>
             </a:r>
           </a:p>
           <a:p>
             <a:pPr lvl="2"/>
             <a:r>
-              <a:rPr lang="en-US" smtClean="0"/>
+              <a:rPr lang="en-US"/>
               <a:t>Third level</a:t>
             </a:r>
           </a:p>
           <a:p>
             <a:pPr lvl="3"/>
             <a:r>
-              <a:rPr lang="en-US" smtClean="0"/>
+              <a:rPr lang="en-US"/>
               <a:t>Fourth level</a:t>
             </a:r>
           </a:p>
           <a:p>
             <a:pPr lvl="4"/>
             <a:r>
-              <a:rPr lang="en-US" smtClean="0"/>
+              <a:rPr lang="en-US"/>
               <a:t>Fifth level</a:t>
             </a:r>
-            <a:endParaRPr lang="en-US"/>
           </a:p>
         </p:txBody>
       </p:sp>
@@ -1981,7 +1698,7 @@
           <a:p>
             <a:fld id="{5BCAD085-E8A6-8845-BD4E-CB4CCA059FC4}" type="datetimeFigureOut">
               <a:rPr lang="en-US" smtClean="0"/>
-              <a:t>1/27/13</a:t>
+              <a:t>10/11/2026</a:t>
             </a:fld>
             <a:endParaRPr lang="en-US"/>
           </a:p>
@@ -2023,7 +1740,7 @@
           <a:p>
             <a:fld id="{C1FF6DA9-008F-8B48-92A6-B652298478BF}" type="slidenum">
               <a:rPr lang="en-US" smtClean="0"/>
-              <a:t>‹#›</a:t>
+              <a:t>‹Nº›</a:t>
             </a:fld>
             <a:endParaRPr lang="en-US"/>
           </a:p>
@@ -2075,10 +1792,9 @@
           <a:lstStyle/>
           <a:p>
             <a:r>
-              <a:rPr lang="en-US" smtClean="0"/>
+              <a:rPr lang="en-US"/>
               <a:t>Click to edit Master title style</a:t>
             </a:r>
-            <a:endParaRPr lang="en-US"/>
           </a:p>
         </p:txBody>
       </p:sp>
@@ -2099,38 +1815,37 @@
           <a:p>
             <a:pPr lvl="0"/>
             <a:r>
-              <a:rPr lang="en-US" smtClean="0"/>
+              <a:rPr lang="en-US"/>
               <a:t>Click to edit Master text styles</a:t>
             </a:r>
           </a:p>
           <a:p>
             <a:pPr lvl="1"/>
             <a:r>
-              <a:rPr lang="en-US" smtClean="0"/>
+              <a:rPr lang="en-US"/>
               <a:t>Second level</a:t>
             </a:r>
           </a:p>
           <a:p>
             <a:pPr lvl="2"/>
             <a:r>
-              <a:rPr lang="en-US" smtClean="0"/>
+              <a:rPr lang="en-US"/>
               <a:t>Third level</a:t>
             </a:r>
           </a:p>
           <a:p>
             <a:pPr lvl="3"/>
             <a:r>
-              <a:rPr lang="en-US" smtClean="0"/>
+              <a:rPr lang="en-US"/>
               <a:t>Fourth level</a:t>
             </a:r>
           </a:p>
           <a:p>
             <a:pPr lvl="4"/>
             <a:r>
-              <a:rPr lang="en-US" smtClean="0"/>
+              <a:rPr lang="en-US"/>
               <a:t>Fifth level</a:t>
             </a:r>
-            <a:endParaRPr lang="en-US"/>
           </a:p>
         </p:txBody>
       </p:sp>
@@ -2151,7 +1866,7 @@
           <a:p>
             <a:fld id="{5BCAD085-E8A6-8845-BD4E-CB4CCA059FC4}" type="datetimeFigureOut">
               <a:rPr lang="en-US" smtClean="0"/>
-              <a:t>1/27/13</a:t>
+              <a:t>10/11/2026</a:t>
             </a:fld>
             <a:endParaRPr lang="en-US"/>
           </a:p>
@@ -2193,7 +1908,7 @@
           <a:p>
             <a:fld id="{C1FF6DA9-008F-8B48-92A6-B652298478BF}" type="slidenum">
               <a:rPr lang="en-US" smtClean="0"/>
-              <a:t>‹#›</a:t>
+              <a:t>‹Nº›</a:t>
             </a:fld>
             <a:endParaRPr lang="en-US"/>
           </a:p>
@@ -2254,10 +1969,9 @@
           </a:lstStyle>
           <a:p>
             <a:r>
-              <a:rPr lang="en-US" smtClean="0"/>
+              <a:rPr lang="en-US"/>
               <a:t>Click to edit Master title style</a:t>
             </a:r>
-            <a:endParaRPr lang="en-US"/>
           </a:p>
         </p:txBody>
       </p:sp>
@@ -2374,7 +2088,7 @@
           <a:p>
             <a:pPr lvl="0"/>
             <a:r>
-              <a:rPr lang="en-US" smtClean="0"/>
+              <a:rPr lang="en-US"/>
               <a:t>Click to edit Master text styles</a:t>
             </a:r>
           </a:p>
@@ -2397,7 +2111,7 @@
           <a:p>
             <a:fld id="{5BCAD085-E8A6-8845-BD4E-CB4CCA059FC4}" type="datetimeFigureOut">
               <a:rPr lang="en-US" smtClean="0"/>
-              <a:t>1/27/13</a:t>
+              <a:t>10/11/2026</a:t>
             </a:fld>
             <a:endParaRPr lang="en-US"/>
           </a:p>
@@ -2439,7 +2153,7 @@
           <a:p>
             <a:fld id="{C1FF6DA9-008F-8B48-92A6-B652298478BF}" type="slidenum">
               <a:rPr lang="en-US" smtClean="0"/>
-              <a:t>‹#›</a:t>
+              <a:t>‹Nº›</a:t>
             </a:fld>
             <a:endParaRPr lang="en-US"/>
           </a:p>
@@ -2491,10 +2205,9 @@
           <a:lstStyle/>
           <a:p>
             <a:r>
-              <a:rPr lang="en-US" smtClean="0"/>
+              <a:rPr lang="en-US"/>
               <a:t>Click to edit Master title style</a:t>
             </a:r>
-            <a:endParaRPr lang="en-US"/>
           </a:p>
         </p:txBody>
       </p:sp>
@@ -2548,38 +2261,37 @@
           <a:p>
             <a:pPr lvl="0"/>
             <a:r>
-              <a:rPr lang="en-US" smtClean="0"/>
+              <a:rPr lang="en-US"/>
               <a:t>Click to edit Master text styles</a:t>
             </a:r>
           </a:p>
           <a:p>
             <a:pPr lvl="1"/>
             <a:r>
-              <a:rPr lang="en-US" smtClean="0"/>
+              <a:rPr lang="en-US"/>
               <a:t>Second level</a:t>
             </a:r>
           </a:p>
           <a:p>
             <a:pPr lvl="2"/>
             <a:r>
-              <a:rPr lang="en-US" smtClean="0"/>
+              <a:rPr lang="en-US"/>
               <a:t>Third level</a:t>
             </a:r>
           </a:p>
           <a:p>
             <a:pPr lvl="3"/>
             <a:r>
-              <a:rPr lang="en-US" smtClean="0"/>
+              <a:rPr lang="en-US"/>
               <a:t>Fourth level</a:t>
             </a:r>
           </a:p>
           <a:p>
             <a:pPr lvl="4"/>
             <a:r>
-              <a:rPr lang="en-US" smtClean="0"/>
+              <a:rPr lang="en-US"/>
               <a:t>Fifth level</a:t>
             </a:r>
-            <a:endParaRPr lang="en-US"/>
           </a:p>
         </p:txBody>
       </p:sp>
@@ -2633,38 +2345,37 @@
           <a:p>
             <a:pPr lvl="0"/>
             <a:r>
-              <a:rPr lang="en-US" smtClean="0"/>
+              <a:rPr lang="en-US"/>
               <a:t>Click to edit Master text styles</a:t>
             </a:r>
           </a:p>
           <a:p>
             <a:pPr lvl="1"/>
             <a:r>
-              <a:rPr lang="en-US" smtClean="0"/>
+              <a:rPr lang="en-US"/>
               <a:t>Second level</a:t>
             </a:r>
           </a:p>
           <a:p>
             <a:pPr lvl="2"/>
             <a:r>
-              <a:rPr lang="en-US" smtClean="0"/>
+              <a:rPr lang="en-US"/>
               <a:t>Third level</a:t>
             </a:r>
           </a:p>
           <a:p>
             <a:pPr lvl="3"/>
             <a:r>
-              <a:rPr lang="en-US" smtClean="0"/>
+              <a:rPr lang="en-US"/>
               <a:t>Fourth level</a:t>
             </a:r>
           </a:p>
           <a:p>
             <a:pPr lvl="4"/>
             <a:r>
-              <a:rPr lang="en-US" smtClean="0"/>
+              <a:rPr lang="en-US"/>
               <a:t>Fifth level</a:t>
             </a:r>
-            <a:endParaRPr lang="en-US"/>
           </a:p>
         </p:txBody>
       </p:sp>
@@ -2685,7 +2396,7 @@
           <a:p>
             <a:fld id="{5BCAD085-E8A6-8845-BD4E-CB4CCA059FC4}" type="datetimeFigureOut">
               <a:rPr lang="en-US" smtClean="0"/>
-              <a:t>1/27/13</a:t>
+              <a:t>10/11/2026</a:t>
             </a:fld>
             <a:endParaRPr lang="en-US"/>
           </a:p>
@@ -2727,7 +2438,7 @@
           <a:p>
             <a:fld id="{C1FF6DA9-008F-8B48-92A6-B652298478BF}" type="slidenum">
               <a:rPr lang="en-US" smtClean="0"/>
-              <a:t>‹#›</a:t>
+              <a:t>‹Nº›</a:t>
             </a:fld>
             <a:endParaRPr lang="en-US"/>
           </a:p>
@@ -2783,10 +2494,9 @@
           </a:lstStyle>
           <a:p>
             <a:r>
-              <a:rPr lang="en-US" smtClean="0"/>
+              <a:rPr lang="en-US"/>
               <a:t>Click to edit Master title style</a:t>
             </a:r>
-            <a:endParaRPr lang="en-US"/>
           </a:p>
         </p:txBody>
       </p:sp>
@@ -2849,7 +2559,7 @@
           <a:p>
             <a:pPr lvl="0"/>
             <a:r>
-              <a:rPr lang="en-US" smtClean="0"/>
+              <a:rPr lang="en-US"/>
               <a:t>Click to edit Master text styles</a:t>
             </a:r>
           </a:p>
@@ -2905,38 +2615,37 @@
           <a:p>
             <a:pPr lvl="0"/>
             <a:r>
-              <a:rPr lang="en-US" smtClean="0"/>
+              <a:rPr lang="en-US"/>
               <a:t>Click to edit Master text styles</a:t>
             </a:r>
           </a:p>
           <a:p>
             <a:pPr lvl="1"/>
             <a:r>
-              <a:rPr lang="en-US" smtClean="0"/>
+              <a:rPr lang="en-US"/>
               <a:t>Second level</a:t>
             </a:r>
           </a:p>
           <a:p>
             <a:pPr lvl="2"/>
             <a:r>
-              <a:rPr lang="en-US" smtClean="0"/>
+              <a:rPr lang="en-US"/>
               <a:t>Third level</a:t>
             </a:r>
           </a:p>
           <a:p>
             <a:pPr lvl="3"/>
             <a:r>
-              <a:rPr lang="en-US" smtClean="0"/>
+              <a:rPr lang="en-US"/>
               <a:t>Fourth level</a:t>
             </a:r>
           </a:p>
           <a:p>
             <a:pPr lvl="4"/>
             <a:r>
-              <a:rPr lang="en-US" smtClean="0"/>
+              <a:rPr lang="en-US"/>
               <a:t>Fifth level</a:t>
             </a:r>
-            <a:endParaRPr lang="en-US"/>
           </a:p>
         </p:txBody>
       </p:sp>
@@ -2999,7 +2708,7 @@
           <a:p>
             <a:pPr lvl="0"/>
             <a:r>
-              <a:rPr lang="en-US" smtClean="0"/>
+              <a:rPr lang="en-US"/>
               <a:t>Click to edit Master text styles</a:t>
             </a:r>
           </a:p>
@@ -3055,38 +2764,37 @@
           <a:p>
             <a:pPr lvl="0"/>
             <a:r>
-              <a:rPr lang="en-US" smtClean="0"/>
+              <a:rPr lang="en-US"/>
               <a:t>Click to edit Master text styles</a:t>
             </a:r>
           </a:p>
           <a:p>
             <a:pPr lvl="1"/>
             <a:r>
-              <a:rPr lang="en-US" smtClean="0"/>
+              <a:rPr lang="en-US"/>
               <a:t>Second level</a:t>
             </a:r>
           </a:p>
           <a:p>
             <a:pPr lvl="2"/>
             <a:r>
-              <a:rPr lang="en-US" smtClean="0"/>
+              <a:rPr lang="en-US"/>
               <a:t>Third level</a:t>
             </a:r>
           </a:p>
           <a:p>
             <a:pPr lvl="3"/>
             <a:r>
-              <a:rPr lang="en-US" smtClean="0"/>
+              <a:rPr lang="en-US"/>
               <a:t>Fourth level</a:t>
             </a:r>
           </a:p>
           <a:p>
             <a:pPr lvl="4"/>
             <a:r>
-              <a:rPr lang="en-US" smtClean="0"/>
+              <a:rPr lang="en-US"/>
               <a:t>Fifth level</a:t>
             </a:r>
-            <a:endParaRPr lang="en-US"/>
           </a:p>
         </p:txBody>
       </p:sp>
@@ -3107,7 +2815,7 @@
           <a:p>
             <a:fld id="{5BCAD085-E8A6-8845-BD4E-CB4CCA059FC4}" type="datetimeFigureOut">
               <a:rPr lang="en-US" smtClean="0"/>
-              <a:t>1/27/13</a:t>
+              <a:t>10/11/2026</a:t>
             </a:fld>
             <a:endParaRPr lang="en-US"/>
           </a:p>
@@ -3149,7 +2857,7 @@
           <a:p>
             <a:fld id="{C1FF6DA9-008F-8B48-92A6-B652298478BF}" type="slidenum">
               <a:rPr lang="en-US" smtClean="0"/>
-              <a:t>‹#›</a:t>
+              <a:t>‹Nº›</a:t>
             </a:fld>
             <a:endParaRPr lang="en-US"/>
           </a:p>
@@ -3201,10 +2909,9 @@
           <a:lstStyle/>
           <a:p>
             <a:r>
-              <a:rPr lang="en-US" smtClean="0"/>
+              <a:rPr lang="en-US"/>
               <a:t>Click to edit Master title style</a:t>
             </a:r>
-            <a:endParaRPr lang="en-US"/>
           </a:p>
         </p:txBody>
       </p:sp>
@@ -3225,7 +2932,7 @@
           <a:p>
             <a:fld id="{5BCAD085-E8A6-8845-BD4E-CB4CCA059FC4}" type="datetimeFigureOut">
               <a:rPr lang="en-US" smtClean="0"/>
-              <a:t>1/27/13</a:t>
+              <a:t>10/11/2026</a:t>
             </a:fld>
             <a:endParaRPr lang="en-US"/>
           </a:p>
@@ -3267,7 +2974,7 @@
           <a:p>
             <a:fld id="{C1FF6DA9-008F-8B48-92A6-B652298478BF}" type="slidenum">
               <a:rPr lang="en-US" smtClean="0"/>
-              <a:t>‹#›</a:t>
+              <a:t>‹Nº›</a:t>
             </a:fld>
             <a:endParaRPr lang="en-US"/>
           </a:p>
@@ -3320,7 +3027,7 @@
           <a:p>
             <a:fld id="{5BCAD085-E8A6-8845-BD4E-CB4CCA059FC4}" type="datetimeFigureOut">
               <a:rPr lang="en-US" smtClean="0"/>
-              <a:t>1/27/13</a:t>
+              <a:t>10/11/2026</a:t>
             </a:fld>
             <a:endParaRPr lang="en-US"/>
           </a:p>
@@ -3362,7 +3069,7 @@
           <a:p>
             <a:fld id="{C1FF6DA9-008F-8B48-92A6-B652298478BF}" type="slidenum">
               <a:rPr lang="en-US" smtClean="0"/>
-              <a:t>‹#›</a:t>
+              <a:t>‹Nº›</a:t>
             </a:fld>
             <a:endParaRPr lang="en-US"/>
           </a:p>
@@ -3423,10 +3130,9 @@
           </a:lstStyle>
           <a:p>
             <a:r>
-              <a:rPr lang="en-US" smtClean="0"/>
+              <a:rPr lang="en-US"/>
               <a:t>Click to edit Master title style</a:t>
             </a:r>
-            <a:endParaRPr lang="en-US"/>
           </a:p>
         </p:txBody>
       </p:sp>
@@ -3480,38 +3186,37 @@
           <a:p>
             <a:pPr lvl="0"/>
             <a:r>
-              <a:rPr lang="en-US" smtClean="0"/>
+              <a:rPr lang="en-US"/>
               <a:t>Click to edit Master text styles</a:t>
             </a:r>
           </a:p>
           <a:p>
             <a:pPr lvl="1"/>
             <a:r>
-              <a:rPr lang="en-US" smtClean="0"/>
+              <a:rPr lang="en-US"/>
               <a:t>Second level</a:t>
             </a:r>
           </a:p>
           <a:p>
             <a:pPr lvl="2"/>
             <a:r>
-              <a:rPr lang="en-US" smtClean="0"/>
+              <a:rPr lang="en-US"/>
               <a:t>Third level</a:t>
             </a:r>
           </a:p>
           <a:p>
             <a:pPr lvl="3"/>
             <a:r>
-              <a:rPr lang="en-US" smtClean="0"/>
+              <a:rPr lang="en-US"/>
               <a:t>Fourth level</a:t>
             </a:r>
           </a:p>
           <a:p>
             <a:pPr lvl="4"/>
             <a:r>
-              <a:rPr lang="en-US" smtClean="0"/>
+              <a:rPr lang="en-US"/>
               <a:t>Fifth level</a:t>
             </a:r>
-            <a:endParaRPr lang="en-US"/>
           </a:p>
         </p:txBody>
       </p:sp>
@@ -3574,7 +3279,7 @@
           <a:p>
             <a:pPr lvl="0"/>
             <a:r>
-              <a:rPr lang="en-US" smtClean="0"/>
+              <a:rPr lang="en-US"/>
               <a:t>Click to edit Master text styles</a:t>
             </a:r>
           </a:p>
@@ -3597,7 +3302,7 @@
           <a:p>
             <a:fld id="{5BCAD085-E8A6-8845-BD4E-CB4CCA059FC4}" type="datetimeFigureOut">
               <a:rPr lang="en-US" smtClean="0"/>
-              <a:t>1/27/13</a:t>
+              <a:t>10/11/2026</a:t>
             </a:fld>
             <a:endParaRPr lang="en-US"/>
           </a:p>
@@ -3639,7 +3344,7 @@
           <a:p>
             <a:fld id="{C1FF6DA9-008F-8B48-92A6-B652298478BF}" type="slidenum">
               <a:rPr lang="en-US" smtClean="0"/>
-              <a:t>‹#›</a:t>
+              <a:t>‹Nº›</a:t>
             </a:fld>
             <a:endParaRPr lang="en-US"/>
           </a:p>
@@ -3700,10 +3405,9 @@
           </a:lstStyle>
           <a:p>
             <a:r>
-              <a:rPr lang="en-US" smtClean="0"/>
+              <a:rPr lang="en-US"/>
               <a:t>Click to edit Master title style</a:t>
             </a:r>
-            <a:endParaRPr lang="en-US"/>
           </a:p>
         </p:txBody>
       </p:sp>
@@ -3827,7 +3531,7 @@
           <a:p>
             <a:pPr lvl="0"/>
             <a:r>
-              <a:rPr lang="en-US" smtClean="0"/>
+              <a:rPr lang="en-US"/>
               <a:t>Click to edit Master text styles</a:t>
             </a:r>
           </a:p>
@@ -3850,7 +3554,7 @@
           <a:p>
             <a:fld id="{5BCAD085-E8A6-8845-BD4E-CB4CCA059FC4}" type="datetimeFigureOut">
               <a:rPr lang="en-US" smtClean="0"/>
-              <a:t>1/27/13</a:t>
+              <a:t>10/11/2026</a:t>
             </a:fld>
             <a:endParaRPr lang="en-US"/>
           </a:p>
@@ -3892,7 +3596,7 @@
           <a:p>
             <a:fld id="{C1FF6DA9-008F-8B48-92A6-B652298478BF}" type="slidenum">
               <a:rPr lang="en-US" smtClean="0"/>
-              <a:t>‹#›</a:t>
+              <a:t>‹Nº›</a:t>
             </a:fld>
             <a:endParaRPr lang="en-US"/>
           </a:p>
@@ -3959,10 +3663,9 @@
           <a:lstStyle/>
           <a:p>
             <a:r>
-              <a:rPr lang="en-US" smtClean="0"/>
+              <a:rPr lang="en-US"/>
               <a:t>Click to edit Master title style</a:t>
             </a:r>
-            <a:endParaRPr lang="en-US"/>
           </a:p>
         </p:txBody>
       </p:sp>
@@ -3993,38 +3696,37 @@
           <a:p>
             <a:pPr lvl="0"/>
             <a:r>
-              <a:rPr lang="en-US" smtClean="0"/>
+              <a:rPr lang="en-US"/>
               <a:t>Click to edit Master text styles</a:t>
             </a:r>
           </a:p>
           <a:p>
             <a:pPr lvl="1"/>
             <a:r>
-              <a:rPr lang="en-US" smtClean="0"/>
+              <a:rPr lang="en-US"/>
               <a:t>Second level</a:t>
             </a:r>
           </a:p>
           <a:p>
             <a:pPr lvl="2"/>
             <a:r>
-              <a:rPr lang="en-US" smtClean="0"/>
+              <a:rPr lang="en-US"/>
               <a:t>Third level</a:t>
             </a:r>
           </a:p>
           <a:p>
             <a:pPr lvl="3"/>
             <a:r>
-              <a:rPr lang="en-US" smtClean="0"/>
+              <a:rPr lang="en-US"/>
               <a:t>Fourth level</a:t>
             </a:r>
           </a:p>
           <a:p>
             <a:pPr lvl="4"/>
             <a:r>
-              <a:rPr lang="en-US" smtClean="0"/>
+              <a:rPr lang="en-US"/>
               <a:t>Fifth level</a:t>
             </a:r>
-            <a:endParaRPr lang="en-US"/>
           </a:p>
         </p:txBody>
       </p:sp>
@@ -4063,7 +3765,7 @@
           <a:p>
             <a:fld id="{5BCAD085-E8A6-8845-BD4E-CB4CCA059FC4}" type="datetimeFigureOut">
               <a:rPr lang="en-US" smtClean="0"/>
-              <a:t>1/27/13</a:t>
+              <a:t>10/11/2026</a:t>
             </a:fld>
             <a:endParaRPr lang="en-US"/>
           </a:p>
@@ -4141,7 +3843,7 @@
           <a:p>
             <a:fld id="{C1FF6DA9-008F-8B48-92A6-B652298478BF}" type="slidenum">
               <a:rPr lang="en-US" smtClean="0"/>
-              <a:t>‹#›</a:t>
+              <a:t>‹Nº›</a:t>
             </a:fld>
             <a:endParaRPr lang="en-US"/>
           </a:p>
@@ -4422,7 +4124,7 @@
 </file>
 
 <file path=ppt/slides/slide1.xml><?xml version="1.0" encoding="utf-8"?>
-<p:sld xmlns:a="http://schemas.openxmlformats.org/drawingml/2006/main" xmlns:p="http://schemas.openxmlformats.org/presentationml/2006/main" xmlns:r="http://schemas.openxmlformats.org/officeDocument/2006/relationships">
+<p:sld xmlns:a="http://schemas.openxmlformats.org/drawingml/2006/main" xmlns:r="http://schemas.openxmlformats.org/officeDocument/2006/relationships" xmlns:p="http://schemas.openxmlformats.org/presentationml/2006/main">
   <p:cSld>
     <p:spTree>
       <p:nvGrpSpPr>
@@ -4430,7 +4132,14 @@
         <p:cNvGrpSpPr/>
         <p:nvPr/>
       </p:nvGrpSpPr>
-      <p:grpSpPr/>
+      <p:grpSpPr>
+        <a:xfrm>
+          <a:off x="0" y="0"/>
+          <a:ext cx="0" cy="0"/>
+          <a:chOff x="0" y="0"/>
+          <a:chExt cx="0" cy="0"/>
+        </a:xfrm>
+      </p:grpSpPr>
       <p:sp>
         <p:nvSpPr>
           <p:cNvPr id="2" name="Rectangle 1"/>
@@ -4472,6 +4181,7 @@
           <a:lstStyle/>
           <a:p>
             <a:pPr algn="ctr"/>
+            <a:endParaRPr/>
           </a:p>
         </p:txBody>
       </p:sp>
@@ -4492,7 +4202,7 @@
           <a:noFill/>
         </p:spPr>
         <p:txBody>
-          <a:bodyPr wrap="square" lIns="45720" rIns="45720" tIns="27432" bIns="27432" anchor="t">
+          <a:bodyPr wrap="square" lIns="45720" tIns="27432" rIns="45720" bIns="27432" anchor="t">
             <a:spAutoFit/>
           </a:bodyPr>
           <a:lstStyle/>
@@ -4531,7 +4241,7 @@
           <a:noFill/>
         </p:spPr>
         <p:txBody>
-          <a:bodyPr wrap="square" lIns="45720" rIns="45720" tIns="27432" bIns="27432" anchor="t">
+          <a:bodyPr wrap="square" lIns="45720" tIns="27432" rIns="45720" bIns="27432" anchor="t">
             <a:spAutoFit/>
           </a:bodyPr>
           <a:lstStyle/>
@@ -4570,7 +4280,7 @@
           <a:noFill/>
         </p:spPr>
         <p:txBody>
-          <a:bodyPr wrap="square" lIns="45720" rIns="45720" tIns="27432" bIns="27432" anchor="t">
+          <a:bodyPr wrap="square" lIns="45720" tIns="27432" rIns="45720" bIns="27432" anchor="t">
             <a:spAutoFit/>
           </a:bodyPr>
           <a:lstStyle/>
@@ -4609,7 +4319,7 @@
           <a:noFill/>
         </p:spPr>
         <p:txBody>
-          <a:bodyPr wrap="square" lIns="45720" rIns="45720" tIns="27432" bIns="27432" anchor="t">
+          <a:bodyPr wrap="square" lIns="45720" tIns="27432" rIns="45720" bIns="27432" anchor="t">
             <a:spAutoFit/>
           </a:bodyPr>
           <a:lstStyle/>
@@ -4656,7 +4366,7 @@
 </file>
 
 <file path=ppt/slides/slide10.xml><?xml version="1.0" encoding="utf-8"?>
-<p:sld xmlns:a="http://schemas.openxmlformats.org/drawingml/2006/main" xmlns:p="http://schemas.openxmlformats.org/presentationml/2006/main" xmlns:r="http://schemas.openxmlformats.org/officeDocument/2006/relationships">
+<p:sld xmlns:a="http://schemas.openxmlformats.org/drawingml/2006/main" xmlns:r="http://schemas.openxmlformats.org/officeDocument/2006/relationships" xmlns:p="http://schemas.openxmlformats.org/presentationml/2006/main">
   <p:cSld>
     <p:spTree>
       <p:nvGrpSpPr>
@@ -4664,7 +4374,14 @@
         <p:cNvGrpSpPr/>
         <p:nvPr/>
       </p:nvGrpSpPr>
-      <p:grpSpPr/>
+      <p:grpSpPr>
+        <a:xfrm>
+          <a:off x="0" y="0"/>
+          <a:ext cx="0" cy="0"/>
+          <a:chOff x="0" y="0"/>
+          <a:chExt cx="0" cy="0"/>
+        </a:xfrm>
+      </p:grpSpPr>
       <p:sp>
         <p:nvSpPr>
           <p:cNvPr id="2" name="TextBox 1"/>
@@ -4682,7 +4399,7 @@
           <a:noFill/>
         </p:spPr>
         <p:txBody>
-          <a:bodyPr wrap="square" lIns="45720" rIns="45720" tIns="27432" bIns="27432" anchor="t">
+          <a:bodyPr wrap="square" lIns="45720" tIns="27432" rIns="45720" bIns="27432" anchor="t">
             <a:spAutoFit/>
           </a:bodyPr>
           <a:lstStyle/>
@@ -4721,7 +4438,7 @@
           <a:noFill/>
         </p:spPr>
         <p:txBody>
-          <a:bodyPr wrap="square" lIns="45720" rIns="45720" tIns="27432" bIns="27432" anchor="t">
+          <a:bodyPr wrap="square" lIns="45720" tIns="27432" rIns="45720" bIns="27432" anchor="t">
             <a:spAutoFit/>
           </a:bodyPr>
           <a:lstStyle/>
@@ -4760,7 +4477,7 @@
           <a:noFill/>
         </p:spPr>
         <p:txBody>
-          <a:bodyPr wrap="square" lIns="45720" rIns="45720" tIns="27432" bIns="27432" anchor="t">
+          <a:bodyPr wrap="square" lIns="45720" tIns="27432" rIns="45720" bIns="27432" anchor="t">
             <a:spAutoFit/>
           </a:bodyPr>
           <a:lstStyle/>
@@ -4799,7 +4516,7 @@
           <a:noFill/>
         </p:spPr>
         <p:txBody>
-          <a:bodyPr wrap="square" lIns="45720" rIns="45720" tIns="27432" bIns="27432" anchor="t">
+          <a:bodyPr wrap="square" lIns="45720" tIns="27432" rIns="45720" bIns="27432" anchor="t">
             <a:spAutoFit/>
           </a:bodyPr>
           <a:lstStyle/>
@@ -4893,6 +4610,7 @@
           <a:lstStyle/>
           <a:p>
             <a:pPr algn="ctr"/>
+            <a:endParaRPr/>
           </a:p>
         </p:txBody>
       </p:sp>
@@ -4913,7 +4631,7 @@
           <a:noFill/>
         </p:spPr>
         <p:txBody>
-          <a:bodyPr wrap="square" lIns="45720" rIns="45720" tIns="27432" bIns="27432" anchor="t">
+          <a:bodyPr wrap="square" lIns="45720" tIns="27432" rIns="45720" bIns="27432" anchor="t">
             <a:spAutoFit/>
           </a:bodyPr>
           <a:lstStyle/>
@@ -4994,6 +4712,7 @@
           <a:lstStyle/>
           <a:p>
             <a:pPr algn="ctr"/>
+            <a:endParaRPr/>
           </a:p>
         </p:txBody>
       </p:sp>
@@ -5014,7 +4733,7 @@
           <a:noFill/>
         </p:spPr>
         <p:txBody>
-          <a:bodyPr wrap="square" lIns="45720" rIns="45720" tIns="27432" bIns="27432" anchor="t">
+          <a:bodyPr wrap="square" lIns="45720" tIns="27432" rIns="45720" bIns="27432" anchor="t">
             <a:spAutoFit/>
           </a:bodyPr>
           <a:lstStyle/>
@@ -5095,6 +4814,7 @@
           <a:lstStyle/>
           <a:p>
             <a:pPr algn="ctr"/>
+            <a:endParaRPr/>
           </a:p>
         </p:txBody>
       </p:sp>
@@ -5115,7 +4835,7 @@
           <a:noFill/>
         </p:spPr>
         <p:txBody>
-          <a:bodyPr wrap="square" lIns="45720" rIns="45720" tIns="27432" bIns="27432" anchor="t">
+          <a:bodyPr wrap="square" lIns="45720" tIns="27432" rIns="45720" bIns="27432" anchor="t">
             <a:spAutoFit/>
           </a:bodyPr>
           <a:lstStyle/>
@@ -5196,6 +4916,7 @@
           <a:lstStyle/>
           <a:p>
             <a:pPr algn="ctr"/>
+            <a:endParaRPr/>
           </a:p>
         </p:txBody>
       </p:sp>
@@ -5216,7 +4937,7 @@
           <a:noFill/>
         </p:spPr>
         <p:txBody>
-          <a:bodyPr wrap="square" lIns="45720" rIns="45720" tIns="27432" bIns="27432" anchor="t">
+          <a:bodyPr wrap="square" lIns="45720" tIns="27432" rIns="45720" bIns="27432" anchor="t">
             <a:spAutoFit/>
           </a:bodyPr>
           <a:lstStyle/>
@@ -5297,6 +5018,7 @@
           <a:lstStyle/>
           <a:p>
             <a:pPr algn="ctr"/>
+            <a:endParaRPr/>
           </a:p>
         </p:txBody>
       </p:sp>
@@ -5317,7 +5039,7 @@
           <a:noFill/>
         </p:spPr>
         <p:txBody>
-          <a:bodyPr wrap="square" lIns="45720" rIns="45720" tIns="27432" bIns="27432" anchor="t">
+          <a:bodyPr wrap="square" lIns="45720" tIns="27432" rIns="45720" bIns="27432" anchor="t">
             <a:spAutoFit/>
           </a:bodyPr>
           <a:lstStyle/>
@@ -5364,7 +5086,7 @@
 </file>
 
 <file path=ppt/slides/slide11.xml><?xml version="1.0" encoding="utf-8"?>
-<p:sld xmlns:a="http://schemas.openxmlformats.org/drawingml/2006/main" xmlns:p="http://schemas.openxmlformats.org/presentationml/2006/main" xmlns:r="http://schemas.openxmlformats.org/officeDocument/2006/relationships">
+<p:sld xmlns:a="http://schemas.openxmlformats.org/drawingml/2006/main" xmlns:r="http://schemas.openxmlformats.org/officeDocument/2006/relationships" xmlns:p="http://schemas.openxmlformats.org/presentationml/2006/main">
   <p:cSld>
     <p:spTree>
       <p:nvGrpSpPr>
@@ -5372,7 +5094,14 @@
         <p:cNvGrpSpPr/>
         <p:nvPr/>
       </p:nvGrpSpPr>
-      <p:grpSpPr/>
+      <p:grpSpPr>
+        <a:xfrm>
+          <a:off x="0" y="0"/>
+          <a:ext cx="0" cy="0"/>
+          <a:chOff x="0" y="0"/>
+          <a:chExt cx="0" cy="0"/>
+        </a:xfrm>
+      </p:grpSpPr>
       <p:sp>
         <p:nvSpPr>
           <p:cNvPr id="2" name="TextBox 1"/>
@@ -5390,7 +5119,7 @@
           <a:noFill/>
         </p:spPr>
         <p:txBody>
-          <a:bodyPr wrap="square" lIns="45720" rIns="45720" tIns="27432" bIns="27432" anchor="t">
+          <a:bodyPr wrap="square" lIns="45720" tIns="27432" rIns="45720" bIns="27432" anchor="t">
             <a:spAutoFit/>
           </a:bodyPr>
           <a:lstStyle/>
@@ -5429,7 +5158,7 @@
           <a:noFill/>
         </p:spPr>
         <p:txBody>
-          <a:bodyPr wrap="square" lIns="45720" rIns="45720" tIns="27432" bIns="27432" anchor="t">
+          <a:bodyPr wrap="square" lIns="45720" tIns="27432" rIns="45720" bIns="27432" anchor="t">
             <a:spAutoFit/>
           </a:bodyPr>
           <a:lstStyle/>
@@ -5468,7 +5197,7 @@
           <a:noFill/>
         </p:spPr>
         <p:txBody>
-          <a:bodyPr wrap="square" lIns="45720" rIns="45720" tIns="27432" bIns="27432" anchor="t">
+          <a:bodyPr wrap="square" lIns="45720" tIns="27432" rIns="45720" bIns="27432" anchor="t">
             <a:spAutoFit/>
           </a:bodyPr>
           <a:lstStyle/>
@@ -5507,7 +5236,7 @@
           <a:noFill/>
         </p:spPr>
         <p:txBody>
-          <a:bodyPr wrap="square" lIns="45720" rIns="45720" tIns="27432" bIns="27432" anchor="t">
+          <a:bodyPr wrap="square" lIns="45720" tIns="27432" rIns="45720" bIns="27432" anchor="t">
             <a:spAutoFit/>
           </a:bodyPr>
           <a:lstStyle/>
@@ -5575,7 +5304,7 @@
           <a:noFill/>
         </p:spPr>
         <p:txBody>
-          <a:bodyPr wrap="square" lIns="45720" rIns="45720" tIns="27432" bIns="27432" anchor="t">
+          <a:bodyPr wrap="square" lIns="45720" tIns="27432" rIns="45720" bIns="27432" anchor="t">
             <a:spAutoFit/>
           </a:bodyPr>
           <a:lstStyle/>
@@ -5640,6 +5369,7 @@
           <a:lstStyle/>
           <a:p>
             <a:pPr algn="ctr"/>
+            <a:endParaRPr/>
           </a:p>
         </p:txBody>
       </p:sp>
@@ -5660,7 +5390,7 @@
           <a:noFill/>
         </p:spPr>
         <p:txBody>
-          <a:bodyPr wrap="square" lIns="45720" rIns="45720" tIns="27432" bIns="27432" anchor="t">
+          <a:bodyPr wrap="square" lIns="45720" tIns="27432" rIns="45720" bIns="27432" anchor="t">
             <a:spAutoFit/>
           </a:bodyPr>
           <a:lstStyle/>
@@ -5741,6 +5471,7 @@
           <a:lstStyle/>
           <a:p>
             <a:pPr algn="ctr"/>
+            <a:endParaRPr/>
           </a:p>
         </p:txBody>
       </p:sp>
@@ -5761,7 +5492,7 @@
           <a:noFill/>
         </p:spPr>
         <p:txBody>
-          <a:bodyPr wrap="square" lIns="45720" rIns="45720" tIns="27432" bIns="27432" anchor="t">
+          <a:bodyPr wrap="square" lIns="45720" tIns="27432" rIns="45720" bIns="27432" anchor="t">
             <a:spAutoFit/>
           </a:bodyPr>
           <a:lstStyle/>
@@ -5842,6 +5573,7 @@
           <a:lstStyle/>
           <a:p>
             <a:pPr algn="ctr"/>
+            <a:endParaRPr/>
           </a:p>
         </p:txBody>
       </p:sp>
@@ -5862,7 +5594,7 @@
           <a:noFill/>
         </p:spPr>
         <p:txBody>
-          <a:bodyPr wrap="square" lIns="45720" rIns="45720" tIns="27432" bIns="27432" anchor="t">
+          <a:bodyPr wrap="square" lIns="45720" tIns="27432" rIns="45720" bIns="27432" anchor="t">
             <a:spAutoFit/>
           </a:bodyPr>
           <a:lstStyle/>
@@ -5943,6 +5675,7 @@
           <a:lstStyle/>
           <a:p>
             <a:pPr algn="ctr"/>
+            <a:endParaRPr/>
           </a:p>
         </p:txBody>
       </p:sp>
@@ -5963,7 +5696,7 @@
           <a:noFill/>
         </p:spPr>
         <p:txBody>
-          <a:bodyPr wrap="square" lIns="45720" rIns="45720" tIns="27432" bIns="27432" anchor="t">
+          <a:bodyPr wrap="square" lIns="45720" tIns="27432" rIns="45720" bIns="27432" anchor="t">
             <a:spAutoFit/>
           </a:bodyPr>
           <a:lstStyle/>
@@ -6044,6 +5777,7 @@
           <a:lstStyle/>
           <a:p>
             <a:pPr algn="ctr"/>
+            <a:endParaRPr/>
           </a:p>
         </p:txBody>
       </p:sp>
@@ -6064,7 +5798,7 @@
           <a:noFill/>
         </p:spPr>
         <p:txBody>
-          <a:bodyPr wrap="square" lIns="45720" rIns="45720" tIns="27432" bIns="27432" anchor="t">
+          <a:bodyPr wrap="square" lIns="45720" tIns="27432" rIns="45720" bIns="27432" anchor="t">
             <a:spAutoFit/>
           </a:bodyPr>
           <a:lstStyle/>
@@ -6145,6 +5879,7 @@
           <a:lstStyle/>
           <a:p>
             <a:pPr algn="ctr"/>
+            <a:endParaRPr/>
           </a:p>
         </p:txBody>
       </p:sp>
@@ -6165,7 +5900,7 @@
           <a:noFill/>
         </p:spPr>
         <p:txBody>
-          <a:bodyPr wrap="square" lIns="45720" rIns="45720" tIns="27432" bIns="27432" anchor="t">
+          <a:bodyPr wrap="square" lIns="45720" tIns="27432" rIns="45720" bIns="27432" anchor="t">
             <a:spAutoFit/>
           </a:bodyPr>
           <a:lstStyle/>
@@ -6246,6 +5981,7 @@
           <a:lstStyle/>
           <a:p>
             <a:pPr algn="ctr"/>
+            <a:endParaRPr/>
           </a:p>
         </p:txBody>
       </p:sp>
@@ -6266,7 +6002,7 @@
           <a:noFill/>
         </p:spPr>
         <p:txBody>
-          <a:bodyPr wrap="square" lIns="45720" rIns="45720" tIns="27432" bIns="27432" anchor="t">
+          <a:bodyPr wrap="square" lIns="45720" tIns="27432" rIns="45720" bIns="27432" anchor="t">
             <a:spAutoFit/>
           </a:bodyPr>
           <a:lstStyle/>
@@ -6347,6 +6083,7 @@
           <a:lstStyle/>
           <a:p>
             <a:pPr algn="ctr"/>
+            <a:endParaRPr/>
           </a:p>
         </p:txBody>
       </p:sp>
@@ -6367,7 +6104,7 @@
           <a:noFill/>
         </p:spPr>
         <p:txBody>
-          <a:bodyPr wrap="square" lIns="45720" rIns="45720" tIns="27432" bIns="27432" anchor="t">
+          <a:bodyPr wrap="square" lIns="45720" tIns="27432" rIns="45720" bIns="27432" anchor="t">
             <a:spAutoFit/>
           </a:bodyPr>
           <a:lstStyle/>
@@ -6422,7 +6159,7 @@
           <a:noFill/>
         </p:spPr>
         <p:txBody>
-          <a:bodyPr wrap="square" lIns="45720" rIns="45720" tIns="27432" bIns="27432" anchor="t">
+          <a:bodyPr wrap="square" lIns="45720" tIns="27432" rIns="45720" bIns="27432" anchor="t">
             <a:spAutoFit/>
           </a:bodyPr>
           <a:lstStyle/>
@@ -6453,7 +6190,7 @@
 </file>
 
 <file path=ppt/slides/slide12.xml><?xml version="1.0" encoding="utf-8"?>
-<p:sld xmlns:a="http://schemas.openxmlformats.org/drawingml/2006/main" xmlns:p="http://schemas.openxmlformats.org/presentationml/2006/main" xmlns:r="http://schemas.openxmlformats.org/officeDocument/2006/relationships">
+<p:sld xmlns:a="http://schemas.openxmlformats.org/drawingml/2006/main" xmlns:r="http://schemas.openxmlformats.org/officeDocument/2006/relationships" xmlns:p="http://schemas.openxmlformats.org/presentationml/2006/main">
   <p:cSld>
     <p:spTree>
       <p:nvGrpSpPr>
@@ -6461,7 +6198,14 @@
         <p:cNvGrpSpPr/>
         <p:nvPr/>
       </p:nvGrpSpPr>
-      <p:grpSpPr/>
+      <p:grpSpPr>
+        <a:xfrm>
+          <a:off x="0" y="0"/>
+          <a:ext cx="0" cy="0"/>
+          <a:chOff x="0" y="0"/>
+          <a:chExt cx="0" cy="0"/>
+        </a:xfrm>
+      </p:grpSpPr>
       <p:sp>
         <p:nvSpPr>
           <p:cNvPr id="2" name="TextBox 1"/>
@@ -6479,7 +6223,7 @@
           <a:noFill/>
         </p:spPr>
         <p:txBody>
-          <a:bodyPr wrap="square" lIns="45720" rIns="45720" tIns="27432" bIns="27432" anchor="t">
+          <a:bodyPr wrap="square" lIns="45720" tIns="27432" rIns="45720" bIns="27432" anchor="t">
             <a:spAutoFit/>
           </a:bodyPr>
           <a:lstStyle/>
@@ -6518,7 +6262,7 @@
           <a:noFill/>
         </p:spPr>
         <p:txBody>
-          <a:bodyPr wrap="square" lIns="45720" rIns="45720" tIns="27432" bIns="27432" anchor="t">
+          <a:bodyPr wrap="square" lIns="45720" tIns="27432" rIns="45720" bIns="27432" anchor="t">
             <a:spAutoFit/>
           </a:bodyPr>
           <a:lstStyle/>
@@ -6557,7 +6301,7 @@
           <a:noFill/>
         </p:spPr>
         <p:txBody>
-          <a:bodyPr wrap="square" lIns="45720" rIns="45720" tIns="27432" bIns="27432" anchor="t">
+          <a:bodyPr wrap="square" lIns="45720" tIns="27432" rIns="45720" bIns="27432" anchor="t">
             <a:spAutoFit/>
           </a:bodyPr>
           <a:lstStyle/>
@@ -6596,7 +6340,7 @@
           <a:noFill/>
         </p:spPr>
         <p:txBody>
-          <a:bodyPr wrap="square" lIns="45720" rIns="45720" tIns="27432" bIns="27432" anchor="t">
+          <a:bodyPr wrap="square" lIns="45720" tIns="27432" rIns="45720" bIns="27432" anchor="t">
             <a:spAutoFit/>
           </a:bodyPr>
           <a:lstStyle/>
@@ -6656,7 +6400,7 @@
 </file>
 
 <file path=ppt/slides/slide13.xml><?xml version="1.0" encoding="utf-8"?>
-<p:sld xmlns:a="http://schemas.openxmlformats.org/drawingml/2006/main" xmlns:p="http://schemas.openxmlformats.org/presentationml/2006/main" xmlns:r="http://schemas.openxmlformats.org/officeDocument/2006/relationships">
+<p:sld xmlns:a="http://schemas.openxmlformats.org/drawingml/2006/main" xmlns:r="http://schemas.openxmlformats.org/officeDocument/2006/relationships" xmlns:p="http://schemas.openxmlformats.org/presentationml/2006/main">
   <p:cSld>
     <p:spTree>
       <p:nvGrpSpPr>
@@ -6664,7 +6408,14 @@
         <p:cNvGrpSpPr/>
         <p:nvPr/>
       </p:nvGrpSpPr>
-      <p:grpSpPr/>
+      <p:grpSpPr>
+        <a:xfrm>
+          <a:off x="0" y="0"/>
+          <a:ext cx="0" cy="0"/>
+          <a:chOff x="0" y="0"/>
+          <a:chExt cx="0" cy="0"/>
+        </a:xfrm>
+      </p:grpSpPr>
       <p:sp>
         <p:nvSpPr>
           <p:cNvPr id="2" name="TextBox 1"/>
@@ -6682,7 +6433,7 @@
           <a:noFill/>
         </p:spPr>
         <p:txBody>
-          <a:bodyPr wrap="square" lIns="45720" rIns="45720" tIns="27432" bIns="27432" anchor="t">
+          <a:bodyPr wrap="square" lIns="45720" tIns="27432" rIns="45720" bIns="27432" anchor="t">
             <a:spAutoFit/>
           </a:bodyPr>
           <a:lstStyle/>
@@ -6721,7 +6472,7 @@
           <a:noFill/>
         </p:spPr>
         <p:txBody>
-          <a:bodyPr wrap="square" lIns="45720" rIns="45720" tIns="27432" bIns="27432" anchor="t">
+          <a:bodyPr wrap="square" lIns="45720" tIns="27432" rIns="45720" bIns="27432" anchor="t">
             <a:spAutoFit/>
           </a:bodyPr>
           <a:lstStyle/>
@@ -6760,7 +6511,7 @@
           <a:noFill/>
         </p:spPr>
         <p:txBody>
-          <a:bodyPr wrap="square" lIns="45720" rIns="45720" tIns="27432" bIns="27432" anchor="t">
+          <a:bodyPr wrap="square" lIns="45720" tIns="27432" rIns="45720" bIns="27432" anchor="t">
             <a:spAutoFit/>
           </a:bodyPr>
           <a:lstStyle/>
@@ -6799,7 +6550,7 @@
           <a:noFill/>
         </p:spPr>
         <p:txBody>
-          <a:bodyPr wrap="square" lIns="45720" rIns="45720" tIns="27432" bIns="27432" anchor="t">
+          <a:bodyPr wrap="square" lIns="45720" tIns="27432" rIns="45720" bIns="27432" anchor="t">
             <a:spAutoFit/>
           </a:bodyPr>
           <a:lstStyle/>
@@ -6858,8 +6609,8 @@
 </p:sld>
 </file>
 
-<file path=ppt/slides/slide14.xml><?xml version="1.0" encoding="utf-8"?>
-<p:sld xmlns:a="http://schemas.openxmlformats.org/drawingml/2006/main" xmlns:p="http://schemas.openxmlformats.org/presentationml/2006/main" xmlns:r="http://schemas.openxmlformats.org/officeDocument/2006/relationships">
+<file path=ppt/slides/slide2.xml><?xml version="1.0" encoding="utf-8"?>
+<p:sld xmlns:a="http://schemas.openxmlformats.org/drawingml/2006/main" xmlns:r="http://schemas.openxmlformats.org/officeDocument/2006/relationships" xmlns:p="http://schemas.openxmlformats.org/presentationml/2006/main">
   <p:cSld>
     <p:spTree>
       <p:nvGrpSpPr>
@@ -6867,7 +6618,14 @@
         <p:cNvGrpSpPr/>
         <p:nvPr/>
       </p:nvGrpSpPr>
-      <p:grpSpPr/>
+      <p:grpSpPr>
+        <a:xfrm>
+          <a:off x="0" y="0"/>
+          <a:ext cx="0" cy="0"/>
+          <a:chOff x="0" y="0"/>
+          <a:chExt cx="0" cy="0"/>
+        </a:xfrm>
+      </p:grpSpPr>
       <p:sp>
         <p:nvSpPr>
           <p:cNvPr id="2" name="TextBox 1"/>
@@ -6885,7 +6643,7 @@
           <a:noFill/>
         </p:spPr>
         <p:txBody>
-          <a:bodyPr wrap="square" lIns="45720" rIns="45720" tIns="27432" bIns="27432" anchor="t">
+          <a:bodyPr wrap="square" lIns="45720" tIns="27432" rIns="45720" bIns="27432" anchor="t">
             <a:spAutoFit/>
           </a:bodyPr>
           <a:lstStyle/>
@@ -6902,7 +6660,7 @@
                 </a:solidFill>
                 <a:latin typeface="Calibri"/>
               </a:rPr>
-              <a:t>CIERRE</a:t>
+              <a:t>PROBLEMA</a:t>
             </a:r>
           </a:p>
         </p:txBody>
@@ -6924,7 +6682,7 @@
           <a:noFill/>
         </p:spPr>
         <p:txBody>
-          <a:bodyPr wrap="square" lIns="45720" rIns="45720" tIns="27432" bIns="27432" anchor="t">
+          <a:bodyPr wrap="square" lIns="45720" tIns="27432" rIns="45720" bIns="27432" anchor="t">
             <a:spAutoFit/>
           </a:bodyPr>
           <a:lstStyle/>
@@ -6941,7 +6699,7 @@
                 </a:solidFill>
                 <a:latin typeface="Calibri"/>
               </a:rPr>
-              <a:t>Entregable del sprint 1 y lo que sigue</a:t>
+              <a:t>Los salones con varias sedes trabajan a ciegas</a:t>
             </a:r>
           </a:p>
         </p:txBody>
@@ -6963,7 +6721,7 @@
           <a:noFill/>
         </p:spPr>
         <p:txBody>
-          <a:bodyPr wrap="square" lIns="45720" rIns="45720" tIns="27432" bIns="27432" anchor="t">
+          <a:bodyPr wrap="square" lIns="45720" tIns="27432" rIns="45720" bIns="27432" anchor="t">
             <a:spAutoFit/>
           </a:bodyPr>
           <a:lstStyle/>
@@ -7002,7 +6760,7 @@
           <a:noFill/>
         </p:spPr>
         <p:txBody>
-          <a:bodyPr wrap="square" lIns="45720" rIns="45720" tIns="27432" bIns="27432" anchor="t">
+          <a:bodyPr wrap="square" lIns="45720" tIns="27432" rIns="45720" bIns="27432" anchor="t">
             <a:spAutoFit/>
           </a:bodyPr>
           <a:lstStyle/>
@@ -7019,21 +6777,240 @@
                 </a:solidFill>
                 <a:latin typeface="Calibri"/>
               </a:rPr>
-              <a:t>14 / 14</a:t>
-            </a:r>
-          </a:p>
-        </p:txBody>
-      </p:sp>
-      <p:sp>
-        <p:nvSpPr>
-          <p:cNvPr id="6" name="Rounded Rectangle 5"/>
+              <a:t>2 / 14</a:t>
+            </a:r>
+          </a:p>
+        </p:txBody>
+      </p:sp>
+      <p:sp>
+        <p:nvSpPr>
+          <p:cNvPr id="6" name="TextBox 5"/>
+          <p:cNvSpPr txBox="1"/>
+          <p:nvPr/>
+        </p:nvSpPr>
+        <p:spPr>
+          <a:xfrm>
+            <a:off x="548640" y="1417320"/>
+            <a:ext cx="4206240" cy="2377440"/>
+          </a:xfrm>
+          <a:prstGeom prst="rect">
+            <a:avLst/>
+          </a:prstGeom>
+          <a:noFill/>
+        </p:spPr>
+        <p:txBody>
+          <a:bodyPr wrap="square" lIns="45720" tIns="27432" rIns="45720" bIns="27432" anchor="t">
+            <a:spAutoFit/>
+          </a:bodyPr>
+          <a:lstStyle/>
+          <a:p>
+            <a:pPr algn="l">
+              <a:spcAft>
+                <a:spcPts val="1200"/>
+              </a:spcAft>
+            </a:pPr>
+            <a:r>
+              <a:rPr sz="1800" b="0" i="0">
+                <a:solidFill>
+                  <a:srgbClr val="222B38"/>
+                </a:solidFill>
+                <a:latin typeface="Calibri"/>
+              </a:rPr>
+              <a:t>Hoy la agenda vive en papel y en el WhatsApp personal de cada estilista; la caja, en un cuaderno.</a:t>
+            </a:r>
+          </a:p>
+          <a:p>
+            <a:pPr algn="l">
+              <a:spcAft>
+                <a:spcPts val="1200"/>
+              </a:spcAft>
+            </a:pPr>
+            <a:r>
+              <a:rPr sz="1800" b="1" i="0">
+                <a:solidFill>
+                  <a:srgbClr val="222B38"/>
+                </a:solidFill>
+                <a:latin typeface="Calibri"/>
+              </a:rPr>
+              <a:t>Resultado: </a:t>
+            </a:r>
+            <a:r>
+              <a:rPr sz="1800" b="0" i="0">
+                <a:solidFill>
+                  <a:srgbClr val="222B38"/>
+                </a:solidFill>
+                <a:latin typeface="Calibri"/>
+              </a:rPr>
+              <a:t>reclamos, mermas y decisiones sin datos.</a:t>
+            </a:r>
+          </a:p>
+        </p:txBody>
+      </p:sp>
+      <p:sp>
+        <p:nvSpPr>
+          <p:cNvPr id="7" name="Rounded Rectangle 6"/>
           <p:cNvSpPr/>
           <p:nvPr/>
         </p:nvSpPr>
         <p:spPr>
           <a:xfrm>
-            <a:off x="548640" y="1463040"/>
-            <a:ext cx="5486400" cy="4206240"/>
+            <a:off x="5120640" y="1417320"/>
+            <a:ext cx="6492240" cy="768096"/>
+          </a:xfrm>
+          <a:prstGeom prst="roundRect">
+            <a:avLst>
+              <a:gd name="adj" fmla="val 8000"/>
+            </a:avLst>
+          </a:prstGeom>
+          <a:solidFill>
+            <a:srgbClr val="FBF0F4"/>
+          </a:solidFill>
+          <a:ln>
+            <a:noFill/>
+          </a:ln>
+          <a:effectLst/>
+        </p:spPr>
+        <p:style>
+          <a:lnRef idx="1">
+            <a:schemeClr val="accent1"/>
+          </a:lnRef>
+          <a:fillRef idx="3">
+            <a:schemeClr val="accent1"/>
+          </a:fillRef>
+          <a:effectRef idx="2">
+            <a:schemeClr val="accent1"/>
+          </a:effectRef>
+          <a:fontRef idx="minor">
+            <a:schemeClr val="lt1"/>
+          </a:fontRef>
+        </p:style>
+        <p:txBody>
+          <a:bodyPr rtlCol="0" anchor="ctr"/>
+          <a:lstStyle/>
+          <a:p>
+            <a:pPr algn="ctr"/>
+            <a:endParaRPr/>
+          </a:p>
+        </p:txBody>
+      </p:sp>
+      <p:sp>
+        <p:nvSpPr>
+          <p:cNvPr id="8" name="Oval 7"/>
+          <p:cNvSpPr/>
+          <p:nvPr/>
+        </p:nvSpPr>
+        <p:spPr>
+          <a:xfrm>
+            <a:off x="5285232" y="1572768"/>
+            <a:ext cx="457200" cy="457200"/>
+          </a:xfrm>
+          <a:prstGeom prst="ellipse">
+            <a:avLst/>
+          </a:prstGeom>
+          <a:solidFill>
+            <a:srgbClr val="B8336A"/>
+          </a:solidFill>
+          <a:ln>
+            <a:noFill/>
+          </a:ln>
+          <a:effectLst/>
+        </p:spPr>
+        <p:style>
+          <a:lnRef idx="1">
+            <a:schemeClr val="accent1"/>
+          </a:lnRef>
+          <a:fillRef idx="3">
+            <a:schemeClr val="accent1"/>
+          </a:fillRef>
+          <a:effectRef idx="2">
+            <a:schemeClr val="accent1"/>
+          </a:effectRef>
+          <a:fontRef idx="minor">
+            <a:schemeClr val="lt1"/>
+          </a:fontRef>
+        </p:style>
+        <p:txBody>
+          <a:bodyPr lIns="0" tIns="0" rIns="0" bIns="0" rtlCol="0" anchor="ctr"/>
+          <a:lstStyle/>
+          <a:p>
+            <a:pPr algn="ctr"/>
+            <a:r>
+              <a:rPr sz="1500" b="1">
+                <a:solidFill>
+                  <a:srgbClr val="FFFFFF"/>
+                </a:solidFill>
+                <a:latin typeface="Calibri"/>
+              </a:rPr>
+              <a:t>1</a:t>
+            </a:r>
+          </a:p>
+        </p:txBody>
+      </p:sp>
+      <p:sp>
+        <p:nvSpPr>
+          <p:cNvPr id="9" name="TextBox 8"/>
+          <p:cNvSpPr txBox="1"/>
+          <p:nvPr/>
+        </p:nvSpPr>
+        <p:spPr>
+          <a:xfrm>
+            <a:off x="5897880" y="1490472"/>
+            <a:ext cx="5577840" cy="640080"/>
+          </a:xfrm>
+          <a:prstGeom prst="rect">
+            <a:avLst/>
+          </a:prstGeom>
+          <a:noFill/>
+        </p:spPr>
+        <p:txBody>
+          <a:bodyPr wrap="square" lIns="45720" tIns="27432" rIns="45720" bIns="27432" anchor="t">
+            <a:spAutoFit/>
+          </a:bodyPr>
+          <a:lstStyle/>
+          <a:p>
+            <a:pPr algn="l">
+              <a:spcAft>
+                <a:spcPts val="0"/>
+              </a:spcAft>
+            </a:pPr>
+            <a:r>
+              <a:rPr sz="1700" b="1" i="0">
+                <a:solidFill>
+                  <a:srgbClr val="1F3B66"/>
+                </a:solidFill>
+                <a:latin typeface="Calibri"/>
+              </a:rPr>
+              <a:t>Cruces de citas</a:t>
+            </a:r>
+          </a:p>
+          <a:p>
+            <a:pPr algn="l">
+              <a:spcAft>
+                <a:spcPts val="0"/>
+              </a:spcAft>
+            </a:pPr>
+            <a:r>
+              <a:rPr sz="1400" b="0" i="0">
+                <a:solidFill>
+                  <a:srgbClr val="5A6475"/>
+                </a:solidFill>
+                <a:latin typeface="Calibri"/>
+              </a:rPr>
+              <a:t>Dos clientas reservan el mismo estilista y sillón a la misma hora.</a:t>
+            </a:r>
+          </a:p>
+        </p:txBody>
+      </p:sp>
+      <p:sp>
+        <p:nvSpPr>
+          <p:cNvPr id="10" name="Rounded Rectangle 9"/>
+          <p:cNvSpPr/>
+          <p:nvPr/>
+        </p:nvSpPr>
+        <p:spPr>
+          <a:xfrm>
+            <a:off x="5120640" y="2313432"/>
+            <a:ext cx="6492240" cy="768096"/>
           </a:xfrm>
           <a:prstGeom prst="roundRect">
             <a:avLst>
@@ -7067,247 +7044,19 @@
           <a:lstStyle/>
           <a:p>
             <a:pPr algn="ctr"/>
-          </a:p>
-        </p:txBody>
-      </p:sp>
-      <p:sp>
-        <p:nvSpPr>
-          <p:cNvPr id="7" name="TextBox 6"/>
-          <p:cNvSpPr txBox="1"/>
-          <p:nvPr/>
-        </p:nvSpPr>
-        <p:spPr>
-          <a:xfrm>
-            <a:off x="777240" y="1600200"/>
-            <a:ext cx="5120640" cy="365760"/>
-          </a:xfrm>
-          <a:prstGeom prst="rect">
-            <a:avLst/>
-          </a:prstGeom>
-          <a:noFill/>
-        </p:spPr>
-        <p:txBody>
-          <a:bodyPr wrap="square" lIns="45720" rIns="45720" tIns="27432" bIns="27432" anchor="t">
-            <a:spAutoFit/>
-          </a:bodyPr>
-          <a:lstStyle/>
-          <a:p>
-            <a:pPr algn="l">
-              <a:spcAft>
-                <a:spcPts val="400"/>
-              </a:spcAft>
-            </a:pPr>
-            <a:r>
-              <a:rPr sz="1700" b="1" i="0">
-                <a:solidFill>
-                  <a:srgbClr val="1F3B66"/>
-                </a:solidFill>
-                <a:latin typeface="Calibri"/>
-              </a:rPr>
-              <a:t>Repositorio</a:t>
-            </a:r>
-          </a:p>
-        </p:txBody>
-      </p:sp>
-      <p:sp>
-        <p:nvSpPr>
-          <p:cNvPr id="8" name="TextBox 7"/>
-          <p:cNvSpPr txBox="1"/>
-          <p:nvPr/>
-        </p:nvSpPr>
-        <p:spPr>
-          <a:xfrm>
-            <a:off x="777240" y="2057400"/>
-            <a:ext cx="5120640" cy="3474720"/>
-          </a:xfrm>
-          <a:prstGeom prst="rect">
-            <a:avLst/>
-          </a:prstGeom>
-          <a:noFill/>
-        </p:spPr>
-        <p:txBody>
-          <a:bodyPr wrap="square" lIns="45720" rIns="45720" tIns="27432" bIns="27432" anchor="t">
-            <a:spAutoFit/>
-          </a:bodyPr>
-          <a:lstStyle/>
-          <a:p>
-            <a:pPr algn="l">
-              <a:spcAft>
-                <a:spcPts val="500"/>
-              </a:spcAft>
-            </a:pPr>
-            <a:r>
-              <a:rPr sz="1400" b="0" i="0">
-                <a:solidFill>
-                  <a:srgbClr val="222B38"/>
-                </a:solidFill>
-                <a:latin typeface="Consolas"/>
-              </a:rPr>
-              <a:t>docs/</a:t>
-            </a:r>
-          </a:p>
-          <a:p>
-            <a:pPr algn="l">
-              <a:spcAft>
-                <a:spcPts val="500"/>
-              </a:spcAft>
-            </a:pPr>
-            <a:r>
-              <a:rPr sz="1400" b="0" i="0">
-                <a:solidFill>
-                  <a:srgbClr val="222B38"/>
-                </a:solidFill>
-                <a:latin typeface="Consolas"/>
-              </a:rPr>
-              <a:t>   01-analisis-de-sistema   (01 – 08)</a:t>
-            </a:r>
-          </a:p>
-          <a:p>
-            <a:pPr algn="l">
-              <a:spcAft>
-                <a:spcPts val="500"/>
-              </a:spcAft>
-            </a:pPr>
-            <a:r>
-              <a:rPr sz="1400" b="0" i="0">
-                <a:solidFill>
-                  <a:srgbClr val="222B38"/>
-                </a:solidFill>
-                <a:latin typeface="Consolas"/>
-              </a:rPr>
-              <a:t>   02-arquitectura-software</a:t>
-            </a:r>
-          </a:p>
-          <a:p>
-            <a:pPr algn="l">
-              <a:spcAft>
-                <a:spcPts val="500"/>
-              </a:spcAft>
-            </a:pPr>
-            <a:r>
-              <a:rPr sz="1400" b="0" i="0">
-                <a:solidFill>
-                  <a:srgbClr val="222B38"/>
-                </a:solidFill>
-                <a:latin typeface="Consolas"/>
-              </a:rPr>
-              <a:t>   03-diseño-de-software/diseño-interno</a:t>
-            </a:r>
-          </a:p>
-          <a:p>
-            <a:pPr algn="l">
-              <a:spcAft>
-                <a:spcPts val="500"/>
-              </a:spcAft>
-            </a:pPr>
-            <a:r>
-              <a:rPr sz="1400" b="0" i="0">
-                <a:solidFill>
-                  <a:srgbClr val="222B38"/>
-                </a:solidFill>
-                <a:latin typeface="Consolas"/>
-              </a:rPr>
-              <a:t>   04-modelo-c4   (niveles 1 – 4)</a:t>
-            </a:r>
-          </a:p>
-          <a:p>
-            <a:pPr algn="l">
-              <a:spcAft>
-                <a:spcPts val="500"/>
-              </a:spcAft>
-            </a:pPr>
-            <a:r>
-              <a:rPr sz="1400" b="0" i="0">
-                <a:solidFill>
-                  <a:srgbClr val="222B38"/>
-                </a:solidFill>
-                <a:latin typeface="Consolas"/>
-              </a:rPr>
-              <a:t>img/   diagramas + fuentes draw.io / SVG</a:t>
-            </a:r>
-          </a:p>
-          <a:p>
-            <a:pPr algn="l">
-              <a:spcAft>
-                <a:spcPts val="500"/>
-              </a:spcAft>
-            </a:pPr>
-            <a:r>
-              <a:rPr sz="1400" b="0" i="0">
-                <a:solidFill>
-                  <a:srgbClr val="222B38"/>
-                </a:solidFill>
-                <a:latin typeface="Consolas"/>
-              </a:rPr>
-              <a:t>tecnologia/anycolor-core   (16 pruebas)</a:t>
-            </a:r>
-          </a:p>
-          <a:p>
-            <a:pPr algn="l">
-              <a:spcAft>
-                <a:spcPts val="500"/>
-              </a:spcAft>
-            </a:pPr>
-            <a:r>
-              <a:rPr sz="1400" b="0" i="0">
-                <a:solidFill>
-                  <a:srgbClr val="222B38"/>
-                </a:solidFill>
-                <a:latin typeface="Consolas"/>
-              </a:rPr>
-              <a:t>propuesta/   v1 · v2 · v3</a:t>
-            </a:r>
-          </a:p>
-        </p:txBody>
-      </p:sp>
-      <p:sp>
-        <p:nvSpPr>
-          <p:cNvPr id="9" name="TextBox 8"/>
-          <p:cNvSpPr txBox="1"/>
-          <p:nvPr/>
-        </p:nvSpPr>
-        <p:spPr>
-          <a:xfrm>
-            <a:off x="6492240" y="1463040"/>
-            <a:ext cx="5120640" cy="365760"/>
-          </a:xfrm>
-          <a:prstGeom prst="rect">
-            <a:avLst/>
-          </a:prstGeom>
-          <a:noFill/>
-        </p:spPr>
-        <p:txBody>
-          <a:bodyPr wrap="square" lIns="45720" rIns="45720" tIns="27432" bIns="27432" anchor="t">
-            <a:spAutoFit/>
-          </a:bodyPr>
-          <a:lstStyle/>
-          <a:p>
-            <a:pPr algn="l">
-              <a:spcAft>
-                <a:spcPts val="400"/>
-              </a:spcAft>
-            </a:pPr>
-            <a:r>
-              <a:rPr sz="1700" b="1" i="0">
-                <a:solidFill>
-                  <a:srgbClr val="1F3B66"/>
-                </a:solidFill>
-                <a:latin typeface="Calibri"/>
-              </a:rPr>
-              <a:t>Sprint 2 · Codificación</a:t>
-            </a:r>
-          </a:p>
-        </p:txBody>
-      </p:sp>
-      <p:sp>
-        <p:nvSpPr>
-          <p:cNvPr id="10" name="Oval 9"/>
+            <a:endParaRPr/>
+          </a:p>
+        </p:txBody>
+      </p:sp>
+      <p:sp>
+        <p:nvSpPr>
+          <p:cNvPr id="11" name="Oval 10"/>
           <p:cNvSpPr/>
           <p:nvPr/>
         </p:nvSpPr>
         <p:spPr>
           <a:xfrm>
-            <a:off x="6492240" y="2011680"/>
+            <a:off x="5285232" y="2468880"/>
             <a:ext cx="457200" cy="457200"/>
           </a:xfrm>
           <a:prstGeom prst="ellipse">
@@ -7336,7 +7085,7 @@
           </a:fontRef>
         </p:style>
         <p:txBody>
-          <a:bodyPr rtlCol="0" anchor="ctr" lIns="0" rIns="0" tIns="0" bIns="0"/>
+          <a:bodyPr lIns="0" tIns="0" rIns="0" bIns="0" rtlCol="0" anchor="ctr"/>
           <a:lstStyle/>
           <a:p>
             <a:pPr algn="ctr"/>
@@ -7347,21 +7096,21 @@
                 </a:solidFill>
                 <a:latin typeface="Calibri"/>
               </a:rPr>
-              <a:t>1</a:t>
-            </a:r>
-          </a:p>
-        </p:txBody>
-      </p:sp>
-      <p:sp>
-        <p:nvSpPr>
-          <p:cNvPr id="11" name="TextBox 10"/>
+              <a:t>2</a:t>
+            </a:r>
+          </a:p>
+        </p:txBody>
+      </p:sp>
+      <p:sp>
+        <p:nvSpPr>
+          <p:cNvPr id="12" name="TextBox 11"/>
           <p:cNvSpPr txBox="1"/>
           <p:nvPr/>
         </p:nvSpPr>
         <p:spPr>
           <a:xfrm>
-            <a:off x="7132320" y="1920240"/>
-            <a:ext cx="4572000" cy="868680"/>
+            <a:off x="5897880" y="2386584"/>
+            <a:ext cx="5577840" cy="640080"/>
           </a:xfrm>
           <a:prstGeom prst="rect">
             <a:avLst/>
@@ -7369,7 +7118,7 @@
           <a:noFill/>
         </p:spPr>
         <p:txBody>
-          <a:bodyPr wrap="square" lIns="45720" rIns="45720" tIns="27432" bIns="27432" anchor="t">
+          <a:bodyPr wrap="square" lIns="45720" tIns="27432" rIns="45720" bIns="27432" anchor="t">
             <a:spAutoFit/>
           </a:bodyPr>
           <a:lstStyle/>
@@ -7380,13 +7129,13 @@
               </a:spcAft>
             </a:pPr>
             <a:r>
-              <a:rPr sz="1600" b="1" i="0">
-                <a:solidFill>
-                  <a:srgbClr val="222B38"/>
-                </a:solidFill>
-                <a:latin typeface="Calibri"/>
-              </a:rPr>
-              <a:t>Módulo Citas en NestJS</a:t>
+              <a:rPr sz="1700" b="1" i="0">
+                <a:solidFill>
+                  <a:srgbClr val="1F3B66"/>
+                </a:solidFill>
+                <a:latin typeface="Calibri"/>
+              </a:rPr>
+              <a:t>Stock sin control</a:t>
             </a:r>
           </a:p>
           <a:p>
@@ -7402,20 +7151,67 @@
                 </a:solidFill>
                 <a:latin typeface="Calibri"/>
               </a:rPr>
-              <a:t>Controladores y casos de uso actuales sobre la API real</a:t>
-            </a:r>
-          </a:p>
-        </p:txBody>
-      </p:sp>
-      <p:sp>
-        <p:nvSpPr>
-          <p:cNvPr id="12" name="Oval 11"/>
+              <a:t>Los tintes y oxidantes no se descuentan al aplicar el servicio.</a:t>
+            </a:r>
+          </a:p>
+        </p:txBody>
+      </p:sp>
+      <p:sp>
+        <p:nvSpPr>
+          <p:cNvPr id="13" name="Rounded Rectangle 12"/>
           <p:cNvSpPr/>
           <p:nvPr/>
         </p:nvSpPr>
         <p:spPr>
           <a:xfrm>
-            <a:off x="6492240" y="2953512"/>
+            <a:off x="5120640" y="3209544"/>
+            <a:ext cx="6492240" cy="768096"/>
+          </a:xfrm>
+          <a:prstGeom prst="roundRect">
+            <a:avLst>
+              <a:gd name="adj" fmla="val 8000"/>
+            </a:avLst>
+          </a:prstGeom>
+          <a:solidFill>
+            <a:srgbClr val="F3F5F9"/>
+          </a:solidFill>
+          <a:ln>
+            <a:noFill/>
+          </a:ln>
+          <a:effectLst/>
+        </p:spPr>
+        <p:style>
+          <a:lnRef idx="1">
+            <a:schemeClr val="accent1"/>
+          </a:lnRef>
+          <a:fillRef idx="3">
+            <a:schemeClr val="accent1"/>
+          </a:fillRef>
+          <a:effectRef idx="2">
+            <a:schemeClr val="accent1"/>
+          </a:effectRef>
+          <a:fontRef idx="minor">
+            <a:schemeClr val="lt1"/>
+          </a:fontRef>
+        </p:style>
+        <p:txBody>
+          <a:bodyPr rtlCol="0" anchor="ctr"/>
+          <a:lstStyle/>
+          <a:p>
+            <a:pPr algn="ctr"/>
+            <a:endParaRPr/>
+          </a:p>
+        </p:txBody>
+      </p:sp>
+      <p:sp>
+        <p:nvSpPr>
+          <p:cNvPr id="14" name="Oval 13"/>
+          <p:cNvSpPr/>
+          <p:nvPr/>
+        </p:nvSpPr>
+        <p:spPr>
+          <a:xfrm>
+            <a:off x="5285232" y="3364991"/>
             <a:ext cx="457200" cy="457200"/>
           </a:xfrm>
           <a:prstGeom prst="ellipse">
@@ -7444,7 +7240,7 @@
           </a:fontRef>
         </p:style>
         <p:txBody>
-          <a:bodyPr rtlCol="0" anchor="ctr" lIns="0" rIns="0" tIns="0" bIns="0"/>
+          <a:bodyPr lIns="0" tIns="0" rIns="0" bIns="0" rtlCol="0" anchor="ctr"/>
           <a:lstStyle/>
           <a:p>
             <a:pPr algn="ctr"/>
@@ -7455,21 +7251,21 @@
                 </a:solidFill>
                 <a:latin typeface="Calibri"/>
               </a:rPr>
-              <a:t>2</a:t>
-            </a:r>
-          </a:p>
-        </p:txBody>
-      </p:sp>
-      <p:sp>
-        <p:nvSpPr>
-          <p:cNvPr id="13" name="TextBox 12"/>
+              <a:t>3</a:t>
+            </a:r>
+          </a:p>
+        </p:txBody>
+      </p:sp>
+      <p:sp>
+        <p:nvSpPr>
+          <p:cNvPr id="15" name="TextBox 14"/>
           <p:cNvSpPr txBox="1"/>
           <p:nvPr/>
         </p:nvSpPr>
         <p:spPr>
           <a:xfrm>
-            <a:off x="7132320" y="2862072"/>
-            <a:ext cx="4572000" cy="868680"/>
+            <a:off x="5897880" y="3282696"/>
+            <a:ext cx="5577840" cy="640080"/>
           </a:xfrm>
           <a:prstGeom prst="rect">
             <a:avLst/>
@@ -7477,7 +7273,7 @@
           <a:noFill/>
         </p:spPr>
         <p:txBody>
-          <a:bodyPr wrap="square" lIns="45720" rIns="45720" tIns="27432" bIns="27432" anchor="t">
+          <a:bodyPr wrap="square" lIns="45720" tIns="27432" rIns="45720" bIns="27432" anchor="t">
             <a:spAutoFit/>
           </a:bodyPr>
           <a:lstStyle/>
@@ -7488,13 +7284,13 @@
               </a:spcAft>
             </a:pPr>
             <a:r>
-              <a:rPr sz="1600" b="1" i="0">
-                <a:solidFill>
-                  <a:srgbClr val="222B38"/>
-                </a:solidFill>
-                <a:latin typeface="Calibri"/>
-              </a:rPr>
-              <a:t>PostgreSQL + Redis reales</a:t>
+              <a:rPr sz="1700" b="1" i="0">
+                <a:solidFill>
+                  <a:srgbClr val="1F3B66"/>
+                </a:solidFill>
+                <a:latin typeface="Calibri"/>
+              </a:rPr>
+              <a:t>Caja manual</a:t>
             </a:r>
           </a:p>
           <a:p>
@@ -7510,20 +7306,67 @@
                 </a:solidFill>
                 <a:latin typeface="Calibri"/>
               </a:rPr>
-              <a:t>RepositorioCitasPostgres con la restricción EXCLUDE</a:t>
-            </a:r>
-          </a:p>
-        </p:txBody>
-      </p:sp>
-      <p:sp>
-        <p:nvSpPr>
-          <p:cNvPr id="14" name="Oval 13"/>
+              <a:t>Se cuadra al final del día; faltantes sin trazabilidad.</a:t>
+            </a:r>
+          </a:p>
+        </p:txBody>
+      </p:sp>
+      <p:sp>
+        <p:nvSpPr>
+          <p:cNvPr id="16" name="Rounded Rectangle 15"/>
           <p:cNvSpPr/>
           <p:nvPr/>
         </p:nvSpPr>
         <p:spPr>
           <a:xfrm>
-            <a:off x="6492240" y="3895344"/>
+            <a:off x="5120640" y="4105656"/>
+            <a:ext cx="6492240" cy="768096"/>
+          </a:xfrm>
+          <a:prstGeom prst="roundRect">
+            <a:avLst>
+              <a:gd name="adj" fmla="val 8000"/>
+            </a:avLst>
+          </a:prstGeom>
+          <a:solidFill>
+            <a:srgbClr val="F3F5F9"/>
+          </a:solidFill>
+          <a:ln>
+            <a:noFill/>
+          </a:ln>
+          <a:effectLst/>
+        </p:spPr>
+        <p:style>
+          <a:lnRef idx="1">
+            <a:schemeClr val="accent1"/>
+          </a:lnRef>
+          <a:fillRef idx="3">
+            <a:schemeClr val="accent1"/>
+          </a:fillRef>
+          <a:effectRef idx="2">
+            <a:schemeClr val="accent1"/>
+          </a:effectRef>
+          <a:fontRef idx="minor">
+            <a:schemeClr val="lt1"/>
+          </a:fontRef>
+        </p:style>
+        <p:txBody>
+          <a:bodyPr rtlCol="0" anchor="ctr"/>
+          <a:lstStyle/>
+          <a:p>
+            <a:pPr algn="ctr"/>
+            <a:endParaRPr/>
+          </a:p>
+        </p:txBody>
+      </p:sp>
+      <p:sp>
+        <p:nvSpPr>
+          <p:cNvPr id="17" name="Oval 16"/>
+          <p:cNvSpPr/>
+          <p:nvPr/>
+        </p:nvSpPr>
+        <p:spPr>
+          <a:xfrm>
+            <a:off x="5285232" y="4261104"/>
             <a:ext cx="457200" cy="457200"/>
           </a:xfrm>
           <a:prstGeom prst="ellipse">
@@ -7552,7 +7395,7 @@
           </a:fontRef>
         </p:style>
         <p:txBody>
-          <a:bodyPr rtlCol="0" anchor="ctr" lIns="0" rIns="0" tIns="0" bIns="0"/>
+          <a:bodyPr lIns="0" tIns="0" rIns="0" bIns="0" rtlCol="0" anchor="ctr"/>
           <a:lstStyle/>
           <a:p>
             <a:pPr algn="ctr"/>
@@ -7563,21 +7406,21 @@
                 </a:solidFill>
                 <a:latin typeface="Calibri"/>
               </a:rPr>
-              <a:t>3</a:t>
-            </a:r>
-          </a:p>
-        </p:txBody>
-      </p:sp>
-      <p:sp>
-        <p:nvSpPr>
-          <p:cNvPr id="15" name="TextBox 14"/>
+              <a:t>4</a:t>
+            </a:r>
+          </a:p>
+        </p:txBody>
+      </p:sp>
+      <p:sp>
+        <p:nvSpPr>
+          <p:cNvPr id="18" name="TextBox 17"/>
           <p:cNvSpPr txBox="1"/>
           <p:nvPr/>
         </p:nvSpPr>
         <p:spPr>
           <a:xfrm>
-            <a:off x="7132320" y="3803904"/>
-            <a:ext cx="4572000" cy="868680"/>
+            <a:off x="5897880" y="4178808"/>
+            <a:ext cx="5577840" cy="640080"/>
           </a:xfrm>
           <a:prstGeom prst="rect">
             <a:avLst/>
@@ -7585,7 +7428,7 @@
           <a:noFill/>
         </p:spPr>
         <p:txBody>
-          <a:bodyPr wrap="square" lIns="45720" rIns="45720" tIns="27432" bIns="27432" anchor="t">
+          <a:bodyPr wrap="square" lIns="45720" tIns="27432" rIns="45720" bIns="27432" anchor="t">
             <a:spAutoFit/>
           </a:bodyPr>
           <a:lstStyle/>
@@ -7596,13 +7439,13 @@
               </a:spcAft>
             </a:pPr>
             <a:r>
-              <a:rPr sz="1600" b="1" i="0">
-                <a:solidFill>
-                  <a:srgbClr val="222B38"/>
-                </a:solidFill>
-                <a:latin typeface="Calibri"/>
-              </a:rPr>
-              <a:t>Pantallas de reserva</a:t>
+              <a:rPr sz="1700" b="1" i="0">
+                <a:solidFill>
+                  <a:srgbClr val="1F3B66"/>
+                </a:solidFill>
+                <a:latin typeface="Calibri"/>
+              </a:rPr>
+              <a:t>Comisiones en Excel</a:t>
             </a:r>
           </a:p>
           <a:p>
@@ -7618,20 +7461,67 @@
                 </a:solidFill>
                 <a:latin typeface="Calibri"/>
               </a:rPr>
-              <a:t>Flujo de 4 pasos desde el celular (EQ-08)</a:t>
-            </a:r>
-          </a:p>
-        </p:txBody>
-      </p:sp>
-      <p:sp>
-        <p:nvSpPr>
-          <p:cNvPr id="16" name="Oval 15"/>
+              <a:t>Errores de cálculo y conflictos con el personal.</a:t>
+            </a:r>
+          </a:p>
+        </p:txBody>
+      </p:sp>
+      <p:sp>
+        <p:nvSpPr>
+          <p:cNvPr id="19" name="Rounded Rectangle 18"/>
           <p:cNvSpPr/>
           <p:nvPr/>
         </p:nvSpPr>
         <p:spPr>
           <a:xfrm>
-            <a:off x="6492240" y="4837175"/>
+            <a:off x="5120640" y="5001768"/>
+            <a:ext cx="6492240" cy="768096"/>
+          </a:xfrm>
+          <a:prstGeom prst="roundRect">
+            <a:avLst>
+              <a:gd name="adj" fmla="val 8000"/>
+            </a:avLst>
+          </a:prstGeom>
+          <a:solidFill>
+            <a:srgbClr val="F3F5F9"/>
+          </a:solidFill>
+          <a:ln>
+            <a:noFill/>
+          </a:ln>
+          <a:effectLst/>
+        </p:spPr>
+        <p:style>
+          <a:lnRef idx="1">
+            <a:schemeClr val="accent1"/>
+          </a:lnRef>
+          <a:fillRef idx="3">
+            <a:schemeClr val="accent1"/>
+          </a:fillRef>
+          <a:effectRef idx="2">
+            <a:schemeClr val="accent1"/>
+          </a:effectRef>
+          <a:fontRef idx="minor">
+            <a:schemeClr val="lt1"/>
+          </a:fontRef>
+        </p:style>
+        <p:txBody>
+          <a:bodyPr rtlCol="0" anchor="ctr"/>
+          <a:lstStyle/>
+          <a:p>
+            <a:pPr algn="ctr"/>
+            <a:endParaRPr/>
+          </a:p>
+        </p:txBody>
+      </p:sp>
+      <p:sp>
+        <p:nvSpPr>
+          <p:cNvPr id="20" name="Oval 19"/>
+          <p:cNvSpPr/>
+          <p:nvPr/>
+        </p:nvSpPr>
+        <p:spPr>
+          <a:xfrm>
+            <a:off x="5285232" y="5157216"/>
             <a:ext cx="457200" cy="457200"/>
           </a:xfrm>
           <a:prstGeom prst="ellipse">
@@ -7660,7 +7550,7 @@
           </a:fontRef>
         </p:style>
         <p:txBody>
-          <a:bodyPr rtlCol="0" anchor="ctr" lIns="0" rIns="0" tIns="0" bIns="0"/>
+          <a:bodyPr lIns="0" tIns="0" rIns="0" bIns="0" rtlCol="0" anchor="ctr"/>
           <a:lstStyle/>
           <a:p>
             <a:pPr algn="ctr"/>
@@ -7671,21 +7561,21 @@
                 </a:solidFill>
                 <a:latin typeface="Calibri"/>
               </a:rPr>
-              <a:t>4</a:t>
-            </a:r>
-          </a:p>
-        </p:txBody>
-      </p:sp>
-      <p:sp>
-        <p:nvSpPr>
-          <p:cNvPr id="17" name="TextBox 16"/>
+              <a:t>5</a:t>
+            </a:r>
+          </a:p>
+        </p:txBody>
+      </p:sp>
+      <p:sp>
+        <p:nvSpPr>
+          <p:cNvPr id="21" name="TextBox 20"/>
           <p:cNvSpPr txBox="1"/>
           <p:nvPr/>
         </p:nvSpPr>
         <p:spPr>
           <a:xfrm>
-            <a:off x="7132320" y="4745736"/>
-            <a:ext cx="4572000" cy="868680"/>
+            <a:off x="5897880" y="5074920"/>
+            <a:ext cx="5577840" cy="640080"/>
           </a:xfrm>
           <a:prstGeom prst="rect">
             <a:avLst/>
@@ -7693,7 +7583,7 @@
           <a:noFill/>
         </p:spPr>
         <p:txBody>
-          <a:bodyPr wrap="square" lIns="45720" rIns="45720" tIns="27432" bIns="27432" anchor="t">
+          <a:bodyPr wrap="square" lIns="45720" tIns="27432" rIns="45720" bIns="27432" anchor="t">
             <a:spAutoFit/>
           </a:bodyPr>
           <a:lstStyle/>
@@ -7704,13 +7594,13 @@
               </a:spcAft>
             </a:pPr>
             <a:r>
-              <a:rPr sz="1600" b="1" i="0">
-                <a:solidFill>
-                  <a:srgbClr val="222B38"/>
-                </a:solidFill>
-                <a:latin typeface="Calibri"/>
-              </a:rPr>
-              <a:t>Pruebas de carga</a:t>
+              <a:rPr sz="1700" b="1" i="0">
+                <a:solidFill>
+                  <a:srgbClr val="1F3B66"/>
+                </a:solidFill>
+                <a:latin typeface="Calibri"/>
+              </a:rPr>
+              <a:t>Sin visión por sede</a:t>
             </a:r>
           </a:p>
           <a:p>
@@ -7726,501 +7616,26 @@
                 </a:solidFill>
                 <a:latin typeface="Calibri"/>
               </a:rPr>
-              <a:t>Medir EQ-01 y EQ-05 con usuarios simultáneos</a:t>
-            </a:r>
-          </a:p>
-        </p:txBody>
-      </p:sp>
-      <p:sp>
-        <p:nvSpPr>
-          <p:cNvPr id="18" name="TextBox 17"/>
-          <p:cNvSpPr txBox="1"/>
-          <p:nvPr/>
-        </p:nvSpPr>
-        <p:spPr>
-          <a:xfrm>
-            <a:off x="548640" y="5852160"/>
-            <a:ext cx="11064240" cy="411480"/>
-          </a:xfrm>
-          <a:prstGeom prst="rect">
-            <a:avLst/>
-          </a:prstGeom>
-          <a:noFill/>
-        </p:spPr>
-        <p:txBody>
-          <a:bodyPr wrap="square" lIns="45720" rIns="45720" tIns="27432" bIns="27432" anchor="t">
-            <a:spAutoFit/>
-          </a:bodyPr>
-          <a:lstStyle/>
-          <a:p>
-            <a:pPr algn="l">
-              <a:spcAft>
-                <a:spcPts val="400"/>
-              </a:spcAft>
-            </a:pPr>
-            <a:r>
-              <a:rPr sz="1600" b="1" i="0">
-                <a:solidFill>
-                  <a:srgbClr val="B8336A"/>
-                </a:solidFill>
-                <a:latin typeface="Calibri"/>
-              </a:rPr>
-              <a:t>github.com/RodrigoCayllahua/AnyColor-arquitSoft-02-Andy-Conde</a:t>
-            </a:r>
-          </a:p>
-        </p:txBody>
-      </p:sp>
-    </p:spTree>
-  </p:cSld>
-  <p:clrMapOvr>
-    <a:masterClrMapping/>
-  </p:clrMapOvr>
-</p:sld>
-</file>
-
-<file path=ppt/slides/slide2.xml><?xml version="1.0" encoding="utf-8"?>
-<p:sld xmlns:a="http://schemas.openxmlformats.org/drawingml/2006/main" xmlns:p="http://schemas.openxmlformats.org/presentationml/2006/main" xmlns:r="http://schemas.openxmlformats.org/officeDocument/2006/relationships">
-  <p:cSld>
-    <p:spTree>
-      <p:nvGrpSpPr>
-        <p:cNvPr id="1" name=""/>
-        <p:cNvGrpSpPr/>
-        <p:nvPr/>
-      </p:nvGrpSpPr>
-      <p:grpSpPr/>
-      <p:sp>
-        <p:nvSpPr>
-          <p:cNvPr id="2" name="TextBox 1"/>
-          <p:cNvSpPr txBox="1"/>
-          <p:nvPr/>
-        </p:nvSpPr>
-        <p:spPr>
-          <a:xfrm>
-            <a:off x="548640" y="320040"/>
-            <a:ext cx="8229600" cy="320040"/>
-          </a:xfrm>
-          <a:prstGeom prst="rect">
-            <a:avLst/>
-          </a:prstGeom>
-          <a:noFill/>
-        </p:spPr>
-        <p:txBody>
-          <a:bodyPr wrap="square" lIns="45720" rIns="45720" tIns="27432" bIns="27432" anchor="t">
-            <a:spAutoFit/>
-          </a:bodyPr>
-          <a:lstStyle/>
-          <a:p>
-            <a:pPr algn="l">
-              <a:spcAft>
-                <a:spcPts val="400"/>
-              </a:spcAft>
-            </a:pPr>
-            <a:r>
-              <a:rPr sz="1200" b="1" i="0">
-                <a:solidFill>
-                  <a:srgbClr val="B8336A"/>
-                </a:solidFill>
-                <a:latin typeface="Calibri"/>
-              </a:rPr>
-              <a:t>PROBLEMA</a:t>
-            </a:r>
-          </a:p>
-        </p:txBody>
-      </p:sp>
-      <p:sp>
-        <p:nvSpPr>
-          <p:cNvPr id="3" name="TextBox 2"/>
-          <p:cNvSpPr txBox="1"/>
-          <p:nvPr/>
-        </p:nvSpPr>
-        <p:spPr>
-          <a:xfrm>
-            <a:off x="548640" y="566928"/>
-            <a:ext cx="11155680" cy="731520"/>
-          </a:xfrm>
-          <a:prstGeom prst="rect">
-            <a:avLst/>
-          </a:prstGeom>
-          <a:noFill/>
-        </p:spPr>
-        <p:txBody>
-          <a:bodyPr wrap="square" lIns="45720" rIns="45720" tIns="27432" bIns="27432" anchor="t">
-            <a:spAutoFit/>
-          </a:bodyPr>
-          <a:lstStyle/>
-          <a:p>
-            <a:pPr algn="l">
-              <a:spcAft>
-                <a:spcPts val="400"/>
-              </a:spcAft>
-            </a:pPr>
-            <a:r>
-              <a:rPr sz="3200" b="1" i="0">
-                <a:solidFill>
-                  <a:srgbClr val="1F3B66"/>
-                </a:solidFill>
-                <a:latin typeface="Calibri"/>
-              </a:rPr>
-              <a:t>Los salones con varias sedes trabajan a ciegas</a:t>
-            </a:r>
-          </a:p>
-        </p:txBody>
-      </p:sp>
-      <p:sp>
-        <p:nvSpPr>
-          <p:cNvPr id="4" name="TextBox 3"/>
-          <p:cNvSpPr txBox="1"/>
-          <p:nvPr/>
-        </p:nvSpPr>
-        <p:spPr>
-          <a:xfrm>
-            <a:off x="548640" y="6419088"/>
-            <a:ext cx="5486400" cy="274320"/>
-          </a:xfrm>
-          <a:prstGeom prst="rect">
-            <a:avLst/>
-          </a:prstGeom>
-          <a:noFill/>
-        </p:spPr>
-        <p:txBody>
-          <a:bodyPr wrap="square" lIns="45720" rIns="45720" tIns="27432" bIns="27432" anchor="t">
-            <a:spAutoFit/>
-          </a:bodyPr>
-          <a:lstStyle/>
-          <a:p>
-            <a:pPr algn="l">
-              <a:spcAft>
-                <a:spcPts val="400"/>
-              </a:spcAft>
-            </a:pPr>
-            <a:r>
-              <a:rPr sz="1000" b="0" i="0">
-                <a:solidFill>
-                  <a:srgbClr val="5A6475"/>
-                </a:solidFill>
-                <a:latin typeface="Calibri"/>
-              </a:rPr>
-              <a:t>AnyColor Salón · Primer sprint</a:t>
-            </a:r>
-          </a:p>
-        </p:txBody>
-      </p:sp>
-      <p:sp>
-        <p:nvSpPr>
-          <p:cNvPr id="5" name="TextBox 4"/>
-          <p:cNvSpPr txBox="1"/>
-          <p:nvPr/>
-        </p:nvSpPr>
-        <p:spPr>
-          <a:xfrm>
-            <a:off x="10698480" y="6419088"/>
-            <a:ext cx="1005840" cy="274320"/>
-          </a:xfrm>
-          <a:prstGeom prst="rect">
-            <a:avLst/>
-          </a:prstGeom>
-          <a:noFill/>
-        </p:spPr>
-        <p:txBody>
-          <a:bodyPr wrap="square" lIns="45720" rIns="45720" tIns="27432" bIns="27432" anchor="t">
-            <a:spAutoFit/>
-          </a:bodyPr>
-          <a:lstStyle/>
-          <a:p>
-            <a:pPr algn="r">
-              <a:spcAft>
-                <a:spcPts val="400"/>
-              </a:spcAft>
-            </a:pPr>
-            <a:r>
-              <a:rPr sz="1000" b="0" i="0">
-                <a:solidFill>
-                  <a:srgbClr val="5A6475"/>
-                </a:solidFill>
-                <a:latin typeface="Calibri"/>
-              </a:rPr>
-              <a:t>2 / 14</a:t>
-            </a:r>
-          </a:p>
-        </p:txBody>
-      </p:sp>
-      <p:sp>
-        <p:nvSpPr>
-          <p:cNvPr id="6" name="TextBox 5"/>
-          <p:cNvSpPr txBox="1"/>
-          <p:nvPr/>
-        </p:nvSpPr>
-        <p:spPr>
-          <a:xfrm>
-            <a:off x="548640" y="1417320"/>
-            <a:ext cx="4206240" cy="2377440"/>
-          </a:xfrm>
-          <a:prstGeom prst="rect">
-            <a:avLst/>
-          </a:prstGeom>
-          <a:noFill/>
-        </p:spPr>
-        <p:txBody>
-          <a:bodyPr wrap="square" lIns="45720" rIns="45720" tIns="27432" bIns="27432" anchor="t">
-            <a:spAutoFit/>
-          </a:bodyPr>
-          <a:lstStyle/>
-          <a:p>
-            <a:pPr algn="l">
-              <a:spcAft>
-                <a:spcPts val="1200"/>
-              </a:spcAft>
-            </a:pPr>
-            <a:r>
-              <a:rPr sz="1800" b="0" i="0">
-                <a:solidFill>
-                  <a:srgbClr val="222B38"/>
-                </a:solidFill>
-                <a:latin typeface="Calibri"/>
-              </a:rPr>
-              <a:t>Hoy la agenda vive en papel y en el WhatsApp personal de cada estilista; la caja, en un cuaderno.</a:t>
-            </a:r>
-          </a:p>
-          <a:p>
-            <a:pPr algn="l">
-              <a:spcAft>
-                <a:spcPts val="1200"/>
-              </a:spcAft>
-            </a:pPr>
-            <a:r>
-              <a:rPr sz="1800" b="1" i="0">
-                <a:solidFill>
-                  <a:srgbClr val="222B38"/>
-                </a:solidFill>
-                <a:latin typeface="Calibri"/>
-              </a:rPr>
-              <a:t>Resultado: </a:t>
-            </a:r>
-            <a:r>
-              <a:rPr sz="1800" b="0" i="0">
-                <a:solidFill>
-                  <a:srgbClr val="222B38"/>
-                </a:solidFill>
-                <a:latin typeface="Calibri"/>
-              </a:rPr>
-              <a:t>reclamos, mermas y decisiones sin datos.</a:t>
-            </a:r>
-          </a:p>
-        </p:txBody>
-      </p:sp>
-      <p:sp>
-        <p:nvSpPr>
-          <p:cNvPr id="7" name="Rounded Rectangle 6"/>
+              <a:t>El dueño no compara sus sedes ni ve indicadores.</a:t>
+            </a:r>
+          </a:p>
+        </p:txBody>
+      </p:sp>
+      <p:sp>
+        <p:nvSpPr>
+          <p:cNvPr id="22" name="Rounded Rectangle 21"/>
           <p:cNvSpPr/>
           <p:nvPr/>
         </p:nvSpPr>
         <p:spPr>
           <a:xfrm>
-            <a:off x="5120640" y="1417320"/>
-            <a:ext cx="6492240" cy="768096"/>
+            <a:off x="548640" y="3429000"/>
+            <a:ext cx="4206240" cy="1737360"/>
           </a:xfrm>
           <a:prstGeom prst="roundRect">
             <a:avLst>
               <a:gd name="adj" fmla="val 8000"/>
             </a:avLst>
-          </a:prstGeom>
-          <a:solidFill>
-            <a:srgbClr val="FBF0F4"/>
-          </a:solidFill>
-          <a:ln>
-            <a:noFill/>
-          </a:ln>
-          <a:effectLst/>
-        </p:spPr>
-        <p:style>
-          <a:lnRef idx="1">
-            <a:schemeClr val="accent1"/>
-          </a:lnRef>
-          <a:fillRef idx="3">
-            <a:schemeClr val="accent1"/>
-          </a:fillRef>
-          <a:effectRef idx="2">
-            <a:schemeClr val="accent1"/>
-          </a:effectRef>
-          <a:fontRef idx="minor">
-            <a:schemeClr val="lt1"/>
-          </a:fontRef>
-        </p:style>
-        <p:txBody>
-          <a:bodyPr rtlCol="0" anchor="ctr"/>
-          <a:lstStyle/>
-          <a:p>
-            <a:pPr algn="ctr"/>
-          </a:p>
-        </p:txBody>
-      </p:sp>
-      <p:sp>
-        <p:nvSpPr>
-          <p:cNvPr id="8" name="Oval 7"/>
-          <p:cNvSpPr/>
-          <p:nvPr/>
-        </p:nvSpPr>
-        <p:spPr>
-          <a:xfrm>
-            <a:off x="5285232" y="1572768"/>
-            <a:ext cx="457200" cy="457200"/>
-          </a:xfrm>
-          <a:prstGeom prst="ellipse">
-            <a:avLst/>
-          </a:prstGeom>
-          <a:solidFill>
-            <a:srgbClr val="B8336A"/>
-          </a:solidFill>
-          <a:ln>
-            <a:noFill/>
-          </a:ln>
-          <a:effectLst/>
-        </p:spPr>
-        <p:style>
-          <a:lnRef idx="1">
-            <a:schemeClr val="accent1"/>
-          </a:lnRef>
-          <a:fillRef idx="3">
-            <a:schemeClr val="accent1"/>
-          </a:fillRef>
-          <a:effectRef idx="2">
-            <a:schemeClr val="accent1"/>
-          </a:effectRef>
-          <a:fontRef idx="minor">
-            <a:schemeClr val="lt1"/>
-          </a:fontRef>
-        </p:style>
-        <p:txBody>
-          <a:bodyPr rtlCol="0" anchor="ctr" lIns="0" rIns="0" tIns="0" bIns="0"/>
-          <a:lstStyle/>
-          <a:p>
-            <a:pPr algn="ctr"/>
-            <a:r>
-              <a:rPr sz="1500" b="1">
-                <a:solidFill>
-                  <a:srgbClr val="FFFFFF"/>
-                </a:solidFill>
-                <a:latin typeface="Calibri"/>
-              </a:rPr>
-              <a:t>1</a:t>
-            </a:r>
-          </a:p>
-        </p:txBody>
-      </p:sp>
-      <p:sp>
-        <p:nvSpPr>
-          <p:cNvPr id="9" name="TextBox 8"/>
-          <p:cNvSpPr txBox="1"/>
-          <p:nvPr/>
-        </p:nvSpPr>
-        <p:spPr>
-          <a:xfrm>
-            <a:off x="5897880" y="1490472"/>
-            <a:ext cx="5577840" cy="640080"/>
-          </a:xfrm>
-          <a:prstGeom prst="rect">
-            <a:avLst/>
-          </a:prstGeom>
-          <a:noFill/>
-        </p:spPr>
-        <p:txBody>
-          <a:bodyPr wrap="square" lIns="45720" rIns="45720" tIns="27432" bIns="27432" anchor="t">
-            <a:spAutoFit/>
-          </a:bodyPr>
-          <a:lstStyle/>
-          <a:p>
-            <a:pPr algn="l">
-              <a:spcAft>
-                <a:spcPts val="0"/>
-              </a:spcAft>
-            </a:pPr>
-            <a:r>
-              <a:rPr sz="1700" b="1" i="0">
-                <a:solidFill>
-                  <a:srgbClr val="1F3B66"/>
-                </a:solidFill>
-                <a:latin typeface="Calibri"/>
-              </a:rPr>
-              <a:t>Cruces de citas</a:t>
-            </a:r>
-          </a:p>
-          <a:p>
-            <a:pPr algn="l">
-              <a:spcAft>
-                <a:spcPts val="0"/>
-              </a:spcAft>
-            </a:pPr>
-            <a:r>
-              <a:rPr sz="1400" b="0" i="0">
-                <a:solidFill>
-                  <a:srgbClr val="5A6475"/>
-                </a:solidFill>
-                <a:latin typeface="Calibri"/>
-              </a:rPr>
-              <a:t>Dos clientas reservan el mismo estilista y sillón a la misma hora.</a:t>
-            </a:r>
-          </a:p>
-        </p:txBody>
-      </p:sp>
-      <p:sp>
-        <p:nvSpPr>
-          <p:cNvPr id="10" name="Rounded Rectangle 9"/>
-          <p:cNvSpPr/>
-          <p:nvPr/>
-        </p:nvSpPr>
-        <p:spPr>
-          <a:xfrm>
-            <a:off x="5120640" y="2313432"/>
-            <a:ext cx="6492240" cy="768096"/>
-          </a:xfrm>
-          <a:prstGeom prst="roundRect">
-            <a:avLst>
-              <a:gd name="adj" fmla="val 8000"/>
-            </a:avLst>
-          </a:prstGeom>
-          <a:solidFill>
-            <a:srgbClr val="F3F5F9"/>
-          </a:solidFill>
-          <a:ln>
-            <a:noFill/>
-          </a:ln>
-          <a:effectLst/>
-        </p:spPr>
-        <p:style>
-          <a:lnRef idx="1">
-            <a:schemeClr val="accent1"/>
-          </a:lnRef>
-          <a:fillRef idx="3">
-            <a:schemeClr val="accent1"/>
-          </a:fillRef>
-          <a:effectRef idx="2">
-            <a:schemeClr val="accent1"/>
-          </a:effectRef>
-          <a:fontRef idx="minor">
-            <a:schemeClr val="lt1"/>
-          </a:fontRef>
-        </p:style>
-        <p:txBody>
-          <a:bodyPr rtlCol="0" anchor="ctr"/>
-          <a:lstStyle/>
-          <a:p>
-            <a:pPr algn="ctr"/>
-          </a:p>
-        </p:txBody>
-      </p:sp>
-      <p:sp>
-        <p:nvSpPr>
-          <p:cNvPr id="11" name="Oval 10"/>
-          <p:cNvSpPr/>
-          <p:nvPr/>
-        </p:nvSpPr>
-        <p:spPr>
-          <a:xfrm>
-            <a:off x="5285232" y="2468880"/>
-            <a:ext cx="457200" cy="457200"/>
-          </a:xfrm>
-          <a:prstGeom prst="ellipse">
-            <a:avLst/>
           </a:prstGeom>
           <a:solidFill>
             <a:srgbClr val="1F3B66"/>
@@ -8245,582 +7660,11 @@
           </a:fontRef>
         </p:style>
         <p:txBody>
-          <a:bodyPr rtlCol="0" anchor="ctr" lIns="0" rIns="0" tIns="0" bIns="0"/>
+          <a:bodyPr rtlCol="0" anchor="ctr"/>
           <a:lstStyle/>
           <a:p>
             <a:pPr algn="ctr"/>
-            <a:r>
-              <a:rPr sz="1500" b="1">
-                <a:solidFill>
-                  <a:srgbClr val="FFFFFF"/>
-                </a:solidFill>
-                <a:latin typeface="Calibri"/>
-              </a:rPr>
-              <a:t>2</a:t>
-            </a:r>
-          </a:p>
-        </p:txBody>
-      </p:sp>
-      <p:sp>
-        <p:nvSpPr>
-          <p:cNvPr id="12" name="TextBox 11"/>
-          <p:cNvSpPr txBox="1"/>
-          <p:nvPr/>
-        </p:nvSpPr>
-        <p:spPr>
-          <a:xfrm>
-            <a:off x="5897880" y="2386584"/>
-            <a:ext cx="5577840" cy="640080"/>
-          </a:xfrm>
-          <a:prstGeom prst="rect">
-            <a:avLst/>
-          </a:prstGeom>
-          <a:noFill/>
-        </p:spPr>
-        <p:txBody>
-          <a:bodyPr wrap="square" lIns="45720" rIns="45720" tIns="27432" bIns="27432" anchor="t">
-            <a:spAutoFit/>
-          </a:bodyPr>
-          <a:lstStyle/>
-          <a:p>
-            <a:pPr algn="l">
-              <a:spcAft>
-                <a:spcPts val="0"/>
-              </a:spcAft>
-            </a:pPr>
-            <a:r>
-              <a:rPr sz="1700" b="1" i="0">
-                <a:solidFill>
-                  <a:srgbClr val="1F3B66"/>
-                </a:solidFill>
-                <a:latin typeface="Calibri"/>
-              </a:rPr>
-              <a:t>Stock sin control</a:t>
-            </a:r>
-          </a:p>
-          <a:p>
-            <a:pPr algn="l">
-              <a:spcAft>
-                <a:spcPts val="0"/>
-              </a:spcAft>
-            </a:pPr>
-            <a:r>
-              <a:rPr sz="1400" b="0" i="0">
-                <a:solidFill>
-                  <a:srgbClr val="5A6475"/>
-                </a:solidFill>
-                <a:latin typeface="Calibri"/>
-              </a:rPr>
-              <a:t>Los tintes y oxidantes no se descuentan al aplicar el servicio.</a:t>
-            </a:r>
-          </a:p>
-        </p:txBody>
-      </p:sp>
-      <p:sp>
-        <p:nvSpPr>
-          <p:cNvPr id="13" name="Rounded Rectangle 12"/>
-          <p:cNvSpPr/>
-          <p:nvPr/>
-        </p:nvSpPr>
-        <p:spPr>
-          <a:xfrm>
-            <a:off x="5120640" y="3209544"/>
-            <a:ext cx="6492240" cy="768096"/>
-          </a:xfrm>
-          <a:prstGeom prst="roundRect">
-            <a:avLst>
-              <a:gd name="adj" fmla="val 8000"/>
-            </a:avLst>
-          </a:prstGeom>
-          <a:solidFill>
-            <a:srgbClr val="F3F5F9"/>
-          </a:solidFill>
-          <a:ln>
-            <a:noFill/>
-          </a:ln>
-          <a:effectLst/>
-        </p:spPr>
-        <p:style>
-          <a:lnRef idx="1">
-            <a:schemeClr val="accent1"/>
-          </a:lnRef>
-          <a:fillRef idx="3">
-            <a:schemeClr val="accent1"/>
-          </a:fillRef>
-          <a:effectRef idx="2">
-            <a:schemeClr val="accent1"/>
-          </a:effectRef>
-          <a:fontRef idx="minor">
-            <a:schemeClr val="lt1"/>
-          </a:fontRef>
-        </p:style>
-        <p:txBody>
-          <a:bodyPr rtlCol="0" anchor="ctr"/>
-          <a:lstStyle/>
-          <a:p>
-            <a:pPr algn="ctr"/>
-          </a:p>
-        </p:txBody>
-      </p:sp>
-      <p:sp>
-        <p:nvSpPr>
-          <p:cNvPr id="14" name="Oval 13"/>
-          <p:cNvSpPr/>
-          <p:nvPr/>
-        </p:nvSpPr>
-        <p:spPr>
-          <a:xfrm>
-            <a:off x="5285232" y="3364991"/>
-            <a:ext cx="457200" cy="457200"/>
-          </a:xfrm>
-          <a:prstGeom prst="ellipse">
-            <a:avLst/>
-          </a:prstGeom>
-          <a:solidFill>
-            <a:srgbClr val="1F3B66"/>
-          </a:solidFill>
-          <a:ln>
-            <a:noFill/>
-          </a:ln>
-          <a:effectLst/>
-        </p:spPr>
-        <p:style>
-          <a:lnRef idx="1">
-            <a:schemeClr val="accent1"/>
-          </a:lnRef>
-          <a:fillRef idx="3">
-            <a:schemeClr val="accent1"/>
-          </a:fillRef>
-          <a:effectRef idx="2">
-            <a:schemeClr val="accent1"/>
-          </a:effectRef>
-          <a:fontRef idx="minor">
-            <a:schemeClr val="lt1"/>
-          </a:fontRef>
-        </p:style>
-        <p:txBody>
-          <a:bodyPr rtlCol="0" anchor="ctr" lIns="0" rIns="0" tIns="0" bIns="0"/>
-          <a:lstStyle/>
-          <a:p>
-            <a:pPr algn="ctr"/>
-            <a:r>
-              <a:rPr sz="1500" b="1">
-                <a:solidFill>
-                  <a:srgbClr val="FFFFFF"/>
-                </a:solidFill>
-                <a:latin typeface="Calibri"/>
-              </a:rPr>
-              <a:t>3</a:t>
-            </a:r>
-          </a:p>
-        </p:txBody>
-      </p:sp>
-      <p:sp>
-        <p:nvSpPr>
-          <p:cNvPr id="15" name="TextBox 14"/>
-          <p:cNvSpPr txBox="1"/>
-          <p:nvPr/>
-        </p:nvSpPr>
-        <p:spPr>
-          <a:xfrm>
-            <a:off x="5897880" y="3282696"/>
-            <a:ext cx="5577840" cy="640080"/>
-          </a:xfrm>
-          <a:prstGeom prst="rect">
-            <a:avLst/>
-          </a:prstGeom>
-          <a:noFill/>
-        </p:spPr>
-        <p:txBody>
-          <a:bodyPr wrap="square" lIns="45720" rIns="45720" tIns="27432" bIns="27432" anchor="t">
-            <a:spAutoFit/>
-          </a:bodyPr>
-          <a:lstStyle/>
-          <a:p>
-            <a:pPr algn="l">
-              <a:spcAft>
-                <a:spcPts val="0"/>
-              </a:spcAft>
-            </a:pPr>
-            <a:r>
-              <a:rPr sz="1700" b="1" i="0">
-                <a:solidFill>
-                  <a:srgbClr val="1F3B66"/>
-                </a:solidFill>
-                <a:latin typeface="Calibri"/>
-              </a:rPr>
-              <a:t>Caja manual</a:t>
-            </a:r>
-          </a:p>
-          <a:p>
-            <a:pPr algn="l">
-              <a:spcAft>
-                <a:spcPts val="0"/>
-              </a:spcAft>
-            </a:pPr>
-            <a:r>
-              <a:rPr sz="1400" b="0" i="0">
-                <a:solidFill>
-                  <a:srgbClr val="5A6475"/>
-                </a:solidFill>
-                <a:latin typeface="Calibri"/>
-              </a:rPr>
-              <a:t>Se cuadra al final del día; faltantes sin trazabilidad.</a:t>
-            </a:r>
-          </a:p>
-        </p:txBody>
-      </p:sp>
-      <p:sp>
-        <p:nvSpPr>
-          <p:cNvPr id="16" name="Rounded Rectangle 15"/>
-          <p:cNvSpPr/>
-          <p:nvPr/>
-        </p:nvSpPr>
-        <p:spPr>
-          <a:xfrm>
-            <a:off x="5120640" y="4105656"/>
-            <a:ext cx="6492240" cy="768096"/>
-          </a:xfrm>
-          <a:prstGeom prst="roundRect">
-            <a:avLst>
-              <a:gd name="adj" fmla="val 8000"/>
-            </a:avLst>
-          </a:prstGeom>
-          <a:solidFill>
-            <a:srgbClr val="F3F5F9"/>
-          </a:solidFill>
-          <a:ln>
-            <a:noFill/>
-          </a:ln>
-          <a:effectLst/>
-        </p:spPr>
-        <p:style>
-          <a:lnRef idx="1">
-            <a:schemeClr val="accent1"/>
-          </a:lnRef>
-          <a:fillRef idx="3">
-            <a:schemeClr val="accent1"/>
-          </a:fillRef>
-          <a:effectRef idx="2">
-            <a:schemeClr val="accent1"/>
-          </a:effectRef>
-          <a:fontRef idx="minor">
-            <a:schemeClr val="lt1"/>
-          </a:fontRef>
-        </p:style>
-        <p:txBody>
-          <a:bodyPr rtlCol="0" anchor="ctr"/>
-          <a:lstStyle/>
-          <a:p>
-            <a:pPr algn="ctr"/>
-          </a:p>
-        </p:txBody>
-      </p:sp>
-      <p:sp>
-        <p:nvSpPr>
-          <p:cNvPr id="17" name="Oval 16"/>
-          <p:cNvSpPr/>
-          <p:nvPr/>
-        </p:nvSpPr>
-        <p:spPr>
-          <a:xfrm>
-            <a:off x="5285232" y="4261104"/>
-            <a:ext cx="457200" cy="457200"/>
-          </a:xfrm>
-          <a:prstGeom prst="ellipse">
-            <a:avLst/>
-          </a:prstGeom>
-          <a:solidFill>
-            <a:srgbClr val="1F3B66"/>
-          </a:solidFill>
-          <a:ln>
-            <a:noFill/>
-          </a:ln>
-          <a:effectLst/>
-        </p:spPr>
-        <p:style>
-          <a:lnRef idx="1">
-            <a:schemeClr val="accent1"/>
-          </a:lnRef>
-          <a:fillRef idx="3">
-            <a:schemeClr val="accent1"/>
-          </a:fillRef>
-          <a:effectRef idx="2">
-            <a:schemeClr val="accent1"/>
-          </a:effectRef>
-          <a:fontRef idx="minor">
-            <a:schemeClr val="lt1"/>
-          </a:fontRef>
-        </p:style>
-        <p:txBody>
-          <a:bodyPr rtlCol="0" anchor="ctr" lIns="0" rIns="0" tIns="0" bIns="0"/>
-          <a:lstStyle/>
-          <a:p>
-            <a:pPr algn="ctr"/>
-            <a:r>
-              <a:rPr sz="1500" b="1">
-                <a:solidFill>
-                  <a:srgbClr val="FFFFFF"/>
-                </a:solidFill>
-                <a:latin typeface="Calibri"/>
-              </a:rPr>
-              <a:t>4</a:t>
-            </a:r>
-          </a:p>
-        </p:txBody>
-      </p:sp>
-      <p:sp>
-        <p:nvSpPr>
-          <p:cNvPr id="18" name="TextBox 17"/>
-          <p:cNvSpPr txBox="1"/>
-          <p:nvPr/>
-        </p:nvSpPr>
-        <p:spPr>
-          <a:xfrm>
-            <a:off x="5897880" y="4178808"/>
-            <a:ext cx="5577840" cy="640080"/>
-          </a:xfrm>
-          <a:prstGeom prst="rect">
-            <a:avLst/>
-          </a:prstGeom>
-          <a:noFill/>
-        </p:spPr>
-        <p:txBody>
-          <a:bodyPr wrap="square" lIns="45720" rIns="45720" tIns="27432" bIns="27432" anchor="t">
-            <a:spAutoFit/>
-          </a:bodyPr>
-          <a:lstStyle/>
-          <a:p>
-            <a:pPr algn="l">
-              <a:spcAft>
-                <a:spcPts val="0"/>
-              </a:spcAft>
-            </a:pPr>
-            <a:r>
-              <a:rPr sz="1700" b="1" i="0">
-                <a:solidFill>
-                  <a:srgbClr val="1F3B66"/>
-                </a:solidFill>
-                <a:latin typeface="Calibri"/>
-              </a:rPr>
-              <a:t>Comisiones en Excel</a:t>
-            </a:r>
-          </a:p>
-          <a:p>
-            <a:pPr algn="l">
-              <a:spcAft>
-                <a:spcPts val="0"/>
-              </a:spcAft>
-            </a:pPr>
-            <a:r>
-              <a:rPr sz="1400" b="0" i="0">
-                <a:solidFill>
-                  <a:srgbClr val="5A6475"/>
-                </a:solidFill>
-                <a:latin typeface="Calibri"/>
-              </a:rPr>
-              <a:t>Errores de cálculo y conflictos con el personal.</a:t>
-            </a:r>
-          </a:p>
-        </p:txBody>
-      </p:sp>
-      <p:sp>
-        <p:nvSpPr>
-          <p:cNvPr id="19" name="Rounded Rectangle 18"/>
-          <p:cNvSpPr/>
-          <p:nvPr/>
-        </p:nvSpPr>
-        <p:spPr>
-          <a:xfrm>
-            <a:off x="5120640" y="5001768"/>
-            <a:ext cx="6492240" cy="768096"/>
-          </a:xfrm>
-          <a:prstGeom prst="roundRect">
-            <a:avLst>
-              <a:gd name="adj" fmla="val 8000"/>
-            </a:avLst>
-          </a:prstGeom>
-          <a:solidFill>
-            <a:srgbClr val="F3F5F9"/>
-          </a:solidFill>
-          <a:ln>
-            <a:noFill/>
-          </a:ln>
-          <a:effectLst/>
-        </p:spPr>
-        <p:style>
-          <a:lnRef idx="1">
-            <a:schemeClr val="accent1"/>
-          </a:lnRef>
-          <a:fillRef idx="3">
-            <a:schemeClr val="accent1"/>
-          </a:fillRef>
-          <a:effectRef idx="2">
-            <a:schemeClr val="accent1"/>
-          </a:effectRef>
-          <a:fontRef idx="minor">
-            <a:schemeClr val="lt1"/>
-          </a:fontRef>
-        </p:style>
-        <p:txBody>
-          <a:bodyPr rtlCol="0" anchor="ctr"/>
-          <a:lstStyle/>
-          <a:p>
-            <a:pPr algn="ctr"/>
-          </a:p>
-        </p:txBody>
-      </p:sp>
-      <p:sp>
-        <p:nvSpPr>
-          <p:cNvPr id="20" name="Oval 19"/>
-          <p:cNvSpPr/>
-          <p:nvPr/>
-        </p:nvSpPr>
-        <p:spPr>
-          <a:xfrm>
-            <a:off x="5285232" y="5157216"/>
-            <a:ext cx="457200" cy="457200"/>
-          </a:xfrm>
-          <a:prstGeom prst="ellipse">
-            <a:avLst/>
-          </a:prstGeom>
-          <a:solidFill>
-            <a:srgbClr val="1F3B66"/>
-          </a:solidFill>
-          <a:ln>
-            <a:noFill/>
-          </a:ln>
-          <a:effectLst/>
-        </p:spPr>
-        <p:style>
-          <a:lnRef idx="1">
-            <a:schemeClr val="accent1"/>
-          </a:lnRef>
-          <a:fillRef idx="3">
-            <a:schemeClr val="accent1"/>
-          </a:fillRef>
-          <a:effectRef idx="2">
-            <a:schemeClr val="accent1"/>
-          </a:effectRef>
-          <a:fontRef idx="minor">
-            <a:schemeClr val="lt1"/>
-          </a:fontRef>
-        </p:style>
-        <p:txBody>
-          <a:bodyPr rtlCol="0" anchor="ctr" lIns="0" rIns="0" tIns="0" bIns="0"/>
-          <a:lstStyle/>
-          <a:p>
-            <a:pPr algn="ctr"/>
-            <a:r>
-              <a:rPr sz="1500" b="1">
-                <a:solidFill>
-                  <a:srgbClr val="FFFFFF"/>
-                </a:solidFill>
-                <a:latin typeface="Calibri"/>
-              </a:rPr>
-              <a:t>5</a:t>
-            </a:r>
-          </a:p>
-        </p:txBody>
-      </p:sp>
-      <p:sp>
-        <p:nvSpPr>
-          <p:cNvPr id="21" name="TextBox 20"/>
-          <p:cNvSpPr txBox="1"/>
-          <p:nvPr/>
-        </p:nvSpPr>
-        <p:spPr>
-          <a:xfrm>
-            <a:off x="5897880" y="5074920"/>
-            <a:ext cx="5577840" cy="640080"/>
-          </a:xfrm>
-          <a:prstGeom prst="rect">
-            <a:avLst/>
-          </a:prstGeom>
-          <a:noFill/>
-        </p:spPr>
-        <p:txBody>
-          <a:bodyPr wrap="square" lIns="45720" rIns="45720" tIns="27432" bIns="27432" anchor="t">
-            <a:spAutoFit/>
-          </a:bodyPr>
-          <a:lstStyle/>
-          <a:p>
-            <a:pPr algn="l">
-              <a:spcAft>
-                <a:spcPts val="0"/>
-              </a:spcAft>
-            </a:pPr>
-            <a:r>
-              <a:rPr sz="1700" b="1" i="0">
-                <a:solidFill>
-                  <a:srgbClr val="1F3B66"/>
-                </a:solidFill>
-                <a:latin typeface="Calibri"/>
-              </a:rPr>
-              <a:t>Sin visión por sede</a:t>
-            </a:r>
-          </a:p>
-          <a:p>
-            <a:pPr algn="l">
-              <a:spcAft>
-                <a:spcPts val="0"/>
-              </a:spcAft>
-            </a:pPr>
-            <a:r>
-              <a:rPr sz="1400" b="0" i="0">
-                <a:solidFill>
-                  <a:srgbClr val="5A6475"/>
-                </a:solidFill>
-                <a:latin typeface="Calibri"/>
-              </a:rPr>
-              <a:t>El dueño no compara sus sedes ni ve indicadores.</a:t>
-            </a:r>
-          </a:p>
-        </p:txBody>
-      </p:sp>
-      <p:sp>
-        <p:nvSpPr>
-          <p:cNvPr id="22" name="Rounded Rectangle 21"/>
-          <p:cNvSpPr/>
-          <p:nvPr/>
-        </p:nvSpPr>
-        <p:spPr>
-          <a:xfrm>
-            <a:off x="548640" y="3429000"/>
-            <a:ext cx="4206240" cy="1737360"/>
-          </a:xfrm>
-          <a:prstGeom prst="roundRect">
-            <a:avLst>
-              <a:gd name="adj" fmla="val 8000"/>
-            </a:avLst>
-          </a:prstGeom>
-          <a:solidFill>
-            <a:srgbClr val="1F3B66"/>
-          </a:solidFill>
-          <a:ln>
-            <a:noFill/>
-          </a:ln>
-          <a:effectLst/>
-        </p:spPr>
-        <p:style>
-          <a:lnRef idx="1">
-            <a:schemeClr val="accent1"/>
-          </a:lnRef>
-          <a:fillRef idx="3">
-            <a:schemeClr val="accent1"/>
-          </a:fillRef>
-          <a:effectRef idx="2">
-            <a:schemeClr val="accent1"/>
-          </a:effectRef>
-          <a:fontRef idx="minor">
-            <a:schemeClr val="lt1"/>
-          </a:fontRef>
-        </p:style>
-        <p:txBody>
-          <a:bodyPr rtlCol="0" anchor="ctr"/>
-          <a:lstStyle/>
-          <a:p>
-            <a:pPr algn="ctr"/>
+            <a:endParaRPr/>
           </a:p>
         </p:txBody>
       </p:sp>
@@ -8841,7 +7685,7 @@
           <a:noFill/>
         </p:spPr>
         <p:txBody>
-          <a:bodyPr wrap="square" lIns="45720" rIns="45720" tIns="27432" bIns="27432" anchor="t">
+          <a:bodyPr wrap="square" lIns="45720" tIns="27432" rIns="45720" bIns="27432" anchor="t">
             <a:spAutoFit/>
           </a:bodyPr>
           <a:lstStyle/>
@@ -8888,7 +7732,7 @@
 </file>
 
 <file path=ppt/slides/slide3.xml><?xml version="1.0" encoding="utf-8"?>
-<p:sld xmlns:a="http://schemas.openxmlformats.org/drawingml/2006/main" xmlns:p="http://schemas.openxmlformats.org/presentationml/2006/main" xmlns:r="http://schemas.openxmlformats.org/officeDocument/2006/relationships">
+<p:sld xmlns:a="http://schemas.openxmlformats.org/drawingml/2006/main" xmlns:r="http://schemas.openxmlformats.org/officeDocument/2006/relationships" xmlns:p="http://schemas.openxmlformats.org/presentationml/2006/main">
   <p:cSld>
     <p:spTree>
       <p:nvGrpSpPr>
@@ -8896,7 +7740,14 @@
         <p:cNvGrpSpPr/>
         <p:nvPr/>
       </p:nvGrpSpPr>
-      <p:grpSpPr/>
+      <p:grpSpPr>
+        <a:xfrm>
+          <a:off x="0" y="0"/>
+          <a:ext cx="0" cy="0"/>
+          <a:chOff x="0" y="0"/>
+          <a:chExt cx="0" cy="0"/>
+        </a:xfrm>
+      </p:grpSpPr>
       <p:sp>
         <p:nvSpPr>
           <p:cNvPr id="2" name="TextBox 1"/>
@@ -8914,7 +7765,7 @@
           <a:noFill/>
         </p:spPr>
         <p:txBody>
-          <a:bodyPr wrap="square" lIns="45720" rIns="45720" tIns="27432" bIns="27432" anchor="t">
+          <a:bodyPr wrap="square" lIns="45720" tIns="27432" rIns="45720" bIns="27432" anchor="t">
             <a:spAutoFit/>
           </a:bodyPr>
           <a:lstStyle/>
@@ -8953,7 +7804,7 @@
           <a:noFill/>
         </p:spPr>
         <p:txBody>
-          <a:bodyPr wrap="square" lIns="45720" rIns="45720" tIns="27432" bIns="27432" anchor="t">
+          <a:bodyPr wrap="square" lIns="45720" tIns="27432" rIns="45720" bIns="27432" anchor="t">
             <a:spAutoFit/>
           </a:bodyPr>
           <a:lstStyle/>
@@ -8992,7 +7843,7 @@
           <a:noFill/>
         </p:spPr>
         <p:txBody>
-          <a:bodyPr wrap="square" lIns="45720" rIns="45720" tIns="27432" bIns="27432" anchor="t">
+          <a:bodyPr wrap="square" lIns="45720" tIns="27432" rIns="45720" bIns="27432" anchor="t">
             <a:spAutoFit/>
           </a:bodyPr>
           <a:lstStyle/>
@@ -9031,7 +7882,7 @@
           <a:noFill/>
         </p:spPr>
         <p:txBody>
-          <a:bodyPr wrap="square" lIns="45720" rIns="45720" tIns="27432" bIns="27432" anchor="t">
+          <a:bodyPr wrap="square" lIns="45720" tIns="27432" rIns="45720" bIns="27432" anchor="t">
             <a:spAutoFit/>
           </a:bodyPr>
           <a:lstStyle/>
@@ -9096,6 +7947,7 @@
           <a:lstStyle/>
           <a:p>
             <a:pPr algn="ctr"/>
+            <a:endParaRPr/>
           </a:p>
         </p:txBody>
       </p:sp>
@@ -9136,7 +7988,7 @@
           </a:fontRef>
         </p:style>
         <p:txBody>
-          <a:bodyPr rtlCol="0" anchor="ctr" lIns="0" rIns="0" tIns="0" bIns="0"/>
+          <a:bodyPr lIns="0" tIns="0" rIns="0" bIns="0" rtlCol="0" anchor="ctr"/>
           <a:lstStyle/>
           <a:p>
             <a:pPr algn="ctr"/>
@@ -9169,7 +8021,7 @@
           <a:noFill/>
         </p:spPr>
         <p:txBody>
-          <a:bodyPr wrap="square" lIns="45720" rIns="45720" tIns="27432" bIns="27432" anchor="t">
+          <a:bodyPr wrap="square" lIns="45720" tIns="27432" rIns="45720" bIns="27432" anchor="t">
             <a:spAutoFit/>
           </a:bodyPr>
           <a:lstStyle/>
@@ -9208,7 +8060,7 @@
           <a:noFill/>
         </p:spPr>
         <p:txBody>
-          <a:bodyPr wrap="square" lIns="45720" rIns="45720" tIns="27432" bIns="27432" anchor="t">
+          <a:bodyPr wrap="square" lIns="45720" tIns="27432" rIns="45720" bIns="27432" anchor="t">
             <a:spAutoFit/>
           </a:bodyPr>
           <a:lstStyle/>
@@ -9247,7 +8099,7 @@
           <a:noFill/>
         </p:spPr>
         <p:txBody>
-          <a:bodyPr wrap="square" lIns="45720" rIns="45720" tIns="27432" bIns="27432" anchor="t">
+          <a:bodyPr wrap="square" lIns="45720" tIns="27432" rIns="45720" bIns="27432" anchor="t">
             <a:spAutoFit/>
           </a:bodyPr>
           <a:lstStyle/>
@@ -9312,6 +8164,7 @@
           <a:lstStyle/>
           <a:p>
             <a:pPr algn="ctr"/>
+            <a:endParaRPr/>
           </a:p>
         </p:txBody>
       </p:sp>
@@ -9352,7 +8205,7 @@
           </a:fontRef>
         </p:style>
         <p:txBody>
-          <a:bodyPr rtlCol="0" anchor="ctr" lIns="0" rIns="0" tIns="0" bIns="0"/>
+          <a:bodyPr lIns="0" tIns="0" rIns="0" bIns="0" rtlCol="0" anchor="ctr"/>
           <a:lstStyle/>
           <a:p>
             <a:pPr algn="ctr"/>
@@ -9385,7 +8238,7 @@
           <a:noFill/>
         </p:spPr>
         <p:txBody>
-          <a:bodyPr wrap="square" lIns="45720" rIns="45720" tIns="27432" bIns="27432" anchor="t">
+          <a:bodyPr wrap="square" lIns="45720" tIns="27432" rIns="45720" bIns="27432" anchor="t">
             <a:spAutoFit/>
           </a:bodyPr>
           <a:lstStyle/>
@@ -9424,7 +8277,7 @@
           <a:noFill/>
         </p:spPr>
         <p:txBody>
-          <a:bodyPr wrap="square" lIns="45720" rIns="45720" tIns="27432" bIns="27432" anchor="t">
+          <a:bodyPr wrap="square" lIns="45720" tIns="27432" rIns="45720" bIns="27432" anchor="t">
             <a:spAutoFit/>
           </a:bodyPr>
           <a:lstStyle/>
@@ -9463,7 +8316,7 @@
           <a:noFill/>
         </p:spPr>
         <p:txBody>
-          <a:bodyPr wrap="square" lIns="45720" rIns="45720" tIns="27432" bIns="27432" anchor="t">
+          <a:bodyPr wrap="square" lIns="45720" tIns="27432" rIns="45720" bIns="27432" anchor="t">
             <a:spAutoFit/>
           </a:bodyPr>
           <a:lstStyle/>
@@ -9528,6 +8381,7 @@
           <a:lstStyle/>
           <a:p>
             <a:pPr algn="ctr"/>
+            <a:endParaRPr/>
           </a:p>
         </p:txBody>
       </p:sp>
@@ -9568,7 +8422,7 @@
           </a:fontRef>
         </p:style>
         <p:txBody>
-          <a:bodyPr rtlCol="0" anchor="ctr" lIns="0" rIns="0" tIns="0" bIns="0"/>
+          <a:bodyPr lIns="0" tIns="0" rIns="0" bIns="0" rtlCol="0" anchor="ctr"/>
           <a:lstStyle/>
           <a:p>
             <a:pPr algn="ctr"/>
@@ -9601,7 +8455,7 @@
           <a:noFill/>
         </p:spPr>
         <p:txBody>
-          <a:bodyPr wrap="square" lIns="45720" rIns="45720" tIns="27432" bIns="27432" anchor="t">
+          <a:bodyPr wrap="square" lIns="45720" tIns="27432" rIns="45720" bIns="27432" anchor="t">
             <a:spAutoFit/>
           </a:bodyPr>
           <a:lstStyle/>
@@ -9640,7 +8494,7 @@
           <a:noFill/>
         </p:spPr>
         <p:txBody>
-          <a:bodyPr wrap="square" lIns="45720" rIns="45720" tIns="27432" bIns="27432" anchor="t">
+          <a:bodyPr wrap="square" lIns="45720" tIns="27432" rIns="45720" bIns="27432" anchor="t">
             <a:spAutoFit/>
           </a:bodyPr>
           <a:lstStyle/>
@@ -9679,7 +8533,7 @@
           <a:noFill/>
         </p:spPr>
         <p:txBody>
-          <a:bodyPr wrap="square" lIns="45720" rIns="45720" tIns="27432" bIns="27432" anchor="t">
+          <a:bodyPr wrap="square" lIns="45720" tIns="27432" rIns="45720" bIns="27432" anchor="t">
             <a:spAutoFit/>
           </a:bodyPr>
           <a:lstStyle/>
@@ -9744,6 +8598,7 @@
           <a:lstStyle/>
           <a:p>
             <a:pPr algn="ctr"/>
+            <a:endParaRPr/>
           </a:p>
         </p:txBody>
       </p:sp>
@@ -9784,7 +8639,7 @@
           </a:fontRef>
         </p:style>
         <p:txBody>
-          <a:bodyPr rtlCol="0" anchor="ctr" lIns="0" rIns="0" tIns="0" bIns="0"/>
+          <a:bodyPr lIns="0" tIns="0" rIns="0" bIns="0" rtlCol="0" anchor="ctr"/>
           <a:lstStyle/>
           <a:p>
             <a:pPr algn="ctr"/>
@@ -9817,7 +8672,7 @@
           <a:noFill/>
         </p:spPr>
         <p:txBody>
-          <a:bodyPr wrap="square" lIns="45720" rIns="45720" tIns="27432" bIns="27432" anchor="t">
+          <a:bodyPr wrap="square" lIns="45720" tIns="27432" rIns="45720" bIns="27432" anchor="t">
             <a:spAutoFit/>
           </a:bodyPr>
           <a:lstStyle/>
@@ -9856,7 +8711,7 @@
           <a:noFill/>
         </p:spPr>
         <p:txBody>
-          <a:bodyPr wrap="square" lIns="45720" rIns="45720" tIns="27432" bIns="27432" anchor="t">
+          <a:bodyPr wrap="square" lIns="45720" tIns="27432" rIns="45720" bIns="27432" anchor="t">
             <a:spAutoFit/>
           </a:bodyPr>
           <a:lstStyle/>
@@ -9895,7 +8750,7 @@
           <a:noFill/>
         </p:spPr>
         <p:txBody>
-          <a:bodyPr wrap="square" lIns="45720" rIns="45720" tIns="27432" bIns="27432" anchor="t">
+          <a:bodyPr wrap="square" lIns="45720" tIns="27432" rIns="45720" bIns="27432" anchor="t">
             <a:spAutoFit/>
           </a:bodyPr>
           <a:lstStyle/>
@@ -9960,6 +8815,7 @@
           <a:lstStyle/>
           <a:p>
             <a:pPr algn="ctr"/>
+            <a:endParaRPr/>
           </a:p>
         </p:txBody>
       </p:sp>
@@ -10000,7 +8856,7 @@
           </a:fontRef>
         </p:style>
         <p:txBody>
-          <a:bodyPr rtlCol="0" anchor="ctr" lIns="0" rIns="0" tIns="0" bIns="0"/>
+          <a:bodyPr lIns="0" tIns="0" rIns="0" bIns="0" rtlCol="0" anchor="ctr"/>
           <a:lstStyle/>
           <a:p>
             <a:pPr algn="ctr"/>
@@ -10033,7 +8889,7 @@
           <a:noFill/>
         </p:spPr>
         <p:txBody>
-          <a:bodyPr wrap="square" lIns="45720" rIns="45720" tIns="27432" bIns="27432" anchor="t">
+          <a:bodyPr wrap="square" lIns="45720" tIns="27432" rIns="45720" bIns="27432" anchor="t">
             <a:spAutoFit/>
           </a:bodyPr>
           <a:lstStyle/>
@@ -10072,7 +8928,7 @@
           <a:noFill/>
         </p:spPr>
         <p:txBody>
-          <a:bodyPr wrap="square" lIns="45720" rIns="45720" tIns="27432" bIns="27432" anchor="t">
+          <a:bodyPr wrap="square" lIns="45720" tIns="27432" rIns="45720" bIns="27432" anchor="t">
             <a:spAutoFit/>
           </a:bodyPr>
           <a:lstStyle/>
@@ -10111,7 +8967,7 @@
           <a:noFill/>
         </p:spPr>
         <p:txBody>
-          <a:bodyPr wrap="square" lIns="45720" rIns="45720" tIns="27432" bIns="27432" anchor="t">
+          <a:bodyPr wrap="square" lIns="45720" tIns="27432" rIns="45720" bIns="27432" anchor="t">
             <a:spAutoFit/>
           </a:bodyPr>
           <a:lstStyle/>
@@ -10150,7 +9006,7 @@
           <a:noFill/>
         </p:spPr>
         <p:txBody>
-          <a:bodyPr wrap="square" lIns="45720" rIns="45720" tIns="27432" bIns="27432" anchor="t">
+          <a:bodyPr wrap="square" lIns="45720" tIns="27432" rIns="45720" bIns="27432" anchor="t">
             <a:spAutoFit/>
           </a:bodyPr>
           <a:lstStyle/>
@@ -10215,6 +9071,7 @@
           <a:lstStyle/>
           <a:p>
             <a:pPr algn="ctr"/>
+            <a:endParaRPr/>
           </a:p>
         </p:txBody>
       </p:sp>
@@ -10235,7 +9092,7 @@
           <a:noFill/>
         </p:spPr>
         <p:txBody>
-          <a:bodyPr wrap="square" lIns="45720" rIns="45720" tIns="27432" bIns="27432" anchor="t">
+          <a:bodyPr wrap="square" lIns="45720" tIns="27432" rIns="45720" bIns="27432" anchor="t">
             <a:spAutoFit/>
           </a:bodyPr>
           <a:lstStyle/>
@@ -10332,6 +9189,7 @@
           <a:lstStyle/>
           <a:p>
             <a:pPr algn="ctr"/>
+            <a:endParaRPr/>
           </a:p>
         </p:txBody>
       </p:sp>
@@ -10352,7 +9210,7 @@
           <a:noFill/>
         </p:spPr>
         <p:txBody>
-          <a:bodyPr wrap="square" lIns="45720" rIns="45720" tIns="27432" bIns="27432" anchor="t">
+          <a:bodyPr wrap="square" lIns="45720" tIns="27432" rIns="45720" bIns="27432" anchor="t">
             <a:spAutoFit/>
           </a:bodyPr>
           <a:lstStyle/>
@@ -10449,6 +9307,7 @@
           <a:lstStyle/>
           <a:p>
             <a:pPr algn="ctr"/>
+            <a:endParaRPr/>
           </a:p>
         </p:txBody>
       </p:sp>
@@ -10469,7 +9328,7 @@
           <a:noFill/>
         </p:spPr>
         <p:txBody>
-          <a:bodyPr wrap="square" lIns="45720" rIns="45720" tIns="27432" bIns="27432" anchor="t">
+          <a:bodyPr wrap="square" lIns="45720" tIns="27432" rIns="45720" bIns="27432" anchor="t">
             <a:spAutoFit/>
           </a:bodyPr>
           <a:lstStyle/>
@@ -10566,6 +9425,7 @@
           <a:lstStyle/>
           <a:p>
             <a:pPr algn="ctr"/>
+            <a:endParaRPr/>
           </a:p>
         </p:txBody>
       </p:sp>
@@ -10586,7 +9446,7 @@
           <a:noFill/>
         </p:spPr>
         <p:txBody>
-          <a:bodyPr wrap="square" lIns="45720" rIns="45720" tIns="27432" bIns="27432" anchor="t">
+          <a:bodyPr wrap="square" lIns="45720" tIns="27432" rIns="45720" bIns="27432" anchor="t">
             <a:spAutoFit/>
           </a:bodyPr>
           <a:lstStyle/>
@@ -10649,7 +9509,7 @@
 </file>
 
 <file path=ppt/slides/slide4.xml><?xml version="1.0" encoding="utf-8"?>
-<p:sld xmlns:a="http://schemas.openxmlformats.org/drawingml/2006/main" xmlns:p="http://schemas.openxmlformats.org/presentationml/2006/main" xmlns:r="http://schemas.openxmlformats.org/officeDocument/2006/relationships">
+<p:sld xmlns:a="http://schemas.openxmlformats.org/drawingml/2006/main" xmlns:r="http://schemas.openxmlformats.org/officeDocument/2006/relationships" xmlns:p="http://schemas.openxmlformats.org/presentationml/2006/main">
   <p:cSld>
     <p:spTree>
       <p:nvGrpSpPr>
@@ -10657,7 +9517,14 @@
         <p:cNvGrpSpPr/>
         <p:nvPr/>
       </p:nvGrpSpPr>
-      <p:grpSpPr/>
+      <p:grpSpPr>
+        <a:xfrm>
+          <a:off x="0" y="0"/>
+          <a:ext cx="0" cy="0"/>
+          <a:chOff x="0" y="0"/>
+          <a:chExt cx="0" cy="0"/>
+        </a:xfrm>
+      </p:grpSpPr>
       <p:sp>
         <p:nvSpPr>
           <p:cNvPr id="2" name="TextBox 1"/>
@@ -10675,7 +9542,7 @@
           <a:noFill/>
         </p:spPr>
         <p:txBody>
-          <a:bodyPr wrap="square" lIns="45720" rIns="45720" tIns="27432" bIns="27432" anchor="t">
+          <a:bodyPr wrap="square" lIns="45720" tIns="27432" rIns="45720" bIns="27432" anchor="t">
             <a:spAutoFit/>
           </a:bodyPr>
           <a:lstStyle/>
@@ -10714,7 +9581,7 @@
           <a:noFill/>
         </p:spPr>
         <p:txBody>
-          <a:bodyPr wrap="square" lIns="45720" rIns="45720" tIns="27432" bIns="27432" anchor="t">
+          <a:bodyPr wrap="square" lIns="45720" tIns="27432" rIns="45720" bIns="27432" anchor="t">
             <a:spAutoFit/>
           </a:bodyPr>
           <a:lstStyle/>
@@ -10753,7 +9620,7 @@
           <a:noFill/>
         </p:spPr>
         <p:txBody>
-          <a:bodyPr wrap="square" lIns="45720" rIns="45720" tIns="27432" bIns="27432" anchor="t">
+          <a:bodyPr wrap="square" lIns="45720" tIns="27432" rIns="45720" bIns="27432" anchor="t">
             <a:spAutoFit/>
           </a:bodyPr>
           <a:lstStyle/>
@@ -10792,7 +9659,7 @@
           <a:noFill/>
         </p:spPr>
         <p:txBody>
-          <a:bodyPr wrap="square" lIns="45720" rIns="45720" tIns="27432" bIns="27432" anchor="t">
+          <a:bodyPr wrap="square" lIns="45720" tIns="27432" rIns="45720" bIns="27432" anchor="t">
             <a:spAutoFit/>
           </a:bodyPr>
           <a:lstStyle/>
@@ -10833,16 +9700,46 @@
                 <a:tableStyleId>{5C22544A-7EE6-4342-B048-85BDC9FD1C3A}</a:tableStyleId>
               </a:tblPr>
               <a:tblGrid>
-                <a:gridCol w="868680"/>
-                <a:gridCol w="3291840"/>
-                <a:gridCol w="1371600"/>
-                <a:gridCol w="4160520"/>
-                <a:gridCol w="1417320"/>
+                <a:gridCol w="868680">
+                  <a:extLst>
+                    <a:ext uri="{9D8B030D-6E8A-4147-A177-3AD203B41FA5}">
+                      <a16:colId xmlns:a16="http://schemas.microsoft.com/office/drawing/2014/main" val="20000"/>
+                    </a:ext>
+                  </a:extLst>
+                </a:gridCol>
+                <a:gridCol w="3291840">
+                  <a:extLst>
+                    <a:ext uri="{9D8B030D-6E8A-4147-A177-3AD203B41FA5}">
+                      <a16:colId xmlns:a16="http://schemas.microsoft.com/office/drawing/2014/main" val="20001"/>
+                    </a:ext>
+                  </a:extLst>
+                </a:gridCol>
+                <a:gridCol w="1371600">
+                  <a:extLst>
+                    <a:ext uri="{9D8B030D-6E8A-4147-A177-3AD203B41FA5}">
+                      <a16:colId xmlns:a16="http://schemas.microsoft.com/office/drawing/2014/main" val="20002"/>
+                    </a:ext>
+                  </a:extLst>
+                </a:gridCol>
+                <a:gridCol w="4160520">
+                  <a:extLst>
+                    <a:ext uri="{9D8B030D-6E8A-4147-A177-3AD203B41FA5}">
+                      <a16:colId xmlns:a16="http://schemas.microsoft.com/office/drawing/2014/main" val="20003"/>
+                    </a:ext>
+                  </a:extLst>
+                </a:gridCol>
+                <a:gridCol w="1417320">
+                  <a:extLst>
+                    <a:ext uri="{9D8B030D-6E8A-4147-A177-3AD203B41FA5}">
+                      <a16:colId xmlns:a16="http://schemas.microsoft.com/office/drawing/2014/main" val="20004"/>
+                    </a:ext>
+                  </a:extLst>
+                </a:gridCol>
               </a:tblGrid>
               <a:tr h="670560">
                 <a:tc>
                   <a:txBody>
-                    <a:bodyPr wrap="square"/>
+                    <a:bodyPr/>
                     <a:lstStyle/>
                     <a:p>
                       <a:r>
@@ -10864,7 +9761,7 @@
                 </a:tc>
                 <a:tc>
                   <a:txBody>
-                    <a:bodyPr wrap="square"/>
+                    <a:bodyPr/>
                     <a:lstStyle/>
                     <a:p>
                       <a:r>
@@ -10886,7 +9783,7 @@
                 </a:tc>
                 <a:tc>
                   <a:txBody>
-                    <a:bodyPr wrap="square"/>
+                    <a:bodyPr/>
                     <a:lstStyle/>
                     <a:p>
                       <a:r>
@@ -10908,7 +9805,7 @@
                 </a:tc>
                 <a:tc>
                   <a:txBody>
-                    <a:bodyPr wrap="square"/>
+                    <a:bodyPr/>
                     <a:lstStyle/>
                     <a:p>
                       <a:r>
@@ -10930,7 +9827,7 @@
                 </a:tc>
                 <a:tc>
                   <a:txBody>
-                    <a:bodyPr wrap="square"/>
+                    <a:bodyPr/>
                     <a:lstStyle/>
                     <a:p>
                       <a:r>
@@ -10950,11 +9847,16 @@
                     </a:solidFill>
                   </a:tcPr>
                 </a:tc>
+                <a:extLst>
+                  <a:ext uri="{0D108BD9-81ED-4DB2-BD59-A6C34878D82A}">
+                    <a16:rowId xmlns:a16="http://schemas.microsoft.com/office/drawing/2014/main" val="10000"/>
+                  </a:ext>
+                </a:extLst>
               </a:tr>
               <a:tr h="670560">
                 <a:tc>
                   <a:txBody>
-                    <a:bodyPr wrap="square"/>
+                    <a:bodyPr/>
                     <a:lstStyle/>
                     <a:p>
                       <a:r>
@@ -10976,7 +9878,7 @@
                 </a:tc>
                 <a:tc>
                   <a:txBody>
-                    <a:bodyPr wrap="square"/>
+                    <a:bodyPr/>
                     <a:lstStyle/>
                     <a:p>
                       <a:r>
@@ -10998,7 +9900,7 @@
                 </a:tc>
                 <a:tc>
                   <a:txBody>
-                    <a:bodyPr wrap="square"/>
+                    <a:bodyPr/>
                     <a:lstStyle/>
                     <a:p>
                       <a:r>
@@ -11020,7 +9922,7 @@
                 </a:tc>
                 <a:tc>
                   <a:txBody>
-                    <a:bodyPr wrap="square"/>
+                    <a:bodyPr/>
                     <a:lstStyle/>
                     <a:p>
                       <a:r>
@@ -11042,7 +9944,7 @@
                 </a:tc>
                 <a:tc>
                   <a:txBody>
-                    <a:bodyPr wrap="square"/>
+                    <a:bodyPr/>
                     <a:lstStyle/>
                     <a:p>
                       <a:r>
@@ -11062,11 +9964,16 @@
                     </a:solidFill>
                   </a:tcPr>
                 </a:tc>
+                <a:extLst>
+                  <a:ext uri="{0D108BD9-81ED-4DB2-BD59-A6C34878D82A}">
+                    <a16:rowId xmlns:a16="http://schemas.microsoft.com/office/drawing/2014/main" val="10001"/>
+                  </a:ext>
+                </a:extLst>
               </a:tr>
               <a:tr h="670560">
                 <a:tc>
                   <a:txBody>
-                    <a:bodyPr wrap="square"/>
+                    <a:bodyPr/>
                     <a:lstStyle/>
                     <a:p>
                       <a:r>
@@ -11088,7 +9995,7 @@
                 </a:tc>
                 <a:tc>
                   <a:txBody>
-                    <a:bodyPr wrap="square"/>
+                    <a:bodyPr/>
                     <a:lstStyle/>
                     <a:p>
                       <a:r>
@@ -11110,7 +10017,7 @@
                 </a:tc>
                 <a:tc>
                   <a:txBody>
-                    <a:bodyPr wrap="square"/>
+                    <a:bodyPr/>
                     <a:lstStyle/>
                     <a:p>
                       <a:r>
@@ -11132,7 +10039,7 @@
                 </a:tc>
                 <a:tc>
                   <a:txBody>
-                    <a:bodyPr wrap="square"/>
+                    <a:bodyPr/>
                     <a:lstStyle/>
                     <a:p>
                       <a:r>
@@ -11154,7 +10061,7 @@
                 </a:tc>
                 <a:tc>
                   <a:txBody>
-                    <a:bodyPr wrap="square"/>
+                    <a:bodyPr/>
                     <a:lstStyle/>
                     <a:p>
                       <a:r>
@@ -11174,11 +10081,16 @@
                     </a:solidFill>
                   </a:tcPr>
                 </a:tc>
+                <a:extLst>
+                  <a:ext uri="{0D108BD9-81ED-4DB2-BD59-A6C34878D82A}">
+                    <a16:rowId xmlns:a16="http://schemas.microsoft.com/office/drawing/2014/main" val="10002"/>
+                  </a:ext>
+                </a:extLst>
               </a:tr>
               <a:tr h="670560">
                 <a:tc>
                   <a:txBody>
-                    <a:bodyPr wrap="square"/>
+                    <a:bodyPr/>
                     <a:lstStyle/>
                     <a:p>
                       <a:r>
@@ -11200,7 +10112,7 @@
                 </a:tc>
                 <a:tc>
                   <a:txBody>
-                    <a:bodyPr wrap="square"/>
+                    <a:bodyPr/>
                     <a:lstStyle/>
                     <a:p>
                       <a:r>
@@ -11222,7 +10134,7 @@
                 </a:tc>
                 <a:tc>
                   <a:txBody>
-                    <a:bodyPr wrap="square"/>
+                    <a:bodyPr/>
                     <a:lstStyle/>
                     <a:p>
                       <a:r>
@@ -11244,7 +10156,7 @@
                 </a:tc>
                 <a:tc>
                   <a:txBody>
-                    <a:bodyPr wrap="square"/>
+                    <a:bodyPr/>
                     <a:lstStyle/>
                     <a:p>
                       <a:r>
@@ -11266,7 +10178,7 @@
                 </a:tc>
                 <a:tc>
                   <a:txBody>
-                    <a:bodyPr wrap="square"/>
+                    <a:bodyPr/>
                     <a:lstStyle/>
                     <a:p>
                       <a:r>
@@ -11286,11 +10198,16 @@
                     </a:solidFill>
                   </a:tcPr>
                 </a:tc>
+                <a:extLst>
+                  <a:ext uri="{0D108BD9-81ED-4DB2-BD59-A6C34878D82A}">
+                    <a16:rowId xmlns:a16="http://schemas.microsoft.com/office/drawing/2014/main" val="10003"/>
+                  </a:ext>
+                </a:extLst>
               </a:tr>
               <a:tr h="670560">
                 <a:tc>
                   <a:txBody>
-                    <a:bodyPr wrap="square"/>
+                    <a:bodyPr/>
                     <a:lstStyle/>
                     <a:p>
                       <a:r>
@@ -11312,7 +10229,7 @@
                 </a:tc>
                 <a:tc>
                   <a:txBody>
-                    <a:bodyPr wrap="square"/>
+                    <a:bodyPr/>
                     <a:lstStyle/>
                     <a:p>
                       <a:r>
@@ -11334,7 +10251,7 @@
                 </a:tc>
                 <a:tc>
                   <a:txBody>
-                    <a:bodyPr wrap="square"/>
+                    <a:bodyPr/>
                     <a:lstStyle/>
                     <a:p>
                       <a:r>
@@ -11356,7 +10273,7 @@
                 </a:tc>
                 <a:tc>
                   <a:txBody>
-                    <a:bodyPr wrap="square"/>
+                    <a:bodyPr/>
                     <a:lstStyle/>
                     <a:p>
                       <a:r>
@@ -11378,7 +10295,7 @@
                 </a:tc>
                 <a:tc>
                   <a:txBody>
-                    <a:bodyPr wrap="square"/>
+                    <a:bodyPr/>
                     <a:lstStyle/>
                     <a:p>
                       <a:r>
@@ -11398,11 +10315,16 @@
                     </a:solidFill>
                   </a:tcPr>
                 </a:tc>
+                <a:extLst>
+                  <a:ext uri="{0D108BD9-81ED-4DB2-BD59-A6C34878D82A}">
+                    <a16:rowId xmlns:a16="http://schemas.microsoft.com/office/drawing/2014/main" val="10004"/>
+                  </a:ext>
+                </a:extLst>
               </a:tr>
               <a:tr h="670560">
                 <a:tc>
                   <a:txBody>
-                    <a:bodyPr wrap="square"/>
+                    <a:bodyPr/>
                     <a:lstStyle/>
                     <a:p>
                       <a:r>
@@ -11424,7 +10346,7 @@
                 </a:tc>
                 <a:tc>
                   <a:txBody>
-                    <a:bodyPr wrap="square"/>
+                    <a:bodyPr/>
                     <a:lstStyle/>
                     <a:p>
                       <a:r>
@@ -11446,7 +10368,7 @@
                 </a:tc>
                 <a:tc>
                   <a:txBody>
-                    <a:bodyPr wrap="square"/>
+                    <a:bodyPr/>
                     <a:lstStyle/>
                     <a:p>
                       <a:r>
@@ -11468,7 +10390,7 @@
                 </a:tc>
                 <a:tc>
                   <a:txBody>
-                    <a:bodyPr wrap="square"/>
+                    <a:bodyPr/>
                     <a:lstStyle/>
                     <a:p>
                       <a:r>
@@ -11490,7 +10412,7 @@
                 </a:tc>
                 <a:tc>
                   <a:txBody>
-                    <a:bodyPr wrap="square"/>
+                    <a:bodyPr/>
                     <a:lstStyle/>
                     <a:p>
                       <a:r>
@@ -11510,6 +10432,11 @@
                     </a:solidFill>
                   </a:tcPr>
                 </a:tc>
+                <a:extLst>
+                  <a:ext uri="{0D108BD9-81ED-4DB2-BD59-A6C34878D82A}">
+                    <a16:rowId xmlns:a16="http://schemas.microsoft.com/office/drawing/2014/main" val="10005"/>
+                  </a:ext>
+                </a:extLst>
               </a:tr>
             </a:tbl>
           </a:graphicData>
@@ -11558,6 +10485,7 @@
           <a:lstStyle/>
           <a:p>
             <a:pPr algn="ctr"/>
+            <a:endParaRPr/>
           </a:p>
         </p:txBody>
       </p:sp>
@@ -11578,7 +10506,7 @@
           <a:noFill/>
         </p:spPr>
         <p:txBody>
-          <a:bodyPr wrap="square" lIns="45720" rIns="45720" tIns="27432" bIns="27432" anchor="t">
+          <a:bodyPr wrap="square" lIns="45720" tIns="27432" rIns="45720" bIns="27432" anchor="t">
             <a:spAutoFit/>
           </a:bodyPr>
           <a:lstStyle/>
@@ -11618,7 +10546,7 @@
 </file>
 
 <file path=ppt/slides/slide5.xml><?xml version="1.0" encoding="utf-8"?>
-<p:sld xmlns:a="http://schemas.openxmlformats.org/drawingml/2006/main" xmlns:p="http://schemas.openxmlformats.org/presentationml/2006/main" xmlns:r="http://schemas.openxmlformats.org/officeDocument/2006/relationships">
+<p:sld xmlns:a="http://schemas.openxmlformats.org/drawingml/2006/main" xmlns:r="http://schemas.openxmlformats.org/officeDocument/2006/relationships" xmlns:p="http://schemas.openxmlformats.org/presentationml/2006/main">
   <p:cSld>
     <p:spTree>
       <p:nvGrpSpPr>
@@ -11626,7 +10554,14 @@
         <p:cNvGrpSpPr/>
         <p:nvPr/>
       </p:nvGrpSpPr>
-      <p:grpSpPr/>
+      <p:grpSpPr>
+        <a:xfrm>
+          <a:off x="0" y="0"/>
+          <a:ext cx="0" cy="0"/>
+          <a:chOff x="0" y="0"/>
+          <a:chExt cx="0" cy="0"/>
+        </a:xfrm>
+      </p:grpSpPr>
       <p:sp>
         <p:nvSpPr>
           <p:cNvPr id="2" name="TextBox 1"/>
@@ -11644,7 +10579,7 @@
           <a:noFill/>
         </p:spPr>
         <p:txBody>
-          <a:bodyPr wrap="square" lIns="45720" rIns="45720" tIns="27432" bIns="27432" anchor="t">
+          <a:bodyPr wrap="square" lIns="45720" tIns="27432" rIns="45720" bIns="27432" anchor="t">
             <a:spAutoFit/>
           </a:bodyPr>
           <a:lstStyle/>
@@ -11683,7 +10618,7 @@
           <a:noFill/>
         </p:spPr>
         <p:txBody>
-          <a:bodyPr wrap="square" lIns="45720" rIns="45720" tIns="27432" bIns="27432" anchor="t">
+          <a:bodyPr wrap="square" lIns="45720" tIns="27432" rIns="45720" bIns="27432" anchor="t">
             <a:spAutoFit/>
           </a:bodyPr>
           <a:lstStyle/>
@@ -11722,7 +10657,7 @@
           <a:noFill/>
         </p:spPr>
         <p:txBody>
-          <a:bodyPr wrap="square" lIns="45720" rIns="45720" tIns="27432" bIns="27432" anchor="t">
+          <a:bodyPr wrap="square" lIns="45720" tIns="27432" rIns="45720" bIns="27432" anchor="t">
             <a:spAutoFit/>
           </a:bodyPr>
           <a:lstStyle/>
@@ -11761,7 +10696,7 @@
           <a:noFill/>
         </p:spPr>
         <p:txBody>
-          <a:bodyPr wrap="square" lIns="45720" rIns="45720" tIns="27432" bIns="27432" anchor="t">
+          <a:bodyPr wrap="square" lIns="45720" tIns="27432" rIns="45720" bIns="27432" anchor="t">
             <a:spAutoFit/>
           </a:bodyPr>
           <a:lstStyle/>
@@ -11849,7 +10784,7 @@
           </a:fontRef>
         </p:style>
         <p:txBody>
-          <a:bodyPr rtlCol="0" anchor="ctr" lIns="0" rIns="0" tIns="0" bIns="0"/>
+          <a:bodyPr lIns="0" tIns="0" rIns="0" bIns="0" rtlCol="0" anchor="ctr"/>
           <a:lstStyle/>
           <a:p>
             <a:pPr algn="ctr"/>
@@ -11882,7 +10817,7 @@
           <a:noFill/>
         </p:spPr>
         <p:txBody>
-          <a:bodyPr wrap="square" lIns="45720" rIns="45720" tIns="27432" bIns="27432" anchor="t">
+          <a:bodyPr wrap="square" lIns="45720" tIns="27432" rIns="45720" bIns="27432" anchor="t">
             <a:spAutoFit/>
           </a:bodyPr>
           <a:lstStyle/>
@@ -11957,7 +10892,7 @@
           </a:fontRef>
         </p:style>
         <p:txBody>
-          <a:bodyPr rtlCol="0" anchor="ctr" lIns="0" rIns="0" tIns="0" bIns="0"/>
+          <a:bodyPr lIns="0" tIns="0" rIns="0" bIns="0" rtlCol="0" anchor="ctr"/>
           <a:lstStyle/>
           <a:p>
             <a:pPr algn="ctr"/>
@@ -11990,7 +10925,7 @@
           <a:noFill/>
         </p:spPr>
         <p:txBody>
-          <a:bodyPr wrap="square" lIns="45720" rIns="45720" tIns="27432" bIns="27432" anchor="t">
+          <a:bodyPr wrap="square" lIns="45720" tIns="27432" rIns="45720" bIns="27432" anchor="t">
             <a:spAutoFit/>
           </a:bodyPr>
           <a:lstStyle/>
@@ -12065,7 +11000,7 @@
           </a:fontRef>
         </p:style>
         <p:txBody>
-          <a:bodyPr rtlCol="0" anchor="ctr" lIns="0" rIns="0" tIns="0" bIns="0"/>
+          <a:bodyPr lIns="0" tIns="0" rIns="0" bIns="0" rtlCol="0" anchor="ctr"/>
           <a:lstStyle/>
           <a:p>
             <a:pPr algn="ctr"/>
@@ -12098,7 +11033,7 @@
           <a:noFill/>
         </p:spPr>
         <p:txBody>
-          <a:bodyPr wrap="square" lIns="45720" rIns="45720" tIns="27432" bIns="27432" anchor="t">
+          <a:bodyPr wrap="square" lIns="45720" tIns="27432" rIns="45720" bIns="27432" anchor="t">
             <a:spAutoFit/>
           </a:bodyPr>
           <a:lstStyle/>
@@ -12173,7 +11108,7 @@
           </a:fontRef>
         </p:style>
         <p:txBody>
-          <a:bodyPr rtlCol="0" anchor="ctr" lIns="0" rIns="0" tIns="0" bIns="0"/>
+          <a:bodyPr lIns="0" tIns="0" rIns="0" bIns="0" rtlCol="0" anchor="ctr"/>
           <a:lstStyle/>
           <a:p>
             <a:pPr algn="ctr"/>
@@ -12206,7 +11141,7 @@
           <a:noFill/>
         </p:spPr>
         <p:txBody>
-          <a:bodyPr wrap="square" lIns="45720" rIns="45720" tIns="27432" bIns="27432" anchor="t">
+          <a:bodyPr wrap="square" lIns="45720" tIns="27432" rIns="45720" bIns="27432" anchor="t">
             <a:spAutoFit/>
           </a:bodyPr>
           <a:lstStyle/>
@@ -12253,7 +11188,7 @@
 </file>
 
 <file path=ppt/slides/slide6.xml><?xml version="1.0" encoding="utf-8"?>
-<p:sld xmlns:a="http://schemas.openxmlformats.org/drawingml/2006/main" xmlns:p="http://schemas.openxmlformats.org/presentationml/2006/main" xmlns:r="http://schemas.openxmlformats.org/officeDocument/2006/relationships">
+<p:sld xmlns:a="http://schemas.openxmlformats.org/drawingml/2006/main" xmlns:r="http://schemas.openxmlformats.org/officeDocument/2006/relationships" xmlns:p="http://schemas.openxmlformats.org/presentationml/2006/main">
   <p:cSld>
     <p:spTree>
       <p:nvGrpSpPr>
@@ -12261,7 +11196,14 @@
         <p:cNvGrpSpPr/>
         <p:nvPr/>
       </p:nvGrpSpPr>
-      <p:grpSpPr/>
+      <p:grpSpPr>
+        <a:xfrm>
+          <a:off x="0" y="0"/>
+          <a:ext cx="0" cy="0"/>
+          <a:chOff x="0" y="0"/>
+          <a:chExt cx="0" cy="0"/>
+        </a:xfrm>
+      </p:grpSpPr>
       <p:sp>
         <p:nvSpPr>
           <p:cNvPr id="2" name="TextBox 1"/>
@@ -12279,7 +11221,7 @@
           <a:noFill/>
         </p:spPr>
         <p:txBody>
-          <a:bodyPr wrap="square" lIns="45720" rIns="45720" tIns="27432" bIns="27432" anchor="t">
+          <a:bodyPr wrap="square" lIns="45720" tIns="27432" rIns="45720" bIns="27432" anchor="t">
             <a:spAutoFit/>
           </a:bodyPr>
           <a:lstStyle/>
@@ -12318,7 +11260,7 @@
           <a:noFill/>
         </p:spPr>
         <p:txBody>
-          <a:bodyPr wrap="square" lIns="45720" rIns="45720" tIns="27432" bIns="27432" anchor="t">
+          <a:bodyPr wrap="square" lIns="45720" tIns="27432" rIns="45720" bIns="27432" anchor="t">
             <a:spAutoFit/>
           </a:bodyPr>
           <a:lstStyle/>
@@ -12357,7 +11299,7 @@
           <a:noFill/>
         </p:spPr>
         <p:txBody>
-          <a:bodyPr wrap="square" lIns="45720" rIns="45720" tIns="27432" bIns="27432" anchor="t">
+          <a:bodyPr wrap="square" lIns="45720" tIns="27432" rIns="45720" bIns="27432" anchor="t">
             <a:spAutoFit/>
           </a:bodyPr>
           <a:lstStyle/>
@@ -12396,7 +11338,7 @@
           <a:noFill/>
         </p:spPr>
         <p:txBody>
-          <a:bodyPr wrap="square" lIns="45720" rIns="45720" tIns="27432" bIns="27432" anchor="t">
+          <a:bodyPr wrap="square" lIns="45720" tIns="27432" rIns="45720" bIns="27432" anchor="t">
             <a:spAutoFit/>
           </a:bodyPr>
           <a:lstStyle/>
@@ -12461,6 +11403,7 @@
           <a:lstStyle/>
           <a:p>
             <a:pPr algn="ctr"/>
+            <a:endParaRPr/>
           </a:p>
         </p:txBody>
       </p:sp>
@@ -12501,7 +11444,7 @@
           </a:fontRef>
         </p:style>
         <p:txBody>
-          <a:bodyPr rtlCol="0" anchor="ctr" lIns="0" rIns="0" tIns="0" bIns="0"/>
+          <a:bodyPr lIns="0" tIns="0" rIns="0" bIns="0" rtlCol="0" anchor="ctr"/>
           <a:lstStyle/>
           <a:p>
             <a:pPr algn="ctr"/>
@@ -12534,7 +11477,7 @@
           <a:noFill/>
         </p:spPr>
         <p:txBody>
-          <a:bodyPr wrap="square" lIns="45720" rIns="45720" tIns="27432" bIns="27432" anchor="t">
+          <a:bodyPr wrap="square" lIns="45720" tIns="27432" rIns="45720" bIns="27432" anchor="t">
             <a:spAutoFit/>
           </a:bodyPr>
           <a:lstStyle/>
@@ -12573,7 +11516,7 @@
           <a:noFill/>
         </p:spPr>
         <p:txBody>
-          <a:bodyPr wrap="square" lIns="45720" rIns="45720" tIns="27432" bIns="27432" anchor="t">
+          <a:bodyPr wrap="square" lIns="45720" tIns="27432" rIns="45720" bIns="27432" anchor="t">
             <a:spAutoFit/>
           </a:bodyPr>
           <a:lstStyle/>
@@ -12612,7 +11555,7 @@
           <a:noFill/>
         </p:spPr>
         <p:txBody>
-          <a:bodyPr wrap="square" lIns="45720" rIns="45720" tIns="27432" bIns="27432" anchor="t">
+          <a:bodyPr wrap="square" lIns="45720" tIns="27432" rIns="45720" bIns="27432" anchor="t">
             <a:spAutoFit/>
           </a:bodyPr>
           <a:lstStyle/>
@@ -12675,6 +11618,7 @@
           <a:lstStyle/>
           <a:p>
             <a:pPr algn="ctr"/>
+            <a:endParaRPr/>
           </a:p>
         </p:txBody>
       </p:sp>
@@ -12721,6 +11665,7 @@
           <a:lstStyle/>
           <a:p>
             <a:pPr algn="ctr"/>
+            <a:endParaRPr/>
           </a:p>
         </p:txBody>
       </p:sp>
@@ -12761,7 +11706,7 @@
           </a:fontRef>
         </p:style>
         <p:txBody>
-          <a:bodyPr rtlCol="0" anchor="ctr" lIns="0" rIns="0" tIns="0" bIns="0"/>
+          <a:bodyPr lIns="0" tIns="0" rIns="0" bIns="0" rtlCol="0" anchor="ctr"/>
           <a:lstStyle/>
           <a:p>
             <a:pPr algn="ctr"/>
@@ -12794,7 +11739,7 @@
           <a:noFill/>
         </p:spPr>
         <p:txBody>
-          <a:bodyPr wrap="square" lIns="45720" rIns="45720" tIns="27432" bIns="27432" anchor="t">
+          <a:bodyPr wrap="square" lIns="45720" tIns="27432" rIns="45720" bIns="27432" anchor="t">
             <a:spAutoFit/>
           </a:bodyPr>
           <a:lstStyle/>
@@ -12833,7 +11778,7 @@
           <a:noFill/>
         </p:spPr>
         <p:txBody>
-          <a:bodyPr wrap="square" lIns="45720" rIns="45720" tIns="27432" bIns="27432" anchor="t">
+          <a:bodyPr wrap="square" lIns="45720" tIns="27432" rIns="45720" bIns="27432" anchor="t">
             <a:spAutoFit/>
           </a:bodyPr>
           <a:lstStyle/>
@@ -12872,7 +11817,7 @@
           <a:noFill/>
         </p:spPr>
         <p:txBody>
-          <a:bodyPr wrap="square" lIns="45720" rIns="45720" tIns="27432" bIns="27432" anchor="t">
+          <a:bodyPr wrap="square" lIns="45720" tIns="27432" rIns="45720" bIns="27432" anchor="t">
             <a:spAutoFit/>
           </a:bodyPr>
           <a:lstStyle/>
@@ -12935,6 +11880,7 @@
           <a:lstStyle/>
           <a:p>
             <a:pPr algn="ctr"/>
+            <a:endParaRPr/>
           </a:p>
         </p:txBody>
       </p:sp>
@@ -12981,6 +11927,7 @@
           <a:lstStyle/>
           <a:p>
             <a:pPr algn="ctr"/>
+            <a:endParaRPr/>
           </a:p>
         </p:txBody>
       </p:sp>
@@ -13021,7 +11968,7 @@
           </a:fontRef>
         </p:style>
         <p:txBody>
-          <a:bodyPr rtlCol="0" anchor="ctr" lIns="0" rIns="0" tIns="0" bIns="0"/>
+          <a:bodyPr lIns="0" tIns="0" rIns="0" bIns="0" rtlCol="0" anchor="ctr"/>
           <a:lstStyle/>
           <a:p>
             <a:pPr algn="ctr"/>
@@ -13054,7 +12001,7 @@
           <a:noFill/>
         </p:spPr>
         <p:txBody>
-          <a:bodyPr wrap="square" lIns="45720" rIns="45720" tIns="27432" bIns="27432" anchor="t">
+          <a:bodyPr wrap="square" lIns="45720" tIns="27432" rIns="45720" bIns="27432" anchor="t">
             <a:spAutoFit/>
           </a:bodyPr>
           <a:lstStyle/>
@@ -13093,7 +12040,7 @@
           <a:noFill/>
         </p:spPr>
         <p:txBody>
-          <a:bodyPr wrap="square" lIns="45720" rIns="45720" tIns="27432" bIns="27432" anchor="t">
+          <a:bodyPr wrap="square" lIns="45720" tIns="27432" rIns="45720" bIns="27432" anchor="t">
             <a:spAutoFit/>
           </a:bodyPr>
           <a:lstStyle/>
@@ -13132,7 +12079,7 @@
           <a:noFill/>
         </p:spPr>
         <p:txBody>
-          <a:bodyPr wrap="square" lIns="45720" rIns="45720" tIns="27432" bIns="27432" anchor="t">
+          <a:bodyPr wrap="square" lIns="45720" tIns="27432" rIns="45720" bIns="27432" anchor="t">
             <a:spAutoFit/>
           </a:bodyPr>
           <a:lstStyle/>
@@ -13171,7 +12118,7 @@
           <a:noFill/>
         </p:spPr>
         <p:txBody>
-          <a:bodyPr wrap="square" lIns="45720" rIns="45720" tIns="27432" bIns="27432" anchor="t">
+          <a:bodyPr wrap="square" lIns="45720" tIns="27432" rIns="45720" bIns="27432" anchor="t">
             <a:spAutoFit/>
           </a:bodyPr>
           <a:lstStyle/>
@@ -13210,7 +12157,7 @@
           <a:noFill/>
         </p:spPr>
         <p:txBody>
-          <a:bodyPr wrap="square" lIns="45720" rIns="45720" tIns="27432" bIns="27432" anchor="t">
+          <a:bodyPr wrap="square" lIns="45720" tIns="27432" rIns="45720" bIns="27432" anchor="t">
             <a:spAutoFit/>
           </a:bodyPr>
           <a:lstStyle/>
@@ -13249,7 +12196,7 @@
           <a:noFill/>
         </p:spPr>
         <p:txBody>
-          <a:bodyPr wrap="square" lIns="45720" rIns="45720" tIns="27432" bIns="27432" anchor="t">
+          <a:bodyPr wrap="square" lIns="45720" tIns="27432" rIns="45720" bIns="27432" anchor="t">
             <a:spAutoFit/>
           </a:bodyPr>
           <a:lstStyle/>
@@ -13288,7 +12235,7 @@
           <a:noFill/>
         </p:spPr>
         <p:txBody>
-          <a:bodyPr wrap="square" lIns="45720" rIns="45720" tIns="27432" bIns="27432" anchor="t">
+          <a:bodyPr wrap="square" lIns="45720" tIns="27432" rIns="45720" bIns="27432" anchor="t">
             <a:spAutoFit/>
           </a:bodyPr>
           <a:lstStyle/>
@@ -13327,7 +12274,7 @@
           <a:noFill/>
         </p:spPr>
         <p:txBody>
-          <a:bodyPr wrap="square" lIns="45720" rIns="45720" tIns="27432" bIns="27432" anchor="t">
+          <a:bodyPr wrap="square" lIns="45720" tIns="27432" rIns="45720" bIns="27432" anchor="t">
             <a:spAutoFit/>
           </a:bodyPr>
           <a:lstStyle/>
@@ -13366,7 +12313,7 @@
           <a:noFill/>
         </p:spPr>
         <p:txBody>
-          <a:bodyPr wrap="square" lIns="45720" rIns="45720" tIns="27432" bIns="27432" anchor="t">
+          <a:bodyPr wrap="square" lIns="45720" tIns="27432" rIns="45720" bIns="27432" anchor="t">
             <a:spAutoFit/>
           </a:bodyPr>
           <a:lstStyle/>
@@ -13397,7 +12344,7 @@
 </file>
 
 <file path=ppt/slides/slide7.xml><?xml version="1.0" encoding="utf-8"?>
-<p:sld xmlns:a="http://schemas.openxmlformats.org/drawingml/2006/main" xmlns:p="http://schemas.openxmlformats.org/presentationml/2006/main" xmlns:r="http://schemas.openxmlformats.org/officeDocument/2006/relationships">
+<p:sld xmlns:a="http://schemas.openxmlformats.org/drawingml/2006/main" xmlns:r="http://schemas.openxmlformats.org/officeDocument/2006/relationships" xmlns:p="http://schemas.openxmlformats.org/presentationml/2006/main">
   <p:cSld>
     <p:spTree>
       <p:nvGrpSpPr>
@@ -13405,7 +12352,14 @@
         <p:cNvGrpSpPr/>
         <p:nvPr/>
       </p:nvGrpSpPr>
-      <p:grpSpPr/>
+      <p:grpSpPr>
+        <a:xfrm>
+          <a:off x="0" y="0"/>
+          <a:ext cx="0" cy="0"/>
+          <a:chOff x="0" y="0"/>
+          <a:chExt cx="0" cy="0"/>
+        </a:xfrm>
+      </p:grpSpPr>
       <p:sp>
         <p:nvSpPr>
           <p:cNvPr id="2" name="TextBox 1"/>
@@ -13423,7 +12377,7 @@
           <a:noFill/>
         </p:spPr>
         <p:txBody>
-          <a:bodyPr wrap="square" lIns="45720" rIns="45720" tIns="27432" bIns="27432" anchor="t">
+          <a:bodyPr wrap="square" lIns="45720" tIns="27432" rIns="45720" bIns="27432" anchor="t">
             <a:spAutoFit/>
           </a:bodyPr>
           <a:lstStyle/>
@@ -13462,7 +12416,7 @@
           <a:noFill/>
         </p:spPr>
         <p:txBody>
-          <a:bodyPr wrap="square" lIns="45720" rIns="45720" tIns="27432" bIns="27432" anchor="t">
+          <a:bodyPr wrap="square" lIns="45720" tIns="27432" rIns="45720" bIns="27432" anchor="t">
             <a:spAutoFit/>
           </a:bodyPr>
           <a:lstStyle/>
@@ -13501,7 +12455,7 @@
           <a:noFill/>
         </p:spPr>
         <p:txBody>
-          <a:bodyPr wrap="square" lIns="45720" rIns="45720" tIns="27432" bIns="27432" anchor="t">
+          <a:bodyPr wrap="square" lIns="45720" tIns="27432" rIns="45720" bIns="27432" anchor="t">
             <a:spAutoFit/>
           </a:bodyPr>
           <a:lstStyle/>
@@ -13540,7 +12494,7 @@
           <a:noFill/>
         </p:spPr>
         <p:txBody>
-          <a:bodyPr wrap="square" lIns="45720" rIns="45720" tIns="27432" bIns="27432" anchor="t">
+          <a:bodyPr wrap="square" lIns="45720" tIns="27432" rIns="45720" bIns="27432" anchor="t">
             <a:spAutoFit/>
           </a:bodyPr>
           <a:lstStyle/>
@@ -13608,7 +12562,7 @@
           <a:noFill/>
         </p:spPr>
         <p:txBody>
-          <a:bodyPr wrap="square" lIns="45720" rIns="45720" tIns="27432" bIns="27432" anchor="t">
+          <a:bodyPr wrap="square" lIns="45720" tIns="27432" rIns="45720" bIns="27432" anchor="t">
             <a:spAutoFit/>
           </a:bodyPr>
           <a:lstStyle/>
@@ -13647,7 +12601,7 @@
           <a:noFill/>
         </p:spPr>
         <p:txBody>
-          <a:bodyPr wrap="square" lIns="45720" rIns="45720" tIns="27432" bIns="27432" anchor="t">
+          <a:bodyPr wrap="square" lIns="45720" tIns="27432" rIns="45720" bIns="27432" anchor="t">
             <a:spAutoFit/>
           </a:bodyPr>
           <a:lstStyle/>
@@ -13702,7 +12656,7 @@
           <a:noFill/>
         </p:spPr>
         <p:txBody>
-          <a:bodyPr wrap="square" lIns="45720" rIns="45720" tIns="27432" bIns="27432" anchor="t">
+          <a:bodyPr wrap="square" lIns="45720" tIns="27432" rIns="45720" bIns="27432" anchor="t">
             <a:spAutoFit/>
           </a:bodyPr>
           <a:lstStyle/>
@@ -13757,7 +12711,7 @@
           <a:noFill/>
         </p:spPr>
         <p:txBody>
-          <a:bodyPr wrap="square" lIns="45720" rIns="45720" tIns="27432" bIns="27432" anchor="t">
+          <a:bodyPr wrap="square" lIns="45720" tIns="27432" rIns="45720" bIns="27432" anchor="t">
             <a:spAutoFit/>
           </a:bodyPr>
           <a:lstStyle/>
@@ -13812,7 +12766,7 @@
           <a:noFill/>
         </p:spPr>
         <p:txBody>
-          <a:bodyPr wrap="square" lIns="45720" rIns="45720" tIns="27432" bIns="27432" anchor="t">
+          <a:bodyPr wrap="square" lIns="45720" tIns="27432" rIns="45720" bIns="27432" anchor="t">
             <a:spAutoFit/>
           </a:bodyPr>
           <a:lstStyle/>
@@ -13893,6 +12847,7 @@
           <a:lstStyle/>
           <a:p>
             <a:pPr algn="ctr"/>
+            <a:endParaRPr/>
           </a:p>
         </p:txBody>
       </p:sp>
@@ -13913,7 +12868,7 @@
           <a:noFill/>
         </p:spPr>
         <p:txBody>
-          <a:bodyPr wrap="square" lIns="45720" rIns="45720" tIns="27432" bIns="27432" anchor="t">
+          <a:bodyPr wrap="square" lIns="45720" tIns="27432" rIns="45720" bIns="27432" anchor="t">
             <a:spAutoFit/>
           </a:bodyPr>
           <a:lstStyle/>
@@ -13953,7 +12908,7 @@
 </file>
 
 <file path=ppt/slides/slide8.xml><?xml version="1.0" encoding="utf-8"?>
-<p:sld xmlns:a="http://schemas.openxmlformats.org/drawingml/2006/main" xmlns:p="http://schemas.openxmlformats.org/presentationml/2006/main" xmlns:r="http://schemas.openxmlformats.org/officeDocument/2006/relationships">
+<p:sld xmlns:a="http://schemas.openxmlformats.org/drawingml/2006/main" xmlns:r="http://schemas.openxmlformats.org/officeDocument/2006/relationships" xmlns:p="http://schemas.openxmlformats.org/presentationml/2006/main">
   <p:cSld>
     <p:spTree>
       <p:nvGrpSpPr>
@@ -13961,7 +12916,14 @@
         <p:cNvGrpSpPr/>
         <p:nvPr/>
       </p:nvGrpSpPr>
-      <p:grpSpPr/>
+      <p:grpSpPr>
+        <a:xfrm>
+          <a:off x="0" y="0"/>
+          <a:ext cx="0" cy="0"/>
+          <a:chOff x="0" y="0"/>
+          <a:chExt cx="0" cy="0"/>
+        </a:xfrm>
+      </p:grpSpPr>
       <p:sp>
         <p:nvSpPr>
           <p:cNvPr id="2" name="TextBox 1"/>
@@ -13979,7 +12941,7 @@
           <a:noFill/>
         </p:spPr>
         <p:txBody>
-          <a:bodyPr wrap="square" lIns="45720" rIns="45720" tIns="27432" bIns="27432" anchor="t">
+          <a:bodyPr wrap="square" lIns="45720" tIns="27432" rIns="45720" bIns="27432" anchor="t">
             <a:spAutoFit/>
           </a:bodyPr>
           <a:lstStyle/>
@@ -14018,7 +12980,7 @@
           <a:noFill/>
         </p:spPr>
         <p:txBody>
-          <a:bodyPr wrap="square" lIns="45720" rIns="45720" tIns="27432" bIns="27432" anchor="t">
+          <a:bodyPr wrap="square" lIns="45720" tIns="27432" rIns="45720" bIns="27432" anchor="t">
             <a:spAutoFit/>
           </a:bodyPr>
           <a:lstStyle/>
@@ -14057,7 +13019,7 @@
           <a:noFill/>
         </p:spPr>
         <p:txBody>
-          <a:bodyPr wrap="square" lIns="45720" rIns="45720" tIns="27432" bIns="27432" anchor="t">
+          <a:bodyPr wrap="square" lIns="45720" tIns="27432" rIns="45720" bIns="27432" anchor="t">
             <a:spAutoFit/>
           </a:bodyPr>
           <a:lstStyle/>
@@ -14096,7 +13058,7 @@
           <a:noFill/>
         </p:spPr>
         <p:txBody>
-          <a:bodyPr wrap="square" lIns="45720" rIns="45720" tIns="27432" bIns="27432" anchor="t">
+          <a:bodyPr wrap="square" lIns="45720" tIns="27432" rIns="45720" bIns="27432" anchor="t">
             <a:spAutoFit/>
           </a:bodyPr>
           <a:lstStyle/>
@@ -14161,6 +13123,7 @@
           <a:lstStyle/>
           <a:p>
             <a:pPr algn="ctr"/>
+            <a:endParaRPr/>
           </a:p>
         </p:txBody>
       </p:sp>
@@ -14230,7 +13193,7 @@
           </a:fontRef>
         </p:style>
         <p:txBody>
-          <a:bodyPr rtlCol="0" anchor="ctr" lIns="0" rIns="0" tIns="0" bIns="0"/>
+          <a:bodyPr lIns="0" tIns="0" rIns="0" bIns="0" rtlCol="0" anchor="ctr"/>
           <a:lstStyle/>
           <a:p>
             <a:pPr algn="ctr"/>
@@ -14263,7 +13226,7 @@
           <a:noFill/>
         </p:spPr>
         <p:txBody>
-          <a:bodyPr wrap="square" lIns="45720" rIns="45720" tIns="27432" bIns="27432" anchor="t">
+          <a:bodyPr wrap="square" lIns="45720" tIns="27432" rIns="45720" bIns="27432" anchor="t">
             <a:spAutoFit/>
           </a:bodyPr>
           <a:lstStyle/>
@@ -14302,7 +13265,7 @@
           <a:noFill/>
         </p:spPr>
         <p:txBody>
-          <a:bodyPr wrap="square" lIns="45720" rIns="45720" tIns="27432" bIns="27432" anchor="t">
+          <a:bodyPr wrap="square" lIns="45720" tIns="27432" rIns="45720" bIns="27432" anchor="t">
             <a:spAutoFit/>
           </a:bodyPr>
           <a:lstStyle/>
@@ -14365,6 +13328,7 @@
           <a:lstStyle/>
           <a:p>
             <a:pPr algn="ctr"/>
+            <a:endParaRPr/>
           </a:p>
         </p:txBody>
       </p:sp>
@@ -14411,6 +13375,7 @@
           <a:lstStyle/>
           <a:p>
             <a:pPr algn="ctr"/>
+            <a:endParaRPr/>
           </a:p>
         </p:txBody>
       </p:sp>
@@ -14480,7 +13445,7 @@
           </a:fontRef>
         </p:style>
         <p:txBody>
-          <a:bodyPr rtlCol="0" anchor="ctr" lIns="0" rIns="0" tIns="0" bIns="0"/>
+          <a:bodyPr lIns="0" tIns="0" rIns="0" bIns="0" rtlCol="0" anchor="ctr"/>
           <a:lstStyle/>
           <a:p>
             <a:pPr algn="ctr"/>
@@ -14513,7 +13478,7 @@
           <a:noFill/>
         </p:spPr>
         <p:txBody>
-          <a:bodyPr wrap="square" lIns="45720" rIns="45720" tIns="27432" bIns="27432" anchor="t">
+          <a:bodyPr wrap="square" lIns="45720" tIns="27432" rIns="45720" bIns="27432" anchor="t">
             <a:spAutoFit/>
           </a:bodyPr>
           <a:lstStyle/>
@@ -14552,7 +13517,7 @@
           <a:noFill/>
         </p:spPr>
         <p:txBody>
-          <a:bodyPr wrap="square" lIns="45720" rIns="45720" tIns="27432" bIns="27432" anchor="t">
+          <a:bodyPr wrap="square" lIns="45720" tIns="27432" rIns="45720" bIns="27432" anchor="t">
             <a:spAutoFit/>
           </a:bodyPr>
           <a:lstStyle/>
@@ -14615,6 +13580,7 @@
           <a:lstStyle/>
           <a:p>
             <a:pPr algn="ctr"/>
+            <a:endParaRPr/>
           </a:p>
         </p:txBody>
       </p:sp>
@@ -14661,6 +13627,7 @@
           <a:lstStyle/>
           <a:p>
             <a:pPr algn="ctr"/>
+            <a:endParaRPr/>
           </a:p>
         </p:txBody>
       </p:sp>
@@ -14730,7 +13697,7 @@
           </a:fontRef>
         </p:style>
         <p:txBody>
-          <a:bodyPr rtlCol="0" anchor="ctr" lIns="0" rIns="0" tIns="0" bIns="0"/>
+          <a:bodyPr lIns="0" tIns="0" rIns="0" bIns="0" rtlCol="0" anchor="ctr"/>
           <a:lstStyle/>
           <a:p>
             <a:pPr algn="ctr"/>
@@ -14763,7 +13730,7 @@
           <a:noFill/>
         </p:spPr>
         <p:txBody>
-          <a:bodyPr wrap="square" lIns="45720" rIns="45720" tIns="27432" bIns="27432" anchor="t">
+          <a:bodyPr wrap="square" lIns="45720" tIns="27432" rIns="45720" bIns="27432" anchor="t">
             <a:spAutoFit/>
           </a:bodyPr>
           <a:lstStyle/>
@@ -14802,7 +13769,7 @@
           <a:noFill/>
         </p:spPr>
         <p:txBody>
-          <a:bodyPr wrap="square" lIns="45720" rIns="45720" tIns="27432" bIns="27432" anchor="t">
+          <a:bodyPr wrap="square" lIns="45720" tIns="27432" rIns="45720" bIns="27432" anchor="t">
             <a:spAutoFit/>
           </a:bodyPr>
           <a:lstStyle/>
@@ -14865,6 +13832,7 @@
           <a:lstStyle/>
           <a:p>
             <a:pPr algn="ctr"/>
+            <a:endParaRPr/>
           </a:p>
         </p:txBody>
       </p:sp>
@@ -14911,6 +13879,7 @@
           <a:lstStyle/>
           <a:p>
             <a:pPr algn="ctr"/>
+            <a:endParaRPr/>
           </a:p>
         </p:txBody>
       </p:sp>
@@ -14980,7 +13949,7 @@
           </a:fontRef>
         </p:style>
         <p:txBody>
-          <a:bodyPr rtlCol="0" anchor="ctr" lIns="0" rIns="0" tIns="0" bIns="0"/>
+          <a:bodyPr lIns="0" tIns="0" rIns="0" bIns="0" rtlCol="0" anchor="ctr"/>
           <a:lstStyle/>
           <a:p>
             <a:pPr algn="ctr"/>
@@ -15013,7 +13982,7 @@
           <a:noFill/>
         </p:spPr>
         <p:txBody>
-          <a:bodyPr wrap="square" lIns="45720" rIns="45720" tIns="27432" bIns="27432" anchor="t">
+          <a:bodyPr wrap="square" lIns="45720" tIns="27432" rIns="45720" bIns="27432" anchor="t">
             <a:spAutoFit/>
           </a:bodyPr>
           <a:lstStyle/>
@@ -15052,7 +14021,7 @@
           <a:noFill/>
         </p:spPr>
         <p:txBody>
-          <a:bodyPr wrap="square" lIns="45720" rIns="45720" tIns="27432" bIns="27432" anchor="t">
+          <a:bodyPr wrap="square" lIns="45720" tIns="27432" rIns="45720" bIns="27432" anchor="t">
             <a:spAutoFit/>
           </a:bodyPr>
           <a:lstStyle/>
@@ -15083,7 +14052,7 @@
 </file>
 
 <file path=ppt/slides/slide9.xml><?xml version="1.0" encoding="utf-8"?>
-<p:sld xmlns:a="http://schemas.openxmlformats.org/drawingml/2006/main" xmlns:p="http://schemas.openxmlformats.org/presentationml/2006/main" xmlns:r="http://schemas.openxmlformats.org/officeDocument/2006/relationships">
+<p:sld xmlns:a="http://schemas.openxmlformats.org/drawingml/2006/main" xmlns:r="http://schemas.openxmlformats.org/officeDocument/2006/relationships" xmlns:p="http://schemas.openxmlformats.org/presentationml/2006/main">
   <p:cSld>
     <p:spTree>
       <p:nvGrpSpPr>
@@ -15091,7 +14060,14 @@
         <p:cNvGrpSpPr/>
         <p:nvPr/>
       </p:nvGrpSpPr>
-      <p:grpSpPr/>
+      <p:grpSpPr>
+        <a:xfrm>
+          <a:off x="0" y="0"/>
+          <a:ext cx="0" cy="0"/>
+          <a:chOff x="0" y="0"/>
+          <a:chExt cx="0" cy="0"/>
+        </a:xfrm>
+      </p:grpSpPr>
       <p:sp>
         <p:nvSpPr>
           <p:cNvPr id="2" name="TextBox 1"/>
@@ -15109,7 +14085,7 @@
           <a:noFill/>
         </p:spPr>
         <p:txBody>
-          <a:bodyPr wrap="square" lIns="45720" rIns="45720" tIns="27432" bIns="27432" anchor="t">
+          <a:bodyPr wrap="square" lIns="45720" tIns="27432" rIns="45720" bIns="27432" anchor="t">
             <a:spAutoFit/>
           </a:bodyPr>
           <a:lstStyle/>
@@ -15148,7 +14124,7 @@
           <a:noFill/>
         </p:spPr>
         <p:txBody>
-          <a:bodyPr wrap="square" lIns="45720" rIns="45720" tIns="27432" bIns="27432" anchor="t">
+          <a:bodyPr wrap="square" lIns="45720" tIns="27432" rIns="45720" bIns="27432" anchor="t">
             <a:spAutoFit/>
           </a:bodyPr>
           <a:lstStyle/>
@@ -15187,7 +14163,7 @@
           <a:noFill/>
         </p:spPr>
         <p:txBody>
-          <a:bodyPr wrap="square" lIns="45720" rIns="45720" tIns="27432" bIns="27432" anchor="t">
+          <a:bodyPr wrap="square" lIns="45720" tIns="27432" rIns="45720" bIns="27432" anchor="t">
             <a:spAutoFit/>
           </a:bodyPr>
           <a:lstStyle/>
@@ -15226,7 +14202,7 @@
           <a:noFill/>
         </p:spPr>
         <p:txBody>
-          <a:bodyPr wrap="square" lIns="45720" rIns="45720" tIns="27432" bIns="27432" anchor="t">
+          <a:bodyPr wrap="square" lIns="45720" tIns="27432" rIns="45720" bIns="27432" anchor="t">
             <a:spAutoFit/>
           </a:bodyPr>
           <a:lstStyle/>
@@ -15606,7 +14582,7 @@
 </file>
 
 <file path=ppt/theme/theme2.xml><?xml version="1.0" encoding="utf-8"?>
-<a:theme xmlns:a="http://schemas.openxmlformats.org/drawingml/2006/main" name="Office Theme">
+<a:theme xmlns:a="http://schemas.openxmlformats.org/drawingml/2006/main" name="Tema de Office">
   <a:themeElements>
     <a:clrScheme name="Office">
       <a:dk1>
@@ -15616,44 +14592,44 @@
         <a:sysClr val="window" lastClr="FFFFFF"/>
       </a:lt1>
       <a:dk2>
-        <a:srgbClr val="1F497D"/>
+        <a:srgbClr val="0E2841"/>
       </a:dk2>
       <a:lt2>
-        <a:srgbClr val="EEECE1"/>
+        <a:srgbClr val="E8E8E8"/>
       </a:lt2>
       <a:accent1>
-        <a:srgbClr val="4F81BD"/>
+        <a:srgbClr val="156082"/>
       </a:accent1>
       <a:accent2>
-        <a:srgbClr val="C0504D"/>
+        <a:srgbClr val="E97132"/>
       </a:accent2>
       <a:accent3>
-        <a:srgbClr val="9BBB59"/>
+        <a:srgbClr val="196B24"/>
       </a:accent3>
       <a:accent4>
-        <a:srgbClr val="8064A2"/>
+        <a:srgbClr val="0F9ED5"/>
       </a:accent4>
       <a:accent5>
-        <a:srgbClr val="4BACC6"/>
+        <a:srgbClr val="A02B93"/>
       </a:accent5>
       <a:accent6>
-        <a:srgbClr val="F79646"/>
+        <a:srgbClr val="4EA72E"/>
       </a:accent6>
       <a:hlink>
-        <a:srgbClr val="0000FF"/>
+        <a:srgbClr val="467886"/>
       </a:hlink>
       <a:folHlink>
-        <a:srgbClr val="800080"/>
+        <a:srgbClr val="96607D"/>
       </a:folHlink>
     </a:clrScheme>
     <a:fontScheme name="Office">
       <a:majorFont>
-        <a:latin typeface="Calibri"/>
+        <a:latin typeface="Aptos Display" panose="02110004020202020204"/>
         <a:ea typeface=""/>
         <a:cs typeface=""/>
-        <a:font script="Jpan" typeface="ＭＳ Ｐゴシック"/>
+        <a:font script="Jpan" typeface="游ゴシック Light"/>
         <a:font script="Hang" typeface="맑은 고딕"/>
-        <a:font script="Hans" typeface="宋体"/>
+        <a:font script="Hans" typeface="等线 Light"/>
         <a:font script="Hant" typeface="新細明體"/>
         <a:font script="Arab" typeface="Times New Roman"/>
         <a:font script="Hebr" typeface="Times New Roman"/>
@@ -15681,14 +14657,31 @@
         <a:font script="Viet" typeface="Times New Roman"/>
         <a:font script="Uigh" typeface="Microsoft Uighur"/>
         <a:font script="Geor" typeface="Sylfaen"/>
+        <a:font script="Armn" typeface="Arial"/>
+        <a:font script="Bugi" typeface="Leelawadee UI"/>
+        <a:font script="Bopo" typeface="Microsoft JhengHei"/>
+        <a:font script="Java" typeface="Javanese Text"/>
+        <a:font script="Lisu" typeface="Segoe UI"/>
+        <a:font script="Mymr" typeface="Myanmar Text"/>
+        <a:font script="Nkoo" typeface="Ebrima"/>
+        <a:font script="Olck" typeface="Nirmala UI"/>
+        <a:font script="Osma" typeface="Ebrima"/>
+        <a:font script="Phag" typeface="Phagspa"/>
+        <a:font script="Syrn" typeface="Estrangelo Edessa"/>
+        <a:font script="Syrj" typeface="Estrangelo Edessa"/>
+        <a:font script="Syre" typeface="Estrangelo Edessa"/>
+        <a:font script="Sora" typeface="Nirmala UI"/>
+        <a:font script="Tale" typeface="Microsoft Tai Le"/>
+        <a:font script="Talu" typeface="Microsoft New Tai Lue"/>
+        <a:font script="Tfng" typeface="Ebrima"/>
       </a:majorFont>
       <a:minorFont>
-        <a:latin typeface="Calibri"/>
+        <a:latin typeface="Aptos" panose="02110004020202020204"/>
         <a:ea typeface=""/>
         <a:cs typeface=""/>
-        <a:font script="Jpan" typeface="ＭＳ Ｐゴシック"/>
+        <a:font script="Jpan" typeface="游ゴシック"/>
         <a:font script="Hang" typeface="맑은 고딕"/>
-        <a:font script="Hans" typeface="宋体"/>
+        <a:font script="Hans" typeface="等线"/>
         <a:font script="Hant" typeface="新細明體"/>
         <a:font script="Arab" typeface="Arial"/>
         <a:font script="Hebr" typeface="Arial"/>
@@ -15716,6 +14709,23 @@
         <a:font script="Viet" typeface="Arial"/>
         <a:font script="Uigh" typeface="Microsoft Uighur"/>
         <a:font script="Geor" typeface="Sylfaen"/>
+        <a:font script="Armn" typeface="Arial"/>
+        <a:font script="Bugi" typeface="Leelawadee UI"/>
+        <a:font script="Bopo" typeface="Microsoft JhengHei"/>
+        <a:font script="Java" typeface="Javanese Text"/>
+        <a:font script="Lisu" typeface="Segoe UI"/>
+        <a:font script="Mymr" typeface="Myanmar Text"/>
+        <a:font script="Nkoo" typeface="Ebrima"/>
+        <a:font script="Olck" typeface="Nirmala UI"/>
+        <a:font script="Osma" typeface="Ebrima"/>
+        <a:font script="Phag" typeface="Phagspa"/>
+        <a:font script="Syrn" typeface="Estrangelo Edessa"/>
+        <a:font script="Syrj" typeface="Estrangelo Edessa"/>
+        <a:font script="Syre" typeface="Estrangelo Edessa"/>
+        <a:font script="Sora" typeface="Nirmala UI"/>
+        <a:font script="Tale" typeface="Microsoft Tai Le"/>
+        <a:font script="Talu" typeface="Microsoft New Tai Lue"/>
+        <a:font script="Tfng" typeface="Ebrima"/>
       </a:minorFont>
     </a:fontScheme>
     <a:fmtScheme name="Office">
@@ -15727,180 +14737,136 @@
           <a:gsLst>
             <a:gs pos="0">
               <a:schemeClr val="phClr">
-                <a:tint val="50000"/>
-                <a:satMod val="300000"/>
+                <a:lumMod val="110000"/>
+                <a:satMod val="105000"/>
+                <a:tint val="67000"/>
               </a:schemeClr>
             </a:gs>
-            <a:gs pos="35000">
+            <a:gs pos="50000">
               <a:schemeClr val="phClr">
-                <a:tint val="37000"/>
-                <a:satMod val="300000"/>
+                <a:lumMod val="105000"/>
+                <a:satMod val="103000"/>
+                <a:tint val="73000"/>
               </a:schemeClr>
             </a:gs>
             <a:gs pos="100000">
               <a:schemeClr val="phClr">
-                <a:tint val="15000"/>
-                <a:satMod val="350000"/>
+                <a:lumMod val="105000"/>
+                <a:satMod val="109000"/>
+                <a:tint val="81000"/>
               </a:schemeClr>
             </a:gs>
           </a:gsLst>
-          <a:lin ang="16200000" scaled="1"/>
+          <a:lin ang="5400000" scaled="0"/>
         </a:gradFill>
         <a:gradFill rotWithShape="1">
           <a:gsLst>
             <a:gs pos="0">
               <a:schemeClr val="phClr">
-                <a:tint val="100000"/>
+                <a:satMod val="103000"/>
+                <a:lumMod val="102000"/>
+                <a:tint val="94000"/>
+              </a:schemeClr>
+            </a:gs>
+            <a:gs pos="50000">
+              <a:schemeClr val="phClr">
+                <a:satMod val="110000"/>
+                <a:lumMod val="100000"/>
                 <a:shade val="100000"/>
-                <a:satMod val="130000"/>
               </a:schemeClr>
             </a:gs>
             <a:gs pos="100000">
               <a:schemeClr val="phClr">
-                <a:tint val="50000"/>
-                <a:shade val="100000"/>
-                <a:satMod val="350000"/>
+                <a:lumMod val="99000"/>
+                <a:satMod val="120000"/>
+                <a:shade val="78000"/>
               </a:schemeClr>
             </a:gs>
           </a:gsLst>
-          <a:lin ang="16200000" scaled="0"/>
+          <a:lin ang="5400000" scaled="0"/>
         </a:gradFill>
       </a:fillStyleLst>
       <a:lnStyleLst>
-        <a:ln w="9525" cap="flat" cmpd="sng" algn="ctr">
+        <a:ln w="12700" cap="flat" cmpd="sng" algn="ctr">
           <a:solidFill>
-            <a:schemeClr val="phClr">
-              <a:shade val="95000"/>
-              <a:satMod val="105000"/>
-            </a:schemeClr>
+            <a:schemeClr val="phClr"/>
           </a:solidFill>
           <a:prstDash val="solid"/>
+          <a:miter lim="800000"/>
+        </a:ln>
+        <a:ln w="19050" cap="flat" cmpd="sng" algn="ctr">
+          <a:solidFill>
+            <a:schemeClr val="phClr"/>
+          </a:solidFill>
+          <a:prstDash val="solid"/>
+          <a:miter lim="800000"/>
         </a:ln>
         <a:ln w="25400" cap="flat" cmpd="sng" algn="ctr">
           <a:solidFill>
             <a:schemeClr val="phClr"/>
           </a:solidFill>
           <a:prstDash val="solid"/>
-        </a:ln>
-        <a:ln w="38100" cap="flat" cmpd="sng" algn="ctr">
-          <a:solidFill>
-            <a:schemeClr val="phClr"/>
-          </a:solidFill>
-          <a:prstDash val="solid"/>
+          <a:miter lim="800000"/>
         </a:ln>
       </a:lnStyleLst>
       <a:effectStyleLst>
         <a:effectStyle>
+          <a:effectLst/>
+        </a:effectStyle>
+        <a:effectStyle>
+          <a:effectLst/>
+        </a:effectStyle>
+        <a:effectStyle>
           <a:effectLst>
-            <a:outerShdw blurRad="40000" dist="20000" dir="5400000" rotWithShape="0">
+            <a:outerShdw blurRad="57150" dist="19050" dir="5400000" algn="ctr" rotWithShape="0">
               <a:srgbClr val="000000">
-                <a:alpha val="38000"/>
+                <a:alpha val="63000"/>
               </a:srgbClr>
             </a:outerShdw>
           </a:effectLst>
-        </a:effectStyle>
-        <a:effectStyle>
-          <a:effectLst>
-            <a:outerShdw blurRad="40000" dist="23000" dir="5400000" rotWithShape="0">
-              <a:srgbClr val="000000">
-                <a:alpha val="35000"/>
-              </a:srgbClr>
-            </a:outerShdw>
-          </a:effectLst>
-        </a:effectStyle>
-        <a:effectStyle>
-          <a:effectLst>
-            <a:outerShdw blurRad="40000" dist="23000" dir="5400000" rotWithShape="0">
-              <a:srgbClr val="000000">
-                <a:alpha val="35000"/>
-              </a:srgbClr>
-            </a:outerShdw>
-          </a:effectLst>
-          <a:scene3d>
-            <a:camera prst="orthographicFront">
-              <a:rot lat="0" lon="0" rev="0"/>
-            </a:camera>
-            <a:lightRig rig="threePt" dir="t">
-              <a:rot lat="0" lon="0" rev="1200000"/>
-            </a:lightRig>
-          </a:scene3d>
-          <a:sp3d>
-            <a:bevelT w="63500" h="25400"/>
-          </a:sp3d>
         </a:effectStyle>
       </a:effectStyleLst>
       <a:bgFillStyleLst>
         <a:solidFill>
           <a:schemeClr val="phClr"/>
         </a:solidFill>
+        <a:solidFill>
+          <a:schemeClr val="phClr">
+            <a:tint val="95000"/>
+            <a:satMod val="170000"/>
+          </a:schemeClr>
+        </a:solidFill>
         <a:gradFill rotWithShape="1">
           <a:gsLst>
             <a:gs pos="0">
               <a:schemeClr val="phClr">
-                <a:tint val="40000"/>
-                <a:satMod val="350000"/>
+                <a:tint val="93000"/>
+                <a:satMod val="150000"/>
+                <a:shade val="98000"/>
+                <a:lumMod val="102000"/>
               </a:schemeClr>
             </a:gs>
-            <a:gs pos="40000">
+            <a:gs pos="50000">
               <a:schemeClr val="phClr">
-                <a:tint val="45000"/>
-                <a:shade val="99000"/>
-                <a:satMod val="350000"/>
+                <a:tint val="98000"/>
+                <a:satMod val="130000"/>
+                <a:shade val="90000"/>
+                <a:lumMod val="103000"/>
               </a:schemeClr>
             </a:gs>
             <a:gs pos="100000">
               <a:schemeClr val="phClr">
-                <a:shade val="20000"/>
-                <a:satMod val="255000"/>
+                <a:shade val="63000"/>
+                <a:satMod val="120000"/>
               </a:schemeClr>
             </a:gs>
           </a:gsLst>
-          <a:path path="circle">
-            <a:fillToRect l="50000" t="-80000" r="50000" b="180000"/>
-          </a:path>
-        </a:gradFill>
-        <a:gradFill rotWithShape="1">
-          <a:gsLst>
-            <a:gs pos="0">
-              <a:schemeClr val="phClr">
-                <a:tint val="80000"/>
-                <a:satMod val="300000"/>
-              </a:schemeClr>
-            </a:gs>
-            <a:gs pos="100000">
-              <a:schemeClr val="phClr">
-                <a:shade val="30000"/>
-                <a:satMod val="200000"/>
-              </a:schemeClr>
-            </a:gs>
-          </a:gsLst>
-          <a:path path="circle">
-            <a:fillToRect l="50000" t="50000" r="50000" b="50000"/>
-          </a:path>
+          <a:lin ang="5400000" scaled="0"/>
         </a:gradFill>
       </a:bgFillStyleLst>
     </a:fmtScheme>
   </a:themeElements>
   <a:objectDefaults>
-    <a:spDef>
-      <a:spPr/>
-      <a:bodyPr/>
-      <a:lstStyle/>
-      <a:style>
-        <a:lnRef idx="1">
-          <a:schemeClr val="accent1"/>
-        </a:lnRef>
-        <a:fillRef idx="3">
-          <a:schemeClr val="accent1"/>
-        </a:fillRef>
-        <a:effectRef idx="2">
-          <a:schemeClr val="accent1"/>
-        </a:effectRef>
-        <a:fontRef idx="minor">
-          <a:schemeClr val="lt1"/>
-        </a:fontRef>
-      </a:style>
-    </a:spDef>
     <a:lnDef>
       <a:spPr/>
       <a:bodyPr/>
@@ -15922,5 +14888,10 @@
     </a:lnDef>
   </a:objectDefaults>
   <a:extraClrSchemeLst/>
+  <a:extLst>
+    <a:ext uri="{05A4C25C-085E-4340-85A3-A5531E510DB2}">
+      <thm15:themeFamily xmlns:thm15="http://schemas.microsoft.com/office/thememl/2012/main" name="Office Theme" id="{2E142A2C-CD16-42D6-873A-C26D2A0506FA}" vid="{1BDDFF52-6CD6-40A5-AB3C-68EB2F1E4D0A}"/>
+    </a:ext>
+  </a:extLst>
 </a:theme>
 </file>